--- a/Dynamic_Customer_Intelligence.pptx
+++ b/Dynamic_Customer_Intelligence.pptx
@@ -972,7 +972,7 @@
         </p:nvSpPr>
         <p:spPr>
           <a:xfrm>
-            <a:off x="457200" y="274320"/>
+            <a:off x="457200" y="256032"/>
             <a:ext cx="11247120" cy="420624"/>
           </a:xfrm>
           <a:prstGeom prst="rect">
@@ -989,7 +989,7 @@
               <a:buNone/>
             </a:pPr>
             <a:r>
-              <a:rPr lang="en-US" sz="2500" b="1" dirty="0">
+              <a:rPr lang="en-US" sz="2600" b="1" dirty="0">
                 <a:solidFill>
                   <a:srgbClr val="12304F"/>
                 </a:solidFill>
@@ -999,7 +999,7 @@
               </a:rPr>
               <a:t>Dynamic Customer Intelligence for Personalized Insurance</a:t>
             </a:r>
-            <a:endParaRPr lang="en-US" sz="2500" dirty="0"/>
+            <a:endParaRPr lang="en-US" sz="2600" dirty="0"/>
           </a:p>
         </p:txBody>
       </p:sp>
@@ -1011,7 +1011,7 @@
         </p:nvSpPr>
         <p:spPr>
           <a:xfrm>
-            <a:off x="457200" y="731520"/>
+            <a:off x="457200" y="713232"/>
             <a:ext cx="11247120" cy="457200"/>
           </a:xfrm>
           <a:prstGeom prst="rect">
@@ -1026,12 +1026,12 @@
           <a:p>
             <a:pPr indent="0" marL="0">
               <a:lnSpc>
-                <a:spcPct val="95000"/>
+                <a:spcPct val="98000"/>
               </a:lnSpc>
               <a:buNone/>
             </a:pPr>
             <a:r>
-              <a:rPr lang="en-US" sz="1150" i="1" dirty="0">
+              <a:rPr lang="en-US" sz="1300" i="1" dirty="0">
                 <a:solidFill>
                   <a:srgbClr val="0E7C86"/>
                 </a:solidFill>
@@ -1041,7 +1041,7 @@
               </a:rPr>
               <a:t>One system that learns from everything a customer does, keeps an always-current picture of who they are and what they need, and uses it to make every interaction more relevant.</a:t>
             </a:r>
-            <a:endParaRPr lang="en-US" sz="1150" dirty="0"/>
+            <a:endParaRPr lang="en-US" sz="1300" dirty="0"/>
           </a:p>
         </p:txBody>
       </p:sp>
@@ -1053,12 +1053,12 @@
         </p:nvSpPr>
         <p:spPr>
           <a:xfrm>
-            <a:off x="457200" y="1316736"/>
-            <a:ext cx="3200400" cy="1481328"/>
+            <a:off x="457200" y="1298448"/>
+            <a:ext cx="3246120" cy="1664208"/>
           </a:xfrm>
           <a:prstGeom prst="roundRect">
             <a:avLst>
-              <a:gd name="adj" fmla="val 5556"/>
+              <a:gd name="adj" fmla="val 4945"/>
             </a:avLst>
           </a:prstGeom>
           <a:solidFill>
@@ -1080,12 +1080,12 @@
         </p:nvSpPr>
         <p:spPr>
           <a:xfrm>
-            <a:off x="8531352" y="1316736"/>
-            <a:ext cx="3200400" cy="1481328"/>
+            <a:off x="8485632" y="1298448"/>
+            <a:ext cx="3246120" cy="1664208"/>
           </a:xfrm>
           <a:prstGeom prst="roundRect">
             <a:avLst>
-              <a:gd name="adj" fmla="val 5556"/>
+              <a:gd name="adj" fmla="val 4945"/>
             </a:avLst>
           </a:prstGeom>
           <a:solidFill>
@@ -1108,7 +1108,7 @@
         <p:spPr>
           <a:xfrm>
             <a:off x="457200" y="1408176"/>
-            <a:ext cx="3200400" cy="182880"/>
+            <a:ext cx="3246120" cy="219456"/>
           </a:xfrm>
           <a:prstGeom prst="rect">
             <a:avLst/>
@@ -1124,7 +1124,7 @@
               <a:buNone/>
             </a:pPr>
             <a:r>
-              <a:rPr lang="en-US" sz="950" b="1" spc="30" kern="0" dirty="0">
+              <a:rPr lang="en-US" sz="1100" b="1" spc="30" kern="0" dirty="0">
                 <a:solidFill>
                   <a:srgbClr val="12304F"/>
                 </a:solidFill>
@@ -1132,9 +1132,9 @@
                 <a:ea typeface="Calibri" pitchFamily="34" charset="-122"/>
                 <a:cs typeface="Calibri" pitchFamily="34" charset="-120"/>
               </a:rPr>
-              <a:t>WHAT WE ALREADY KNOW</a:t>
-            </a:r>
-            <a:endParaRPr lang="en-US" sz="950" dirty="0"/>
+              <a:t>DATA WE'LL START INGESTING</a:t>
+            </a:r>
+            <a:endParaRPr lang="en-US" sz="1100" dirty="0"/>
           </a:p>
         </p:txBody>
       </p:sp>
@@ -1146,8 +1146,8 @@
         </p:nvSpPr>
         <p:spPr>
           <a:xfrm>
-            <a:off x="457200" y="1591056"/>
-            <a:ext cx="3200400" cy="164592"/>
+            <a:off x="457200" y="1627632"/>
+            <a:ext cx="3246120" cy="182880"/>
           </a:xfrm>
           <a:prstGeom prst="rect">
             <a:avLst/>
@@ -1163,17 +1163,17 @@
               <a:buNone/>
             </a:pPr>
             <a:r>
-              <a:rPr lang="en-US" sz="780" i="1" dirty="0">
-                <a:solidFill>
-                  <a:srgbClr val="76889A"/>
-                </a:solidFill>
-                <a:latin typeface="Calibri" pitchFamily="34" charset="0"/>
-                <a:ea typeface="Calibri" pitchFamily="34" charset="-122"/>
-                <a:cs typeface="Calibri" pitchFamily="34" charset="-120"/>
-              </a:rPr>
-              <a:t>Every customer's history, in one place</a:t>
-            </a:r>
-            <a:endParaRPr lang="en-US" sz="780" dirty="0"/>
+              <a:rPr lang="en-US" sz="880" i="1" dirty="0">
+                <a:solidFill>
+                  <a:srgbClr val="6E8090"/>
+                </a:solidFill>
+                <a:latin typeface="Calibri" pitchFamily="34" charset="0"/>
+                <a:ea typeface="Calibri" pitchFamily="34" charset="-122"/>
+                <a:cs typeface="Calibri" pitchFamily="34" charset="-120"/>
+              </a:rPr>
+              <a:t>Customer activity we'll bring into one place</a:t>
+            </a:r>
+            <a:endParaRPr lang="en-US" sz="880" dirty="0"/>
           </a:p>
         </p:txBody>
       </p:sp>
@@ -1185,8 +1185,8 @@
         </p:nvSpPr>
         <p:spPr>
           <a:xfrm>
-            <a:off x="8531352" y="1408176"/>
-            <a:ext cx="3200400" cy="182880"/>
+            <a:off x="8485632" y="1408176"/>
+            <a:ext cx="3246120" cy="219456"/>
           </a:xfrm>
           <a:prstGeom prst="rect">
             <a:avLst/>
@@ -1202,7 +1202,7 @@
               <a:buNone/>
             </a:pPr>
             <a:r>
-              <a:rPr lang="en-US" sz="950" b="1" spc="30" kern="0" dirty="0">
+              <a:rPr lang="en-US" sz="1100" b="1" spc="30" kern="0" dirty="0">
                 <a:solidFill>
                   <a:srgbClr val="12304F"/>
                 </a:solidFill>
@@ -1212,7 +1212,7 @@
               </a:rPr>
               <a:t>WHAT THE ENGINE DECIDES</a:t>
             </a:r>
-            <a:endParaRPr lang="en-US" sz="950" dirty="0"/>
+            <a:endParaRPr lang="en-US" sz="1100" dirty="0"/>
           </a:p>
         </p:txBody>
       </p:sp>
@@ -1224,8 +1224,8 @@
         </p:nvSpPr>
         <p:spPr>
           <a:xfrm>
-            <a:off x="8531352" y="1591056"/>
-            <a:ext cx="3200400" cy="164592"/>
+            <a:off x="8485632" y="1627632"/>
+            <a:ext cx="3246120" cy="182880"/>
           </a:xfrm>
           <a:prstGeom prst="rect">
             <a:avLst/>
@@ -1241,9 +1241,9 @@
               <a:buNone/>
             </a:pPr>
             <a:r>
-              <a:rPr lang="en-US" sz="780" i="1" dirty="0">
-                <a:solidFill>
-                  <a:srgbClr val="76889A"/>
+              <a:rPr lang="en-US" sz="880" i="1" dirty="0">
+                <a:solidFill>
+                  <a:srgbClr val="6E8090"/>
                 </a:solidFill>
                 <a:latin typeface="Calibri" pitchFamily="34" charset="0"/>
                 <a:ea typeface="Calibri" pitchFamily="34" charset="-122"/>
@@ -1251,7 +1251,7 @@
               </a:rPr>
               <a:t>The right move for each customer</a:t>
             </a:r>
-            <a:endParaRPr lang="en-US" sz="780" dirty="0"/>
+            <a:endParaRPr lang="en-US" sz="880" dirty="0"/>
           </a:p>
         </p:txBody>
       </p:sp>
@@ -1263,8 +1263,8 @@
         </p:nvSpPr>
         <p:spPr>
           <a:xfrm>
-            <a:off x="594360" y="1746504"/>
-            <a:ext cx="237744" cy="237744"/>
+            <a:off x="621792" y="1810512"/>
+            <a:ext cx="256032" cy="256032"/>
           </a:xfrm>
           <a:prstGeom prst="ellipse">
             <a:avLst/>
@@ -1291,8 +1291,8 @@
         </p:blipFill>
         <p:spPr>
           <a:xfrm>
-            <a:off x="651419" y="1803563"/>
-            <a:ext cx="123627" cy="123627"/>
+            <a:off x="683240" y="1871960"/>
+            <a:ext cx="133137" cy="133137"/>
           </a:xfrm>
           <a:prstGeom prst="rect">
             <a:avLst/>
@@ -1307,8 +1307,8 @@
         </p:nvSpPr>
         <p:spPr>
           <a:xfrm>
-            <a:off x="886968" y="1746504"/>
-            <a:ext cx="1225296" cy="237744"/>
+            <a:off x="941832" y="1810512"/>
+            <a:ext cx="1280160" cy="256032"/>
           </a:xfrm>
           <a:prstGeom prst="rect">
             <a:avLst/>
@@ -1324,7 +1324,7 @@
               <a:buNone/>
             </a:pPr>
             <a:r>
-              <a:rPr lang="en-US" sz="820" dirty="0">
+              <a:rPr lang="en-US" sz="900" dirty="0">
                 <a:solidFill>
                   <a:srgbClr val="3E5163"/>
                 </a:solidFill>
@@ -1334,7 +1334,7 @@
               </a:rPr>
               <a:t>Policies held</a:t>
             </a:r>
-            <a:endParaRPr lang="en-US" sz="820" dirty="0"/>
+            <a:endParaRPr lang="en-US" sz="900" dirty="0"/>
           </a:p>
         </p:txBody>
       </p:sp>
@@ -1346,8 +1346,8 @@
         </p:nvSpPr>
         <p:spPr>
           <a:xfrm>
-            <a:off x="2075688" y="1746504"/>
-            <a:ext cx="237744" cy="237744"/>
+            <a:off x="2139696" y="1810512"/>
+            <a:ext cx="256032" cy="256032"/>
           </a:xfrm>
           <a:prstGeom prst="ellipse">
             <a:avLst/>
@@ -1374,8 +1374,8 @@
         </p:blipFill>
         <p:spPr>
           <a:xfrm>
-            <a:off x="2132747" y="1803563"/>
-            <a:ext cx="123627" cy="123627"/>
+            <a:off x="2201144" y="1871960"/>
+            <a:ext cx="133137" cy="133137"/>
           </a:xfrm>
           <a:prstGeom prst="rect">
             <a:avLst/>
@@ -1390,8 +1390,8 @@
         </p:nvSpPr>
         <p:spPr>
           <a:xfrm>
-            <a:off x="2368296" y="1746504"/>
-            <a:ext cx="1225296" cy="237744"/>
+            <a:off x="2459736" y="1810512"/>
+            <a:ext cx="1280160" cy="256032"/>
           </a:xfrm>
           <a:prstGeom prst="rect">
             <a:avLst/>
@@ -1407,7 +1407,7 @@
               <a:buNone/>
             </a:pPr>
             <a:r>
-              <a:rPr lang="en-US" sz="820" dirty="0">
+              <a:rPr lang="en-US" sz="900" dirty="0">
                 <a:solidFill>
                   <a:srgbClr val="3E5163"/>
                 </a:solidFill>
@@ -1417,7 +1417,7 @@
               </a:rPr>
               <a:t>Past claims</a:t>
             </a:r>
-            <a:endParaRPr lang="en-US" sz="820" dirty="0"/>
+            <a:endParaRPr lang="en-US" sz="900" dirty="0"/>
           </a:p>
         </p:txBody>
       </p:sp>
@@ -1429,8 +1429,8 @@
         </p:nvSpPr>
         <p:spPr>
           <a:xfrm>
-            <a:off x="594360" y="2093976"/>
-            <a:ext cx="237744" cy="237744"/>
+            <a:off x="621792" y="2194560"/>
+            <a:ext cx="256032" cy="256032"/>
           </a:xfrm>
           <a:prstGeom prst="ellipse">
             <a:avLst/>
@@ -1457,8 +1457,8 @@
         </p:blipFill>
         <p:spPr>
           <a:xfrm>
-            <a:off x="651419" y="2151035"/>
-            <a:ext cx="123627" cy="123627"/>
+            <a:off x="683240" y="2256008"/>
+            <a:ext cx="133137" cy="133137"/>
           </a:xfrm>
           <a:prstGeom prst="rect">
             <a:avLst/>
@@ -1473,8 +1473,8 @@
         </p:nvSpPr>
         <p:spPr>
           <a:xfrm>
-            <a:off x="886968" y="2093976"/>
-            <a:ext cx="1225296" cy="237744"/>
+            <a:off x="941832" y="2194560"/>
+            <a:ext cx="1280160" cy="256032"/>
           </a:xfrm>
           <a:prstGeom prst="rect">
             <a:avLst/>
@@ -1490,7 +1490,7 @@
               <a:buNone/>
             </a:pPr>
             <a:r>
-              <a:rPr lang="en-US" sz="820" dirty="0">
+              <a:rPr lang="en-US" sz="900" dirty="0">
                 <a:solidFill>
                   <a:srgbClr val="3E5163"/>
                 </a:solidFill>
@@ -1498,9 +1498,9 @@
                 <a:ea typeface="Calibri" pitchFamily="34" charset="-122"/>
                 <a:cs typeface="Calibri" pitchFamily="34" charset="-120"/>
               </a:rPr>
-              <a:t>App &amp; web activity</a:t>
-            </a:r>
-            <a:endParaRPr lang="en-US" sz="820" dirty="0"/>
+              <a:t>App &amp; website</a:t>
+            </a:r>
+            <a:endParaRPr lang="en-US" sz="900" dirty="0"/>
           </a:p>
         </p:txBody>
       </p:sp>
@@ -1512,8 +1512,8 @@
         </p:nvSpPr>
         <p:spPr>
           <a:xfrm>
-            <a:off x="2075688" y="2093976"/>
-            <a:ext cx="237744" cy="237744"/>
+            <a:off x="2139696" y="2194560"/>
+            <a:ext cx="256032" cy="256032"/>
           </a:xfrm>
           <a:prstGeom prst="ellipse">
             <a:avLst/>
@@ -1540,8 +1540,8 @@
         </p:blipFill>
         <p:spPr>
           <a:xfrm>
-            <a:off x="2132747" y="2151035"/>
-            <a:ext cx="123627" cy="123627"/>
+            <a:off x="2201144" y="2256008"/>
+            <a:ext cx="133137" cy="133137"/>
           </a:xfrm>
           <a:prstGeom prst="rect">
             <a:avLst/>
@@ -1556,8 +1556,8 @@
         </p:nvSpPr>
         <p:spPr>
           <a:xfrm>
-            <a:off x="2368296" y="2093976"/>
-            <a:ext cx="1225296" cy="237744"/>
+            <a:off x="2459736" y="2194560"/>
+            <a:ext cx="1280160" cy="256032"/>
           </a:xfrm>
           <a:prstGeom prst="rect">
             <a:avLst/>
@@ -1573,7 +1573,7 @@
               <a:buNone/>
             </a:pPr>
             <a:r>
-              <a:rPr lang="en-US" sz="820" dirty="0">
+              <a:rPr lang="en-US" sz="900" dirty="0">
                 <a:solidFill>
                   <a:srgbClr val="3E5163"/>
                 </a:solidFill>
@@ -1583,7 +1583,7 @@
               </a:rPr>
               <a:t>Quotes &amp; searches</a:t>
             </a:r>
-            <a:endParaRPr lang="en-US" sz="820" dirty="0"/>
+            <a:endParaRPr lang="en-US" sz="900" dirty="0"/>
           </a:p>
         </p:txBody>
       </p:sp>
@@ -1595,8 +1595,8 @@
         </p:nvSpPr>
         <p:spPr>
           <a:xfrm>
-            <a:off x="594360" y="2441448"/>
-            <a:ext cx="237744" cy="237744"/>
+            <a:off x="621792" y="2578608"/>
+            <a:ext cx="256032" cy="256032"/>
           </a:xfrm>
           <a:prstGeom prst="ellipse">
             <a:avLst/>
@@ -1623,8 +1623,8 @@
         </p:blipFill>
         <p:spPr>
           <a:xfrm>
-            <a:off x="651419" y="2498507"/>
-            <a:ext cx="123627" cy="123627"/>
+            <a:off x="683240" y="2640056"/>
+            <a:ext cx="133137" cy="133137"/>
           </a:xfrm>
           <a:prstGeom prst="rect">
             <a:avLst/>
@@ -1639,8 +1639,8 @@
         </p:nvSpPr>
         <p:spPr>
           <a:xfrm>
-            <a:off x="886968" y="2441448"/>
-            <a:ext cx="1225296" cy="237744"/>
+            <a:off x="941832" y="2578608"/>
+            <a:ext cx="1280160" cy="256032"/>
           </a:xfrm>
           <a:prstGeom prst="rect">
             <a:avLst/>
@@ -1656,7 +1656,7 @@
               <a:buNone/>
             </a:pPr>
             <a:r>
-              <a:rPr lang="en-US" sz="820" dirty="0">
+              <a:rPr lang="en-US" sz="900" dirty="0">
                 <a:solidFill>
                   <a:srgbClr val="3E5163"/>
                 </a:solidFill>
@@ -1664,9 +1664,9 @@
                 <a:ea typeface="Calibri" pitchFamily="34" charset="-122"/>
                 <a:cs typeface="Calibri" pitchFamily="34" charset="-120"/>
               </a:rPr>
-              <a:t>Service contacts</a:t>
-            </a:r>
-            <a:endParaRPr lang="en-US" sz="820" dirty="0"/>
+              <a:t>Service calls</a:t>
+            </a:r>
+            <a:endParaRPr lang="en-US" sz="900" dirty="0"/>
           </a:p>
         </p:txBody>
       </p:sp>
@@ -1678,8 +1678,8 @@
         </p:nvSpPr>
         <p:spPr>
           <a:xfrm>
-            <a:off x="2075688" y="2441448"/>
-            <a:ext cx="237744" cy="237744"/>
+            <a:off x="2139696" y="2578608"/>
+            <a:ext cx="256032" cy="256032"/>
           </a:xfrm>
           <a:prstGeom prst="ellipse">
             <a:avLst/>
@@ -1706,8 +1706,8 @@
         </p:blipFill>
         <p:spPr>
           <a:xfrm>
-            <a:off x="2132747" y="2498507"/>
-            <a:ext cx="123627" cy="123627"/>
+            <a:off x="2201144" y="2640056"/>
+            <a:ext cx="133137" cy="133137"/>
           </a:xfrm>
           <a:prstGeom prst="rect">
             <a:avLst/>
@@ -1722,8 +1722,8 @@
         </p:nvSpPr>
         <p:spPr>
           <a:xfrm>
-            <a:off x="2368296" y="2441448"/>
-            <a:ext cx="1225296" cy="237744"/>
+            <a:off x="2459736" y="2578608"/>
+            <a:ext cx="1280160" cy="256032"/>
           </a:xfrm>
           <a:prstGeom prst="rect">
             <a:avLst/>
@@ -1739,7 +1739,7 @@
               <a:buNone/>
             </a:pPr>
             <a:r>
-              <a:rPr lang="en-US" sz="820" dirty="0">
+              <a:rPr lang="en-US" sz="900" dirty="0">
                 <a:solidFill>
                   <a:srgbClr val="3E5163"/>
                 </a:solidFill>
@@ -1749,7 +1749,7 @@
               </a:rPr>
               <a:t>Agent &amp; calls</a:t>
             </a:r>
-            <a:endParaRPr lang="en-US" sz="820" dirty="0"/>
+            <a:endParaRPr lang="en-US" sz="900" dirty="0"/>
           </a:p>
         </p:txBody>
       </p:sp>
@@ -1761,8 +1761,8 @@
         </p:nvSpPr>
         <p:spPr>
           <a:xfrm>
-            <a:off x="8668512" y="1746504"/>
-            <a:ext cx="237744" cy="237744"/>
+            <a:off x="8650224" y="1810512"/>
+            <a:ext cx="256032" cy="256032"/>
           </a:xfrm>
           <a:prstGeom prst="ellipse">
             <a:avLst/>
@@ -1789,8 +1789,8 @@
         </p:blipFill>
         <p:spPr>
           <a:xfrm>
-            <a:off x="8725571" y="1803563"/>
-            <a:ext cx="123627" cy="123627"/>
+            <a:off x="8711672" y="1871960"/>
+            <a:ext cx="133137" cy="133137"/>
           </a:xfrm>
           <a:prstGeom prst="rect">
             <a:avLst/>
@@ -1805,8 +1805,8 @@
         </p:nvSpPr>
         <p:spPr>
           <a:xfrm>
-            <a:off x="8961120" y="1746504"/>
-            <a:ext cx="1225296" cy="237744"/>
+            <a:off x="8970264" y="1810512"/>
+            <a:ext cx="1280160" cy="256032"/>
           </a:xfrm>
           <a:prstGeom prst="rect">
             <a:avLst/>
@@ -1822,7 +1822,7 @@
               <a:buNone/>
             </a:pPr>
             <a:r>
-              <a:rPr lang="en-US" sz="820" dirty="0">
+              <a:rPr lang="en-US" sz="900" dirty="0">
                 <a:solidFill>
                   <a:srgbClr val="3E5163"/>
                 </a:solidFill>
@@ -1830,9 +1830,9 @@
                 <a:ea typeface="Calibri" pitchFamily="34" charset="-122"/>
                 <a:cs typeface="Calibri" pitchFamily="34" charset="-120"/>
               </a:rPr>
-              <a:t>Most useful action</a:t>
-            </a:r>
-            <a:endParaRPr lang="en-US" sz="820" dirty="0"/>
+              <a:t>Best next action</a:t>
+            </a:r>
+            <a:endParaRPr lang="en-US" sz="900" dirty="0"/>
           </a:p>
         </p:txBody>
       </p:sp>
@@ -1844,8 +1844,8 @@
         </p:nvSpPr>
         <p:spPr>
           <a:xfrm>
-            <a:off x="10149840" y="1746504"/>
-            <a:ext cx="237744" cy="237744"/>
+            <a:off x="10168128" y="1810512"/>
+            <a:ext cx="256032" cy="256032"/>
           </a:xfrm>
           <a:prstGeom prst="ellipse">
             <a:avLst/>
@@ -1872,8 +1872,8 @@
         </p:blipFill>
         <p:spPr>
           <a:xfrm>
-            <a:off x="10206899" y="1803563"/>
-            <a:ext cx="123627" cy="123627"/>
+            <a:off x="10229576" y="1871960"/>
+            <a:ext cx="133137" cy="133137"/>
           </a:xfrm>
           <a:prstGeom prst="rect">
             <a:avLst/>
@@ -1888,8 +1888,8 @@
         </p:nvSpPr>
         <p:spPr>
           <a:xfrm>
-            <a:off x="10442448" y="1746504"/>
-            <a:ext cx="1225296" cy="237744"/>
+            <a:off x="10488168" y="1810512"/>
+            <a:ext cx="1280160" cy="256032"/>
           </a:xfrm>
           <a:prstGeom prst="rect">
             <a:avLst/>
@@ -1905,7 +1905,7 @@
               <a:buNone/>
             </a:pPr>
             <a:r>
-              <a:rPr lang="en-US" sz="820" dirty="0">
+              <a:rPr lang="en-US" sz="900" dirty="0">
                 <a:solidFill>
                   <a:srgbClr val="3E5163"/>
                 </a:solidFill>
@@ -1915,7 +1915,7 @@
               </a:rPr>
               <a:t>Right product</a:t>
             </a:r>
-            <a:endParaRPr lang="en-US" sz="820" dirty="0"/>
+            <a:endParaRPr lang="en-US" sz="900" dirty="0"/>
           </a:p>
         </p:txBody>
       </p:sp>
@@ -1927,8 +1927,8 @@
         </p:nvSpPr>
         <p:spPr>
           <a:xfrm>
-            <a:off x="8668512" y="2093976"/>
-            <a:ext cx="237744" cy="237744"/>
+            <a:off x="8650224" y="2194560"/>
+            <a:ext cx="256032" cy="256032"/>
           </a:xfrm>
           <a:prstGeom prst="ellipse">
             <a:avLst/>
@@ -1955,8 +1955,8 @@
         </p:blipFill>
         <p:spPr>
           <a:xfrm>
-            <a:off x="8725571" y="2151035"/>
-            <a:ext cx="123627" cy="123627"/>
+            <a:off x="8711672" y="2256008"/>
+            <a:ext cx="133137" cy="133137"/>
           </a:xfrm>
           <a:prstGeom prst="rect">
             <a:avLst/>
@@ -1971,8 +1971,8 @@
         </p:nvSpPr>
         <p:spPr>
           <a:xfrm>
-            <a:off x="8961120" y="2093976"/>
-            <a:ext cx="1225296" cy="237744"/>
+            <a:off x="8970264" y="2194560"/>
+            <a:ext cx="1280160" cy="256032"/>
           </a:xfrm>
           <a:prstGeom prst="rect">
             <a:avLst/>
@@ -1988,7 +1988,7 @@
               <a:buNone/>
             </a:pPr>
             <a:r>
-              <a:rPr lang="en-US" sz="820" dirty="0">
+              <a:rPr lang="en-US" sz="900" dirty="0">
                 <a:solidFill>
                   <a:srgbClr val="3E5163"/>
                 </a:solidFill>
@@ -1998,7 +1998,7 @@
               </a:rPr>
               <a:t>Right offer</a:t>
             </a:r>
-            <a:endParaRPr lang="en-US" sz="820" dirty="0"/>
+            <a:endParaRPr lang="en-US" sz="900" dirty="0"/>
           </a:p>
         </p:txBody>
       </p:sp>
@@ -2010,8 +2010,8 @@
         </p:nvSpPr>
         <p:spPr>
           <a:xfrm>
-            <a:off x="10149840" y="2093976"/>
-            <a:ext cx="237744" cy="237744"/>
+            <a:off x="10168128" y="2194560"/>
+            <a:ext cx="256032" cy="256032"/>
           </a:xfrm>
           <a:prstGeom prst="ellipse">
             <a:avLst/>
@@ -2038,8 +2038,8 @@
         </p:blipFill>
         <p:spPr>
           <a:xfrm>
-            <a:off x="10206899" y="2151035"/>
-            <a:ext cx="123627" cy="123627"/>
+            <a:off x="10229576" y="2256008"/>
+            <a:ext cx="133137" cy="133137"/>
           </a:xfrm>
           <a:prstGeom prst="rect">
             <a:avLst/>
@@ -2054,8 +2054,8 @@
         </p:nvSpPr>
         <p:spPr>
           <a:xfrm>
-            <a:off x="10442448" y="2093976"/>
-            <a:ext cx="1225296" cy="237744"/>
+            <a:off x="10488168" y="2194560"/>
+            <a:ext cx="1280160" cy="256032"/>
           </a:xfrm>
           <a:prstGeom prst="rect">
             <a:avLst/>
@@ -2071,7 +2071,7 @@
               <a:buNone/>
             </a:pPr>
             <a:r>
-              <a:rPr lang="en-US" sz="820" dirty="0">
+              <a:rPr lang="en-US" sz="900" dirty="0">
                 <a:solidFill>
                   <a:srgbClr val="3E5163"/>
                 </a:solidFill>
@@ -2081,7 +2081,7 @@
               </a:rPr>
               <a:t>Best channel</a:t>
             </a:r>
-            <a:endParaRPr lang="en-US" sz="820" dirty="0"/>
+            <a:endParaRPr lang="en-US" sz="900" dirty="0"/>
           </a:p>
         </p:txBody>
       </p:sp>
@@ -2093,8 +2093,8 @@
         </p:nvSpPr>
         <p:spPr>
           <a:xfrm>
-            <a:off x="8668512" y="2441448"/>
-            <a:ext cx="237744" cy="237744"/>
+            <a:off x="8650224" y="2578608"/>
+            <a:ext cx="256032" cy="256032"/>
           </a:xfrm>
           <a:prstGeom prst="ellipse">
             <a:avLst/>
@@ -2121,8 +2121,8 @@
         </p:blipFill>
         <p:spPr>
           <a:xfrm>
-            <a:off x="8725571" y="2498507"/>
-            <a:ext cx="123627" cy="123627"/>
+            <a:off x="8711672" y="2640056"/>
+            <a:ext cx="133137" cy="133137"/>
           </a:xfrm>
           <a:prstGeom prst="rect">
             <a:avLst/>
@@ -2137,8 +2137,8 @@
         </p:nvSpPr>
         <p:spPr>
           <a:xfrm>
-            <a:off x="8961120" y="2441448"/>
-            <a:ext cx="1225296" cy="237744"/>
+            <a:off x="8970264" y="2578608"/>
+            <a:ext cx="1280160" cy="256032"/>
           </a:xfrm>
           <a:prstGeom prst="rect">
             <a:avLst/>
@@ -2154,7 +2154,7 @@
               <a:buNone/>
             </a:pPr>
             <a:r>
-              <a:rPr lang="en-US" sz="820" dirty="0">
+              <a:rPr lang="en-US" sz="900" dirty="0">
                 <a:solidFill>
                   <a:srgbClr val="3E5163"/>
                 </a:solidFill>
@@ -2164,7 +2164,7 @@
               </a:rPr>
               <a:t>Best timing</a:t>
             </a:r>
-            <a:endParaRPr lang="en-US" sz="820" dirty="0"/>
+            <a:endParaRPr lang="en-US" sz="900" dirty="0"/>
           </a:p>
         </p:txBody>
       </p:sp>
@@ -2176,8 +2176,8 @@
         </p:nvSpPr>
         <p:spPr>
           <a:xfrm>
-            <a:off x="10149840" y="2441448"/>
-            <a:ext cx="237744" cy="237744"/>
+            <a:off x="10168128" y="2578608"/>
+            <a:ext cx="256032" cy="256032"/>
           </a:xfrm>
           <a:prstGeom prst="ellipse">
             <a:avLst/>
@@ -2204,8 +2204,8 @@
         </p:blipFill>
         <p:spPr>
           <a:xfrm>
-            <a:off x="10206899" y="2498507"/>
-            <a:ext cx="123627" cy="123627"/>
+            <a:off x="10229576" y="2640056"/>
+            <a:ext cx="133137" cy="133137"/>
           </a:xfrm>
           <a:prstGeom prst="rect">
             <a:avLst/>
@@ -2220,8 +2220,8 @@
         </p:nvSpPr>
         <p:spPr>
           <a:xfrm>
-            <a:off x="10442448" y="2441448"/>
-            <a:ext cx="1225296" cy="237744"/>
+            <a:off x="10488168" y="2578608"/>
+            <a:ext cx="1280160" cy="256032"/>
           </a:xfrm>
           <a:prstGeom prst="rect">
             <a:avLst/>
@@ -2237,7 +2237,7 @@
               <a:buNone/>
             </a:pPr>
             <a:r>
-              <a:rPr lang="en-US" sz="820" dirty="0">
+              <a:rPr lang="en-US" sz="900" dirty="0">
                 <a:solidFill>
                   <a:srgbClr val="3E5163"/>
                 </a:solidFill>
@@ -2245,9 +2245,9 @@
                 <a:ea typeface="Calibri" pitchFamily="34" charset="-122"/>
                 <a:cs typeface="Calibri" pitchFamily="34" charset="-120"/>
               </a:rPr>
-              <a:t>Or stay silent</a:t>
-            </a:r>
-            <a:endParaRPr lang="en-US" sz="820" dirty="0"/>
+              <a:t>Stay silent</a:t>
+            </a:r>
+            <a:endParaRPr lang="en-US" sz="900" dirty="0"/>
           </a:p>
         </p:txBody>
       </p:sp>
@@ -2259,8 +2259,8 @@
         </p:nvSpPr>
         <p:spPr>
           <a:xfrm>
-            <a:off x="5326380" y="1289304"/>
-            <a:ext cx="1536192" cy="1536192"/>
+            <a:off x="5225796" y="1261872"/>
+            <a:ext cx="1737360" cy="1737360"/>
           </a:xfrm>
           <a:prstGeom prst="ellipse">
             <a:avLst/>
@@ -2281,8 +2281,8 @@
         </p:nvSpPr>
         <p:spPr>
           <a:xfrm>
-            <a:off x="5417820" y="1380744"/>
-            <a:ext cx="1353312" cy="1353312"/>
+            <a:off x="5326380" y="1362456"/>
+            <a:ext cx="1536192" cy="1536192"/>
           </a:xfrm>
           <a:prstGeom prst="ellipse">
             <a:avLst/>
@@ -2301,8 +2301,8 @@
         </p:nvSpPr>
         <p:spPr>
           <a:xfrm>
-            <a:off x="5920740" y="1591056"/>
-            <a:ext cx="347472" cy="347472"/>
+            <a:off x="5893308" y="1563624"/>
+            <a:ext cx="402336" cy="402336"/>
           </a:xfrm>
           <a:prstGeom prst="ellipse">
             <a:avLst/>
@@ -2329,8 +2329,8 @@
         </p:blipFill>
         <p:spPr>
           <a:xfrm>
-            <a:off x="6004133" y="1674449"/>
-            <a:ext cx="180685" cy="180685"/>
+            <a:off x="5989869" y="1660185"/>
+            <a:ext cx="209215" cy="209215"/>
           </a:xfrm>
           <a:prstGeom prst="rect">
             <a:avLst/>
@@ -2345,8 +2345,8 @@
         </p:nvSpPr>
         <p:spPr>
           <a:xfrm>
-            <a:off x="5362956" y="2002536"/>
-            <a:ext cx="1463040" cy="420624"/>
+            <a:off x="5271516" y="2075688"/>
+            <a:ext cx="1645920" cy="457200"/>
           </a:xfrm>
           <a:prstGeom prst="rect">
             <a:avLst/>
@@ -2365,7 +2365,7 @@
               <a:buNone/>
             </a:pPr>
             <a:r>
-              <a:rPr lang="en-US" sz="1100" b="1" dirty="0">
+              <a:rPr lang="en-US" sz="1300" b="1" dirty="0">
                 <a:solidFill>
                   <a:srgbClr val="FFFFFF"/>
                 </a:solidFill>
@@ -2375,7 +2375,7 @@
               </a:rPr>
               <a:t>Customer</a:t>
             </a:r>
-            <a:endParaRPr lang="en-US" sz="1100" dirty="0"/>
+            <a:endParaRPr lang="en-US" sz="1300" dirty="0"/>
           </a:p>
           <a:p>
             <a:pPr algn="ctr" indent="0" marL="0">
@@ -2385,7 +2385,7 @@
               <a:buNone/>
             </a:pPr>
             <a:r>
-              <a:rPr lang="en-US" sz="1100" b="1" dirty="0">
+              <a:rPr lang="en-US" sz="1300" b="1" dirty="0">
                 <a:solidFill>
                   <a:srgbClr val="FFFFFF"/>
                 </a:solidFill>
@@ -2395,7 +2395,7 @@
               </a:rPr>
               <a:t>Behavioral DNA</a:t>
             </a:r>
-            <a:endParaRPr lang="en-US" sz="1100" dirty="0"/>
+            <a:endParaRPr lang="en-US" sz="1300" dirty="0"/>
           </a:p>
         </p:txBody>
       </p:sp>
@@ -2407,8 +2407,8 @@
         </p:nvSpPr>
         <p:spPr>
           <a:xfrm>
-            <a:off x="5362956" y="2423160"/>
-            <a:ext cx="1463040" cy="164592"/>
+            <a:off x="5271516" y="2532888"/>
+            <a:ext cx="1645920" cy="182880"/>
           </a:xfrm>
           <a:prstGeom prst="rect">
             <a:avLst/>
@@ -2424,7 +2424,7 @@
               <a:buNone/>
             </a:pPr>
             <a:r>
-              <a:rPr lang="en-US" sz="740" i="1" dirty="0">
+              <a:rPr lang="en-US" sz="840" i="1" dirty="0">
                 <a:solidFill>
                   <a:srgbClr val="CFEAEC"/>
                 </a:solidFill>
@@ -2434,7 +2434,7 @@
               </a:rPr>
               <a:t>always updating</a:t>
             </a:r>
-            <a:endParaRPr lang="en-US" sz="740" dirty="0"/>
+            <a:endParaRPr lang="en-US" sz="840" dirty="0"/>
           </a:p>
         </p:txBody>
       </p:sp>
@@ -2446,8 +2446,8 @@
         </p:nvSpPr>
         <p:spPr>
           <a:xfrm>
-            <a:off x="3840480" y="1956816"/>
-            <a:ext cx="502920" cy="201168"/>
+            <a:off x="3858768" y="2011680"/>
+            <a:ext cx="548640" cy="237744"/>
           </a:xfrm>
           <a:prstGeom prst="rightArrow">
             <a:avLst/>
@@ -2466,8 +2466,8 @@
         </p:nvSpPr>
         <p:spPr>
           <a:xfrm>
-            <a:off x="7845552" y="1956816"/>
-            <a:ext cx="502920" cy="201168"/>
+            <a:off x="7772400" y="2011680"/>
+            <a:ext cx="548640" cy="237744"/>
           </a:xfrm>
           <a:prstGeom prst="rightArrow">
             <a:avLst/>
@@ -2486,7 +2486,7 @@
         </p:nvSpPr>
         <p:spPr>
           <a:xfrm>
-            <a:off x="457200" y="2962656"/>
+            <a:off x="457200" y="3017520"/>
             <a:ext cx="11247120" cy="201168"/>
           </a:xfrm>
           <a:prstGeom prst="rect">
@@ -2503,7 +2503,7 @@
               <a:buNone/>
             </a:pPr>
             <a:r>
-              <a:rPr lang="en-US" sz="1100" b="1" spc="50" kern="0" dirty="0">
+              <a:rPr lang="en-US" sz="1200" b="1" spc="50" kern="0" dirty="0">
                 <a:solidFill>
                   <a:srgbClr val="12304F"/>
                 </a:solidFill>
@@ -2513,7 +2513,7 @@
               </a:rPr>
               <a:t>ONE ENGINE — MANY APPLICATIONS</a:t>
             </a:r>
-            <a:endParaRPr lang="en-US" sz="1100" dirty="0"/>
+            <a:endParaRPr lang="en-US" sz="1200" dirty="0"/>
           </a:p>
         </p:txBody>
       </p:sp>
@@ -2525,8 +2525,8 @@
         </p:nvSpPr>
         <p:spPr>
           <a:xfrm>
-            <a:off x="1665351" y="3163824"/>
-            <a:ext cx="402336" cy="402336"/>
+            <a:off x="1610487" y="3273552"/>
+            <a:ext cx="512064" cy="512064"/>
           </a:xfrm>
           <a:prstGeom prst="ellipse">
             <a:avLst/>
@@ -2553,8 +2553,8 @@
         </p:blipFill>
         <p:spPr>
           <a:xfrm>
-            <a:off x="1761912" y="3260385"/>
-            <a:ext cx="209215" cy="209215"/>
+            <a:off x="1733382" y="3396447"/>
+            <a:ext cx="266273" cy="266273"/>
           </a:xfrm>
           <a:prstGeom prst="rect">
             <a:avLst/>
@@ -2569,8 +2569,8 @@
         </p:nvSpPr>
         <p:spPr>
           <a:xfrm>
-            <a:off x="566928" y="3621024"/>
-            <a:ext cx="2599182" cy="237744"/>
+            <a:off x="530352" y="3840480"/>
+            <a:ext cx="2672334" cy="237744"/>
           </a:xfrm>
           <a:prstGeom prst="rect">
             <a:avLst/>
@@ -2586,7 +2586,7 @@
               <a:buNone/>
             </a:pPr>
             <a:r>
-              <a:rPr lang="en-US" sz="1000" b="1" dirty="0">
+              <a:rPr lang="en-US" sz="1200" b="1" dirty="0">
                 <a:solidFill>
                   <a:srgbClr val="12304F"/>
                 </a:solidFill>
@@ -2596,7 +2596,7 @@
               </a:rPr>
               <a:t>Personalized cross-sell</a:t>
             </a:r>
-            <a:endParaRPr lang="en-US" sz="1000" dirty="0"/>
+            <a:endParaRPr lang="en-US" sz="1200" dirty="0"/>
           </a:p>
         </p:txBody>
       </p:sp>
@@ -2608,8 +2608,8 @@
         </p:nvSpPr>
         <p:spPr>
           <a:xfrm>
-            <a:off x="566928" y="3858768"/>
-            <a:ext cx="2599182" cy="566928"/>
+            <a:off x="530352" y="4096512"/>
+            <a:ext cx="2672334" cy="457200"/>
           </a:xfrm>
           <a:prstGeom prst="rect">
             <a:avLst/>
@@ -2623,12 +2623,12 @@
           <a:p>
             <a:pPr algn="ctr" indent="0" marL="0">
               <a:lnSpc>
-                <a:spcPct val="94000"/>
+                <a:spcPct val="96000"/>
               </a:lnSpc>
               <a:buNone/>
             </a:pPr>
             <a:r>
-              <a:rPr lang="en-US" sz="830" dirty="0">
+              <a:rPr lang="en-US" sz="950" dirty="0">
                 <a:solidFill>
                   <a:srgbClr val="3E5163"/>
                 </a:solidFill>
@@ -2636,9 +2636,9 @@
                 <a:ea typeface="Calibri" pitchFamily="34" charset="-122"/>
                 <a:cs typeface="Calibri" pitchFamily="34" charset="-120"/>
               </a:rPr>
-              <a:t>Suggest the next product a customer really needs — like travel cover just after they search for a trip.</a:t>
-            </a:r>
-            <a:endParaRPr lang="en-US" sz="830" dirty="0"/>
+              <a:t>Offer the product a customer needs next — like travel cover just after a trip search.</a:t>
+            </a:r>
+            <a:endParaRPr lang="en-US" sz="950" dirty="0"/>
           </a:p>
         </p:txBody>
       </p:sp>
@@ -2650,8 +2650,8 @@
         </p:nvSpPr>
         <p:spPr>
           <a:xfrm>
-            <a:off x="4483989" y="3163824"/>
-            <a:ext cx="402336" cy="402336"/>
+            <a:off x="4429125" y="3273552"/>
+            <a:ext cx="512064" cy="512064"/>
           </a:xfrm>
           <a:prstGeom prst="ellipse">
             <a:avLst/>
@@ -2678,8 +2678,8 @@
         </p:blipFill>
         <p:spPr>
           <a:xfrm>
-            <a:off x="4580550" y="3260385"/>
-            <a:ext cx="209215" cy="209215"/>
+            <a:off x="4552020" y="3396447"/>
+            <a:ext cx="266273" cy="266273"/>
           </a:xfrm>
           <a:prstGeom prst="rect">
             <a:avLst/>
@@ -2694,8 +2694,8 @@
         </p:nvSpPr>
         <p:spPr>
           <a:xfrm>
-            <a:off x="3385566" y="3621024"/>
-            <a:ext cx="2599182" cy="237744"/>
+            <a:off x="3348990" y="3840480"/>
+            <a:ext cx="2672334" cy="237744"/>
           </a:xfrm>
           <a:prstGeom prst="rect">
             <a:avLst/>
@@ -2711,7 +2711,7 @@
               <a:buNone/>
             </a:pPr>
             <a:r>
-              <a:rPr lang="en-US" sz="1000" b="1" dirty="0">
+              <a:rPr lang="en-US" sz="1200" b="1" dirty="0">
                 <a:solidFill>
                   <a:srgbClr val="12304F"/>
                 </a:solidFill>
@@ -2721,7 +2721,7 @@
               </a:rPr>
               <a:t>Upsell &amp; better cover</a:t>
             </a:r>
-            <a:endParaRPr lang="en-US" sz="1000" dirty="0"/>
+            <a:endParaRPr lang="en-US" sz="1200" dirty="0"/>
           </a:p>
         </p:txBody>
       </p:sp>
@@ -2733,8 +2733,8 @@
         </p:nvSpPr>
         <p:spPr>
           <a:xfrm>
-            <a:off x="3385566" y="3858768"/>
-            <a:ext cx="2599182" cy="566928"/>
+            <a:off x="3348990" y="4096512"/>
+            <a:ext cx="2672334" cy="457200"/>
           </a:xfrm>
           <a:prstGeom prst="rect">
             <a:avLst/>
@@ -2748,12 +2748,12 @@
           <a:p>
             <a:pPr algn="ctr" indent="0" marL="0">
               <a:lnSpc>
-                <a:spcPct val="94000"/>
+                <a:spcPct val="96000"/>
               </a:lnSpc>
               <a:buNone/>
             </a:pPr>
             <a:r>
-              <a:rPr lang="en-US" sz="830" dirty="0">
+              <a:rPr lang="en-US" sz="950" dirty="0">
                 <a:solidFill>
                   <a:srgbClr val="3E5163"/>
                 </a:solidFill>
@@ -2761,9 +2761,9 @@
                 <a:ea typeface="Calibri" pitchFamily="34" charset="-122"/>
                 <a:cs typeface="Calibri" pitchFamily="34" charset="-120"/>
               </a:rPr>
-              <a:t>Offer stronger or wider protection when their situation shows they've outgrown their current cover.</a:t>
-            </a:r>
-            <a:endParaRPr lang="en-US" sz="830" dirty="0"/>
+              <a:t>Recommend stronger or wider cover when they've outgrown their current plan.</a:t>
+            </a:r>
+            <a:endParaRPr lang="en-US" sz="950" dirty="0"/>
           </a:p>
         </p:txBody>
       </p:sp>
@@ -2775,8 +2775,8 @@
         </p:nvSpPr>
         <p:spPr>
           <a:xfrm>
-            <a:off x="7302627" y="3163824"/>
-            <a:ext cx="402336" cy="402336"/>
+            <a:off x="7247763" y="3273552"/>
+            <a:ext cx="512064" cy="512064"/>
           </a:xfrm>
           <a:prstGeom prst="ellipse">
             <a:avLst/>
@@ -2803,8 +2803,8 @@
         </p:blipFill>
         <p:spPr>
           <a:xfrm>
-            <a:off x="7399188" y="3260385"/>
-            <a:ext cx="209215" cy="209215"/>
+            <a:off x="7370658" y="3396447"/>
+            <a:ext cx="266273" cy="266273"/>
           </a:xfrm>
           <a:prstGeom prst="rect">
             <a:avLst/>
@@ -2819,8 +2819,8 @@
         </p:nvSpPr>
         <p:spPr>
           <a:xfrm>
-            <a:off x="6204204" y="3621024"/>
-            <a:ext cx="2599182" cy="237744"/>
+            <a:off x="6167628" y="3840480"/>
+            <a:ext cx="2672334" cy="237744"/>
           </a:xfrm>
           <a:prstGeom prst="rect">
             <a:avLst/>
@@ -2836,7 +2836,7 @@
               <a:buNone/>
             </a:pPr>
             <a:r>
-              <a:rPr lang="en-US" sz="1000" b="1" dirty="0">
+              <a:rPr lang="en-US" sz="1200" b="1" dirty="0">
                 <a:solidFill>
                   <a:srgbClr val="12304F"/>
                 </a:solidFill>
@@ -2846,7 +2846,7 @@
               </a:rPr>
               <a:t>Renewal &amp; retention</a:t>
             </a:r>
-            <a:endParaRPr lang="en-US" sz="1000" dirty="0"/>
+            <a:endParaRPr lang="en-US" sz="1200" dirty="0"/>
           </a:p>
         </p:txBody>
       </p:sp>
@@ -2858,8 +2858,8 @@
         </p:nvSpPr>
         <p:spPr>
           <a:xfrm>
-            <a:off x="6204204" y="3858768"/>
-            <a:ext cx="2599182" cy="566928"/>
+            <a:off x="6167628" y="4096512"/>
+            <a:ext cx="2672334" cy="457200"/>
           </a:xfrm>
           <a:prstGeom prst="rect">
             <a:avLst/>
@@ -2873,12 +2873,12 @@
           <a:p>
             <a:pPr algn="ctr" indent="0" marL="0">
               <a:lnSpc>
-                <a:spcPct val="94000"/>
+                <a:spcPct val="96000"/>
               </a:lnSpc>
               <a:buNone/>
             </a:pPr>
             <a:r>
-              <a:rPr lang="en-US" sz="830" dirty="0">
+              <a:rPr lang="en-US" sz="950" dirty="0">
                 <a:solidFill>
                   <a:srgbClr val="3E5163"/>
                 </a:solidFill>
@@ -2886,9 +2886,9 @@
                 <a:ea typeface="Calibri" pitchFamily="34" charset="-122"/>
                 <a:cs typeface="Calibri" pitchFamily="34" charset="-120"/>
               </a:rPr>
-              <a:t>Spot customers likely to drop off before renewal, and step in early to keep them.</a:t>
-            </a:r>
-            <a:endParaRPr lang="en-US" sz="830" dirty="0"/>
+              <a:t>Catch likely lapses before renewal and act early — a call, a review or a fair offer.</a:t>
+            </a:r>
+            <a:endParaRPr lang="en-US" sz="950" dirty="0"/>
           </a:p>
         </p:txBody>
       </p:sp>
@@ -2900,8 +2900,8 @@
         </p:nvSpPr>
         <p:spPr>
           <a:xfrm>
-            <a:off x="10121265" y="3163824"/>
-            <a:ext cx="402336" cy="402336"/>
+            <a:off x="10066401" y="3273552"/>
+            <a:ext cx="512064" cy="512064"/>
           </a:xfrm>
           <a:prstGeom prst="ellipse">
             <a:avLst/>
@@ -2928,8 +2928,8 @@
         </p:blipFill>
         <p:spPr>
           <a:xfrm>
-            <a:off x="10217826" y="3260385"/>
-            <a:ext cx="209215" cy="209215"/>
+            <a:off x="10189296" y="3396447"/>
+            <a:ext cx="266273" cy="266273"/>
           </a:xfrm>
           <a:prstGeom prst="rect">
             <a:avLst/>
@@ -2944,8 +2944,8 @@
         </p:nvSpPr>
         <p:spPr>
           <a:xfrm>
-            <a:off x="9022842" y="3621024"/>
-            <a:ext cx="2599182" cy="237744"/>
+            <a:off x="8986266" y="3840480"/>
+            <a:ext cx="2672334" cy="237744"/>
           </a:xfrm>
           <a:prstGeom prst="rect">
             <a:avLst/>
@@ -2961,7 +2961,7 @@
               <a:buNone/>
             </a:pPr>
             <a:r>
-              <a:rPr lang="en-US" sz="1000" b="1" dirty="0">
+              <a:rPr lang="en-US" sz="1200" b="1" dirty="0">
                 <a:solidFill>
                   <a:srgbClr val="12304F"/>
                 </a:solidFill>
@@ -2971,7 +2971,7 @@
               </a:rPr>
               <a:t>Next best action</a:t>
             </a:r>
-            <a:endParaRPr lang="en-US" sz="1000" dirty="0"/>
+            <a:endParaRPr lang="en-US" sz="1200" dirty="0"/>
           </a:p>
         </p:txBody>
       </p:sp>
@@ -2983,8 +2983,8 @@
         </p:nvSpPr>
         <p:spPr>
           <a:xfrm>
-            <a:off x="9022842" y="3858768"/>
-            <a:ext cx="2599182" cy="566928"/>
+            <a:off x="8986266" y="4096512"/>
+            <a:ext cx="2672334" cy="457200"/>
           </a:xfrm>
           <a:prstGeom prst="rect">
             <a:avLst/>
@@ -2998,12 +2998,12 @@
           <a:p>
             <a:pPr algn="ctr" indent="0" marL="0">
               <a:lnSpc>
-                <a:spcPct val="94000"/>
+                <a:spcPct val="96000"/>
               </a:lnSpc>
               <a:buNone/>
             </a:pPr>
             <a:r>
-              <a:rPr lang="en-US" sz="830" dirty="0">
+              <a:rPr lang="en-US" sz="950" dirty="0">
                 <a:solidFill>
                   <a:srgbClr val="3E5163"/>
                 </a:solidFill>
@@ -3011,9 +3011,9 @@
                 <a:ea typeface="Calibri" pitchFamily="34" charset="-122"/>
                 <a:cs typeface="Calibri" pitchFamily="34" charset="-120"/>
               </a:rPr>
-              <a:t>Pick the single most useful thing to do now — which is sometimes to help, not to sell.</a:t>
-            </a:r>
-            <a:endParaRPr lang="en-US" sz="830" dirty="0"/>
+              <a:t>Choose the most useful thing to do now — often to help, educate or wait, not to sell.</a:t>
+            </a:r>
+            <a:endParaRPr lang="en-US" sz="950" dirty="0"/>
           </a:p>
         </p:txBody>
       </p:sp>
@@ -3025,8 +3025,8 @@
         </p:nvSpPr>
         <p:spPr>
           <a:xfrm>
-            <a:off x="1665351" y="4352544"/>
-            <a:ext cx="402336" cy="402336"/>
+            <a:off x="1610487" y="4462272"/>
+            <a:ext cx="512064" cy="512064"/>
           </a:xfrm>
           <a:prstGeom prst="ellipse">
             <a:avLst/>
@@ -3053,8 +3053,8 @@
         </p:blipFill>
         <p:spPr>
           <a:xfrm>
-            <a:off x="1761912" y="4449105"/>
-            <a:ext cx="209215" cy="209215"/>
+            <a:off x="1733382" y="4585167"/>
+            <a:ext cx="266273" cy="266273"/>
           </a:xfrm>
           <a:prstGeom prst="rect">
             <a:avLst/>
@@ -3069,8 +3069,8 @@
         </p:nvSpPr>
         <p:spPr>
           <a:xfrm>
-            <a:off x="566928" y="4809744"/>
-            <a:ext cx="2599182" cy="237744"/>
+            <a:off x="530352" y="5029200"/>
+            <a:ext cx="2672334" cy="237744"/>
           </a:xfrm>
           <a:prstGeom prst="rect">
             <a:avLst/>
@@ -3086,7 +3086,7 @@
               <a:buNone/>
             </a:pPr>
             <a:r>
-              <a:rPr lang="en-US" sz="1000" b="1" dirty="0">
+              <a:rPr lang="en-US" sz="1200" b="1" dirty="0">
                 <a:solidFill>
                   <a:srgbClr val="12304F"/>
                 </a:solidFill>
@@ -3096,7 +3096,7 @@
               </a:rPr>
               <a:t>Agent intelligence</a:t>
             </a:r>
-            <a:endParaRPr lang="en-US" sz="1000" dirty="0"/>
+            <a:endParaRPr lang="en-US" sz="1200" dirty="0"/>
           </a:p>
         </p:txBody>
       </p:sp>
@@ -3108,8 +3108,8 @@
         </p:nvSpPr>
         <p:spPr>
           <a:xfrm>
-            <a:off x="566928" y="5047488"/>
-            <a:ext cx="2599182" cy="566928"/>
+            <a:off x="530352" y="5285232"/>
+            <a:ext cx="2672334" cy="457200"/>
           </a:xfrm>
           <a:prstGeom prst="rect">
             <a:avLst/>
@@ -3123,12 +3123,12 @@
           <a:p>
             <a:pPr algn="ctr" indent="0" marL="0">
               <a:lnSpc>
-                <a:spcPct val="94000"/>
+                <a:spcPct val="96000"/>
               </a:lnSpc>
               <a:buNone/>
             </a:pPr>
             <a:r>
-              <a:rPr lang="en-US" sz="830" dirty="0">
+              <a:rPr lang="en-US" sz="950" dirty="0">
                 <a:solidFill>
                   <a:srgbClr val="3E5163"/>
                 </a:solidFill>
@@ -3136,9 +3136,9 @@
                 <a:ea typeface="Calibri" pitchFamily="34" charset="-122"/>
                 <a:cs typeface="Calibri" pitchFamily="34" charset="-120"/>
               </a:rPr>
-              <a:t>Hand agents ready-to-call leads, with the reason to call and what to talk about.</a:t>
-            </a:r>
-            <a:endParaRPr lang="en-US" sz="830" dirty="0"/>
+              <a:t>Give agents prioritized, ready-to-call leads with the reason, context and key points.</a:t>
+            </a:r>
+            <a:endParaRPr lang="en-US" sz="950" dirty="0"/>
           </a:p>
         </p:txBody>
       </p:sp>
@@ -3150,8 +3150,8 @@
         </p:nvSpPr>
         <p:spPr>
           <a:xfrm>
-            <a:off x="4483989" y="4352544"/>
-            <a:ext cx="402336" cy="402336"/>
+            <a:off x="4429125" y="4462272"/>
+            <a:ext cx="512064" cy="512064"/>
           </a:xfrm>
           <a:prstGeom prst="ellipse">
             <a:avLst/>
@@ -3178,8 +3178,8 @@
         </p:blipFill>
         <p:spPr>
           <a:xfrm>
-            <a:off x="4580550" y="4449105"/>
-            <a:ext cx="209215" cy="209215"/>
+            <a:off x="4552020" y="4585167"/>
+            <a:ext cx="266273" cy="266273"/>
           </a:xfrm>
           <a:prstGeom prst="rect">
             <a:avLst/>
@@ -3194,8 +3194,8 @@
         </p:nvSpPr>
         <p:spPr>
           <a:xfrm>
-            <a:off x="3385566" y="4809744"/>
-            <a:ext cx="2599182" cy="237744"/>
+            <a:off x="3348990" y="5029200"/>
+            <a:ext cx="2672334" cy="237744"/>
           </a:xfrm>
           <a:prstGeom prst="rect">
             <a:avLst/>
@@ -3211,7 +3211,7 @@
               <a:buNone/>
             </a:pPr>
             <a:r>
-              <a:rPr lang="en-US" sz="1000" b="1" dirty="0">
+              <a:rPr lang="en-US" sz="1200" b="1" dirty="0">
                 <a:solidFill>
                   <a:srgbClr val="12304F"/>
                 </a:solidFill>
@@ -3221,7 +3221,7 @@
               </a:rPr>
               <a:t>Journey orchestration</a:t>
             </a:r>
-            <a:endParaRPr lang="en-US" sz="1000" dirty="0"/>
+            <a:endParaRPr lang="en-US" sz="1200" dirty="0"/>
           </a:p>
         </p:txBody>
       </p:sp>
@@ -3233,8 +3233,8 @@
         </p:nvSpPr>
         <p:spPr>
           <a:xfrm>
-            <a:off x="3385566" y="5047488"/>
-            <a:ext cx="2599182" cy="566928"/>
+            <a:off x="3348990" y="5285232"/>
+            <a:ext cx="2672334" cy="457200"/>
           </a:xfrm>
           <a:prstGeom prst="rect">
             <a:avLst/>
@@ -3248,12 +3248,12 @@
           <a:p>
             <a:pPr algn="ctr" indent="0" marL="0">
               <a:lnSpc>
-                <a:spcPct val="94000"/>
+                <a:spcPct val="96000"/>
               </a:lnSpc>
               <a:buNone/>
             </a:pPr>
             <a:r>
-              <a:rPr lang="en-US" sz="830" dirty="0">
+              <a:rPr lang="en-US" sz="950" dirty="0">
                 <a:solidFill>
                   <a:srgbClr val="3E5163"/>
                 </a:solidFill>
@@ -3261,9 +3261,9 @@
                 <a:ea typeface="Calibri" pitchFamily="34" charset="-122"/>
                 <a:cs typeface="Calibri" pitchFamily="34" charset="-120"/>
               </a:rPr>
-              <a:t>Coordinate every channel so a customer gets one clear message, not several clashing ones.</a:t>
-            </a:r>
-            <a:endParaRPr lang="en-US" sz="830" dirty="0"/>
+              <a:t>Coordinate every channel so each customer hears one consistent message, not many.</a:t>
+            </a:r>
+            <a:endParaRPr lang="en-US" sz="950" dirty="0"/>
           </a:p>
         </p:txBody>
       </p:sp>
@@ -3275,8 +3275,8 @@
         </p:nvSpPr>
         <p:spPr>
           <a:xfrm>
-            <a:off x="7302627" y="4352544"/>
-            <a:ext cx="402336" cy="402336"/>
+            <a:off x="7247763" y="4462272"/>
+            <a:ext cx="512064" cy="512064"/>
           </a:xfrm>
           <a:prstGeom prst="ellipse">
             <a:avLst/>
@@ -3303,8 +3303,8 @@
         </p:blipFill>
         <p:spPr>
           <a:xfrm>
-            <a:off x="7399188" y="4449105"/>
-            <a:ext cx="209215" cy="209215"/>
+            <a:off x="7370658" y="4585167"/>
+            <a:ext cx="266273" cy="266273"/>
           </a:xfrm>
           <a:prstGeom prst="rect">
             <a:avLst/>
@@ -3319,8 +3319,8 @@
         </p:nvSpPr>
         <p:spPr>
           <a:xfrm>
-            <a:off x="6204204" y="4809744"/>
-            <a:ext cx="2599182" cy="237744"/>
+            <a:off x="6167628" y="5029200"/>
+            <a:ext cx="2672334" cy="237744"/>
           </a:xfrm>
           <a:prstGeom prst="rect">
             <a:avLst/>
@@ -3336,7 +3336,7 @@
               <a:buNone/>
             </a:pPr>
             <a:r>
-              <a:rPr lang="en-US" sz="1000" b="1" dirty="0">
+              <a:rPr lang="en-US" sz="1200" b="1" dirty="0">
                 <a:solidFill>
                   <a:srgbClr val="12304F"/>
                 </a:solidFill>
@@ -3346,7 +3346,7 @@
               </a:rPr>
               <a:t>Trigger-based engagement</a:t>
             </a:r>
-            <a:endParaRPr lang="en-US" sz="1000" dirty="0"/>
+            <a:endParaRPr lang="en-US" sz="1200" dirty="0"/>
           </a:p>
         </p:txBody>
       </p:sp>
@@ -3358,8 +3358,8 @@
         </p:nvSpPr>
         <p:spPr>
           <a:xfrm>
-            <a:off x="6204204" y="5047488"/>
-            <a:ext cx="2599182" cy="566928"/>
+            <a:off x="6167628" y="5285232"/>
+            <a:ext cx="2672334" cy="457200"/>
           </a:xfrm>
           <a:prstGeom prst="rect">
             <a:avLst/>
@@ -3373,12 +3373,12 @@
           <a:p>
             <a:pPr algn="ctr" indent="0" marL="0">
               <a:lnSpc>
-                <a:spcPct val="94000"/>
+                <a:spcPct val="96000"/>
               </a:lnSpc>
               <a:buNone/>
             </a:pPr>
             <a:r>
-              <a:rPr lang="en-US" sz="830" dirty="0">
+              <a:rPr lang="en-US" sz="950" dirty="0">
                 <a:solidFill>
                   <a:srgbClr val="3E5163"/>
                 </a:solidFill>
@@ -3386,9 +3386,9 @@
                 <a:ea typeface="Calibri" pitchFamily="34" charset="-122"/>
                 <a:cs typeface="Calibri" pitchFamily="34" charset="-120"/>
               </a:rPr>
-              <a:t>Respond the moment something matters — a dropped quote, a new claim, a missed payment.</a:t>
-            </a:r>
-            <a:endParaRPr lang="en-US" sz="830" dirty="0"/>
+              <a:t>React the instant something matters — a dropped quote, a new claim or a missed payment.</a:t>
+            </a:r>
+            <a:endParaRPr lang="en-US" sz="950" dirty="0"/>
           </a:p>
         </p:txBody>
       </p:sp>
@@ -3400,8 +3400,8 @@
         </p:nvSpPr>
         <p:spPr>
           <a:xfrm>
-            <a:off x="10121265" y="4352544"/>
-            <a:ext cx="402336" cy="402336"/>
+            <a:off x="10066401" y="4462272"/>
+            <a:ext cx="512064" cy="512064"/>
           </a:xfrm>
           <a:prstGeom prst="ellipse">
             <a:avLst/>
@@ -3428,8 +3428,8 @@
         </p:blipFill>
         <p:spPr>
           <a:xfrm>
-            <a:off x="10217826" y="4449105"/>
-            <a:ext cx="209215" cy="209215"/>
+            <a:off x="10189296" y="4585167"/>
+            <a:ext cx="266273" cy="266273"/>
           </a:xfrm>
           <a:prstGeom prst="rect">
             <a:avLst/>
@@ -3444,8 +3444,8 @@
         </p:nvSpPr>
         <p:spPr>
           <a:xfrm>
-            <a:off x="9022842" y="4809744"/>
-            <a:ext cx="2599182" cy="237744"/>
+            <a:off x="8986266" y="5029200"/>
+            <a:ext cx="2672334" cy="237744"/>
           </a:xfrm>
           <a:prstGeom prst="rect">
             <a:avLst/>
@@ -3461,7 +3461,7 @@
               <a:buNone/>
             </a:pPr>
             <a:r>
-              <a:rPr lang="en-US" sz="1000" b="1" dirty="0">
+              <a:rPr lang="en-US" sz="1200" b="1" dirty="0">
                 <a:solidFill>
                   <a:srgbClr val="12304F"/>
                 </a:solidFill>
@@ -3471,7 +3471,7 @@
               </a:rPr>
               <a:t>Offer &amp; channel fit</a:t>
             </a:r>
-            <a:endParaRPr lang="en-US" sz="1000" dirty="0"/>
+            <a:endParaRPr lang="en-US" sz="1200" dirty="0"/>
           </a:p>
         </p:txBody>
       </p:sp>
@@ -3483,8 +3483,8 @@
         </p:nvSpPr>
         <p:spPr>
           <a:xfrm>
-            <a:off x="9022842" y="5047488"/>
-            <a:ext cx="2599182" cy="566928"/>
+            <a:off x="8986266" y="5285232"/>
+            <a:ext cx="2672334" cy="457200"/>
           </a:xfrm>
           <a:prstGeom prst="rect">
             <a:avLst/>
@@ -3498,12 +3498,12 @@
           <a:p>
             <a:pPr algn="ctr" indent="0" marL="0">
               <a:lnSpc>
-                <a:spcPct val="94000"/>
+                <a:spcPct val="96000"/>
               </a:lnSpc>
               <a:buNone/>
             </a:pPr>
             <a:r>
-              <a:rPr lang="en-US" sz="830" dirty="0">
+              <a:rPr lang="en-US" sz="950" dirty="0">
                 <a:solidFill>
                   <a:srgbClr val="3E5163"/>
                 </a:solidFill>
@@ -3511,9 +3511,9 @@
                 <a:ea typeface="Calibri" pitchFamily="34" charset="-122"/>
                 <a:cs typeface="Calibri" pitchFamily="34" charset="-120"/>
               </a:rPr>
-              <a:t>Choose the right offer, the right channel and the right time — and how often to reach out.</a:t>
-            </a:r>
-            <a:endParaRPr lang="en-US" sz="830" dirty="0"/>
+              <a:t>Match the right offer to the right channel and time — and how often to make contact.</a:t>
+            </a:r>
+            <a:endParaRPr lang="en-US" sz="950" dirty="0"/>
           </a:p>
         </p:txBody>
       </p:sp>
@@ -3525,7 +3525,7 @@
         </p:nvSpPr>
         <p:spPr>
           <a:xfrm>
-            <a:off x="457200" y="5669280"/>
+            <a:off x="457200" y="5650992"/>
             <a:ext cx="11274552" cy="0"/>
           </a:xfrm>
           <a:prstGeom prst="line">
@@ -3548,8 +3548,8 @@
         </p:nvSpPr>
         <p:spPr>
           <a:xfrm>
-            <a:off x="530352" y="5724144"/>
-            <a:ext cx="329184" cy="329184"/>
+            <a:off x="530352" y="5687568"/>
+            <a:ext cx="365760" cy="365760"/>
           </a:xfrm>
           <a:prstGeom prst="ellipse">
             <a:avLst/>
@@ -3576,8 +3576,8 @@
         </p:blipFill>
         <p:spPr>
           <a:xfrm>
-            <a:off x="609356" y="5803148"/>
-            <a:ext cx="171176" cy="171176"/>
+            <a:off x="618134" y="5775350"/>
+            <a:ext cx="190195" cy="190195"/>
           </a:xfrm>
           <a:prstGeom prst="rect">
             <a:avLst/>
@@ -3592,8 +3592,8 @@
         </p:nvSpPr>
         <p:spPr>
           <a:xfrm>
-            <a:off x="932688" y="5760720"/>
-            <a:ext cx="2269998" cy="237744"/>
+            <a:off x="969264" y="5724144"/>
+            <a:ext cx="2233422" cy="274320"/>
           </a:xfrm>
           <a:prstGeom prst="rect">
             <a:avLst/>
@@ -3609,7 +3609,7 @@
               <a:buNone/>
             </a:pPr>
             <a:r>
-              <a:rPr lang="en-US" sz="1050" b="1" dirty="0">
+              <a:rPr lang="en-US" sz="1200" b="1" dirty="0">
                 <a:solidFill>
                   <a:srgbClr val="12304F"/>
                 </a:solidFill>
@@ -3619,7 +3619,7 @@
               </a:rPr>
               <a:t>Revenue growth</a:t>
             </a:r>
-            <a:endParaRPr lang="en-US" sz="1050" dirty="0"/>
+            <a:endParaRPr lang="en-US" sz="1200" dirty="0"/>
           </a:p>
         </p:txBody>
       </p:sp>
@@ -3632,7 +3632,7 @@
         <p:spPr>
           <a:xfrm>
             <a:off x="493776" y="6053328"/>
-            <a:ext cx="2672334" cy="402336"/>
+            <a:ext cx="2690622" cy="384048"/>
           </a:xfrm>
           <a:prstGeom prst="rect">
             <a:avLst/>
@@ -3646,12 +3646,12 @@
           <a:p>
             <a:pPr indent="0" marL="0">
               <a:lnSpc>
-                <a:spcPct val="92000"/>
+                <a:spcPct val="94000"/>
               </a:lnSpc>
               <a:buNone/>
             </a:pPr>
             <a:r>
-              <a:rPr lang="en-US" sz="800" dirty="0">
+              <a:rPr lang="en-US" sz="900" dirty="0">
                 <a:solidFill>
                   <a:srgbClr val="3E5163"/>
                 </a:solidFill>
@@ -3659,9 +3659,9 @@
                 <a:ea typeface="Calibri" pitchFamily="34" charset="-122"/>
                 <a:cs typeface="Calibri" pitchFamily="34" charset="-120"/>
               </a:rPr>
-              <a:t>Customers hold more products that suit them, so each relationship is worth more.</a:t>
-            </a:r>
-            <a:endParaRPr lang="en-US" sz="800" dirty="0"/>
+              <a:t>Each customer holds more products that suit them, so every relationship is worth more.</a:t>
+            </a:r>
+            <a:endParaRPr lang="en-US" sz="900" dirty="0"/>
           </a:p>
         </p:txBody>
       </p:sp>
@@ -3673,8 +3673,8 @@
         </p:nvSpPr>
         <p:spPr>
           <a:xfrm>
-            <a:off x="3348990" y="5724144"/>
-            <a:ext cx="329184" cy="329184"/>
+            <a:off x="3348990" y="5687568"/>
+            <a:ext cx="365760" cy="365760"/>
           </a:xfrm>
           <a:prstGeom prst="ellipse">
             <a:avLst/>
@@ -3701,8 +3701,8 @@
         </p:blipFill>
         <p:spPr>
           <a:xfrm>
-            <a:off x="3427994" y="5803148"/>
-            <a:ext cx="171176" cy="171176"/>
+            <a:off x="3436772" y="5775350"/>
+            <a:ext cx="190195" cy="190195"/>
           </a:xfrm>
           <a:prstGeom prst="rect">
             <a:avLst/>
@@ -3717,8 +3717,8 @@
         </p:nvSpPr>
         <p:spPr>
           <a:xfrm>
-            <a:off x="3751326" y="5760720"/>
-            <a:ext cx="2269998" cy="237744"/>
+            <a:off x="3787902" y="5724144"/>
+            <a:ext cx="2233422" cy="274320"/>
           </a:xfrm>
           <a:prstGeom prst="rect">
             <a:avLst/>
@@ -3734,7 +3734,7 @@
               <a:buNone/>
             </a:pPr>
             <a:r>
-              <a:rPr lang="en-US" sz="1050" b="1" dirty="0">
+              <a:rPr lang="en-US" sz="1200" b="1" dirty="0">
                 <a:solidFill>
                   <a:srgbClr val="12304F"/>
                 </a:solidFill>
@@ -3744,7 +3744,7 @@
               </a:rPr>
               <a:t>Retention</a:t>
             </a:r>
-            <a:endParaRPr lang="en-US" sz="1050" dirty="0"/>
+            <a:endParaRPr lang="en-US" sz="1200" dirty="0"/>
           </a:p>
         </p:txBody>
       </p:sp>
@@ -3757,7 +3757,7 @@
         <p:spPr>
           <a:xfrm>
             <a:off x="3312414" y="6053328"/>
-            <a:ext cx="2672334" cy="402336"/>
+            <a:ext cx="2690622" cy="384048"/>
           </a:xfrm>
           <a:prstGeom prst="rect">
             <a:avLst/>
@@ -3771,12 +3771,12 @@
           <a:p>
             <a:pPr indent="0" marL="0">
               <a:lnSpc>
-                <a:spcPct val="92000"/>
+                <a:spcPct val="94000"/>
               </a:lnSpc>
               <a:buNone/>
             </a:pPr>
             <a:r>
-              <a:rPr lang="en-US" sz="800" dirty="0">
+              <a:rPr lang="en-US" sz="900" dirty="0">
                 <a:solidFill>
                   <a:srgbClr val="3E5163"/>
                 </a:solidFill>
@@ -3784,9 +3784,9 @@
                 <a:ea typeface="Calibri" pitchFamily="34" charset="-122"/>
                 <a:cs typeface="Calibri" pitchFamily="34" charset="-120"/>
               </a:rPr>
-              <a:t>More customers stay, because issues are caught and fixed before they leave.</a:t>
-            </a:r>
-            <a:endParaRPr lang="en-US" sz="800" dirty="0"/>
+              <a:t>Lapse risks are caught and fixed early, so more customers choose to renew.</a:t>
+            </a:r>
+            <a:endParaRPr lang="en-US" sz="900" dirty="0"/>
           </a:p>
         </p:txBody>
       </p:sp>
@@ -3798,8 +3798,8 @@
         </p:nvSpPr>
         <p:spPr>
           <a:xfrm>
-            <a:off x="6167628" y="5724144"/>
-            <a:ext cx="329184" cy="329184"/>
+            <a:off x="6167628" y="5687568"/>
+            <a:ext cx="365760" cy="365760"/>
           </a:xfrm>
           <a:prstGeom prst="ellipse">
             <a:avLst/>
@@ -3826,8 +3826,8 @@
         </p:blipFill>
         <p:spPr>
           <a:xfrm>
-            <a:off x="6246632" y="5803148"/>
-            <a:ext cx="171176" cy="171176"/>
+            <a:off x="6255410" y="5775350"/>
+            <a:ext cx="190195" cy="190195"/>
           </a:xfrm>
           <a:prstGeom prst="rect">
             <a:avLst/>
@@ -3842,8 +3842,8 @@
         </p:nvSpPr>
         <p:spPr>
           <a:xfrm>
-            <a:off x="6569964" y="5760720"/>
-            <a:ext cx="2269998" cy="237744"/>
+            <a:off x="6606540" y="5724144"/>
+            <a:ext cx="2233422" cy="274320"/>
           </a:xfrm>
           <a:prstGeom prst="rect">
             <a:avLst/>
@@ -3859,7 +3859,7 @@
               <a:buNone/>
             </a:pPr>
             <a:r>
-              <a:rPr lang="en-US" sz="1050" b="1" dirty="0">
+              <a:rPr lang="en-US" sz="1200" b="1" dirty="0">
                 <a:solidFill>
                   <a:srgbClr val="12304F"/>
                 </a:solidFill>
@@ -3869,7 +3869,7 @@
               </a:rPr>
               <a:t>Customer experience</a:t>
             </a:r>
-            <a:endParaRPr lang="en-US" sz="1050" dirty="0"/>
+            <a:endParaRPr lang="en-US" sz="1200" dirty="0"/>
           </a:p>
         </p:txBody>
       </p:sp>
@@ -3882,7 +3882,7 @@
         <p:spPr>
           <a:xfrm>
             <a:off x="6131052" y="6053328"/>
-            <a:ext cx="2672334" cy="402336"/>
+            <a:ext cx="2690622" cy="384048"/>
           </a:xfrm>
           <a:prstGeom prst="rect">
             <a:avLst/>
@@ -3896,12 +3896,12 @@
           <a:p>
             <a:pPr indent="0" marL="0">
               <a:lnSpc>
-                <a:spcPct val="92000"/>
+                <a:spcPct val="94000"/>
               </a:lnSpc>
               <a:buNone/>
             </a:pPr>
             <a:r>
-              <a:rPr lang="en-US" sz="800" dirty="0">
+              <a:rPr lang="en-US" sz="900" dirty="0">
                 <a:solidFill>
                   <a:srgbClr val="3E5163"/>
                 </a:solidFill>
@@ -3909,9 +3909,9 @@
                 <a:ea typeface="Calibri" pitchFamily="34" charset="-122"/>
                 <a:cs typeface="Calibri" pitchFamily="34" charset="-120"/>
               </a:rPr>
-              <a:t>People get relevant, well-timed messages instead of constant irrelevant noise.</a:t>
-            </a:r>
-            <a:endParaRPr lang="en-US" sz="800" dirty="0"/>
+              <a:t>People get relevant, well-timed messages that help — instead of irrelevant noise.</a:t>
+            </a:r>
+            <a:endParaRPr lang="en-US" sz="900" dirty="0"/>
           </a:p>
         </p:txBody>
       </p:sp>
@@ -3923,8 +3923,8 @@
         </p:nvSpPr>
         <p:spPr>
           <a:xfrm>
-            <a:off x="8986266" y="5724144"/>
-            <a:ext cx="329184" cy="329184"/>
+            <a:off x="8986266" y="5687568"/>
+            <a:ext cx="365760" cy="365760"/>
           </a:xfrm>
           <a:prstGeom prst="ellipse">
             <a:avLst/>
@@ -3951,8 +3951,8 @@
         </p:blipFill>
         <p:spPr>
           <a:xfrm>
-            <a:off x="9065270" y="5803148"/>
-            <a:ext cx="171176" cy="171176"/>
+            <a:off x="9074048" y="5775350"/>
+            <a:ext cx="190195" cy="190195"/>
           </a:xfrm>
           <a:prstGeom prst="rect">
             <a:avLst/>
@@ -3967,8 +3967,8 @@
         </p:nvSpPr>
         <p:spPr>
           <a:xfrm>
-            <a:off x="9388602" y="5760720"/>
-            <a:ext cx="2269998" cy="237744"/>
+            <a:off x="9425178" y="5724144"/>
+            <a:ext cx="2233422" cy="274320"/>
           </a:xfrm>
           <a:prstGeom prst="rect">
             <a:avLst/>
@@ -3984,7 +3984,7 @@
               <a:buNone/>
             </a:pPr>
             <a:r>
-              <a:rPr lang="en-US" sz="1050" b="1" dirty="0">
+              <a:rPr lang="en-US" sz="1200" b="1" dirty="0">
                 <a:solidFill>
                   <a:srgbClr val="12304F"/>
                 </a:solidFill>
@@ -3994,7 +3994,7 @@
               </a:rPr>
               <a:t>Efficiency</a:t>
             </a:r>
-            <a:endParaRPr lang="en-US" sz="1050" dirty="0"/>
+            <a:endParaRPr lang="en-US" sz="1200" dirty="0"/>
           </a:p>
         </p:txBody>
       </p:sp>
@@ -4007,7 +4007,7 @@
         <p:spPr>
           <a:xfrm>
             <a:off x="8949690" y="6053328"/>
-            <a:ext cx="2672334" cy="402336"/>
+            <a:ext cx="2690622" cy="384048"/>
           </a:xfrm>
           <a:prstGeom prst="rect">
             <a:avLst/>
@@ -4021,12 +4021,12 @@
           <a:p>
             <a:pPr indent="0" marL="0">
               <a:lnSpc>
-                <a:spcPct val="92000"/>
+                <a:spcPct val="94000"/>
               </a:lnSpc>
               <a:buNone/>
             </a:pPr>
             <a:r>
-              <a:rPr lang="en-US" sz="800" dirty="0">
+              <a:rPr lang="en-US" sz="900" dirty="0">
                 <a:solidFill>
                   <a:srgbClr val="3E5163"/>
                 </a:solidFill>
@@ -4034,9 +4034,9 @@
                 <a:ea typeface="Calibri" pitchFamily="34" charset="-122"/>
                 <a:cs typeface="Calibri" pitchFamily="34" charset="-120"/>
               </a:rPr>
-              <a:t>One shared engine does the work of many separate models and manual lists.</a:t>
-            </a:r>
-            <a:endParaRPr lang="en-US" sz="800" dirty="0"/>
+              <a:t>One shared engine replaces many overlapping models, lists and customer views.</a:t>
+            </a:r>
+            <a:endParaRPr lang="en-US" sz="900" dirty="0"/>
           </a:p>
         </p:txBody>
       </p:sp>
@@ -4048,12 +4048,12 @@
         </p:nvSpPr>
         <p:spPr>
           <a:xfrm>
-            <a:off x="457200" y="6473952"/>
-            <a:ext cx="11274552" cy="301752"/>
+            <a:off x="457200" y="6455664"/>
+            <a:ext cx="11274552" cy="292608"/>
           </a:xfrm>
           <a:prstGeom prst="roundRect">
             <a:avLst>
-              <a:gd name="adj" fmla="val 18182"/>
+              <a:gd name="adj" fmla="val 18750"/>
             </a:avLst>
           </a:prstGeom>
           <a:solidFill>
@@ -4070,8 +4070,8 @@
         </p:nvSpPr>
         <p:spPr>
           <a:xfrm>
-            <a:off x="640080" y="6473952"/>
-            <a:ext cx="10881360" cy="301752"/>
+            <a:off x="640080" y="6455664"/>
+            <a:ext cx="10881360" cy="292608"/>
           </a:xfrm>
           <a:prstGeom prst="rect">
             <a:avLst/>
@@ -4087,7 +4087,7 @@
               <a:buNone/>
             </a:pPr>
             <a:r>
-              <a:rPr lang="en-US" sz="900" b="1" dirty="0">
+              <a:rPr lang="en-US" sz="950" b="1" dirty="0">
                 <a:solidFill>
                   <a:srgbClr val="BFE6E7"/>
                 </a:solidFill>
@@ -4101,7 +4101,7 @@
               <a:buNone/>
             </a:pPr>
             <a:r>
-              <a:rPr lang="en-US" sz="1000" b="1" dirty="0">
+              <a:rPr lang="en-US" sz="1050" b="1" dirty="0">
                 <a:solidFill>
                   <a:srgbClr val="FFFFFF"/>
                 </a:solidFill>
@@ -4111,7 +4111,7 @@
               </a:rPr>
               <a:t>Move from static segments and product-led campaigns to continuously learning, customer-led engagement.</a:t>
             </a:r>
-            <a:endParaRPr lang="en-US" sz="900" dirty="0"/>
+            <a:endParaRPr lang="en-US" sz="950" dirty="0"/>
           </a:p>
         </p:txBody>
       </p:sp>
@@ -4155,8 +4155,8 @@
         </p:nvSpPr>
         <p:spPr>
           <a:xfrm>
-            <a:off x="457200" y="274320"/>
-            <a:ext cx="11247120" cy="420624"/>
+            <a:off x="457200" y="237744"/>
+            <a:ext cx="11247120" cy="402336"/>
           </a:xfrm>
           <a:prstGeom prst="rect">
             <a:avLst/>
@@ -4172,7 +4172,7 @@
               <a:buNone/>
             </a:pPr>
             <a:r>
-              <a:rPr lang="en-US" sz="2500" b="1" dirty="0">
+              <a:rPr lang="en-US" sz="2300" b="1" dirty="0">
                 <a:solidFill>
                   <a:srgbClr val="12304F"/>
                 </a:solidFill>
@@ -4180,9 +4180,9 @@
                 <a:ea typeface="Calibri" pitchFamily="34" charset="-122"/>
                 <a:cs typeface="Calibri" pitchFamily="34" charset="-120"/>
               </a:rPr>
-              <a:t>From Customer Data to Personalized Action</a:t>
-            </a:r>
-            <a:endParaRPr lang="en-US" sz="2500" dirty="0"/>
+              <a:t>Inside the Engine — Embedding-Based Dynamic Recommendations</a:t>
+            </a:r>
+            <a:endParaRPr lang="en-US" sz="2300" dirty="0"/>
           </a:p>
         </p:txBody>
       </p:sp>
@@ -4194,8 +4194,8 @@
         </p:nvSpPr>
         <p:spPr>
           <a:xfrm>
-            <a:off x="457200" y="731520"/>
-            <a:ext cx="11247120" cy="365760"/>
+            <a:off x="457200" y="658368"/>
+            <a:ext cx="11247120" cy="402336"/>
           </a:xfrm>
           <a:prstGeom prst="rect">
             <a:avLst/>
@@ -4209,12 +4209,12 @@
           <a:p>
             <a:pPr indent="0" marL="0">
               <a:lnSpc>
-                <a:spcPct val="95000"/>
+                <a:spcPct val="96000"/>
               </a:lnSpc>
               <a:buNone/>
             </a:pPr>
             <a:r>
-              <a:rPr lang="en-US" sz="1150" i="1" dirty="0">
+              <a:rPr lang="en-US" sz="1100" i="1" dirty="0">
                 <a:solidFill>
                   <a:srgbClr val="0E7C86"/>
                 </a:solidFill>
@@ -4222,9 +4222,9 @@
                 <a:ea typeface="Calibri" pitchFamily="34" charset="-122"/>
                 <a:cs typeface="Calibri" pitchFamily="34" charset="-120"/>
               </a:rPr>
-              <a:t>How raw customer data becomes the right action — and how every customer gets a live, need-based profile that keeps up with them.</a:t>
-            </a:r>
-            <a:endParaRPr lang="en-US" sz="1150" dirty="0"/>
+              <a:t>Every customer becomes a living “fingerprint” that updates as they behave — so look-alike customers get look-alike recommendations, new signals only make them sharper, and preferences shift in near real time (the way Spotify recommends music).</a:t>
+            </a:r>
+            <a:endParaRPr lang="en-US" sz="1100" dirty="0"/>
           </a:p>
         </p:txBody>
       </p:sp>
@@ -4236,16 +4236,20 @@
         </p:nvSpPr>
         <p:spPr>
           <a:xfrm>
-            <a:off x="1371600" y="2286000"/>
-            <a:ext cx="9656064" cy="0"/>
-          </a:xfrm>
-          <a:prstGeom prst="line">
-            <a:avLst/>
-          </a:prstGeom>
-          <a:noFill/>
-          <a:ln w="25400">
+            <a:off x="365760" y="1225296"/>
+            <a:ext cx="2395728" cy="2798064"/>
+          </a:xfrm>
+          <a:prstGeom prst="roundRect">
+            <a:avLst>
+              <a:gd name="adj" fmla="val 3053"/>
+            </a:avLst>
+          </a:prstGeom>
+          <a:solidFill>
+            <a:srgbClr val="F5F9FC"/>
+          </a:solidFill>
+          <a:ln w="12700">
             <a:solidFill>
-              <a:srgbClr val="D2E1EE"/>
+              <a:srgbClr val="1F6FB0"/>
             </a:solidFill>
             <a:prstDash val="solid"/>
           </a:ln>
@@ -4253,98 +4257,14 @@
       </p:sp>
       <p:sp>
         <p:nvSpPr>
-          <p:cNvPr id="5" name="Text 3"/>
-          <p:cNvSpPr txBox="1"/>
-          <p:nvPr/>
-        </p:nvSpPr>
-        <p:spPr>
-          <a:xfrm>
-            <a:off x="228600" y="1188720"/>
-            <a:ext cx="2286000" cy="384048"/>
-          </a:xfrm>
-          <a:prstGeom prst="rect">
-            <a:avLst/>
-          </a:prstGeom>
-          <a:noFill/>
-          <a:ln/>
-        </p:spPr>
-        <p:txBody>
-          <a:bodyPr wrap="square" lIns="0" tIns="0" rIns="0" bIns="0" rtlCol="0" anchor="t"/>
-          <a:lstStyle/>
-          <a:p>
-            <a:pPr algn="ctr" indent="0" marL="0">
-              <a:lnSpc>
-                <a:spcPct val="90000"/>
-              </a:lnSpc>
-              <a:buNone/>
-            </a:pPr>
-            <a:r>
-              <a:rPr lang="en-US" sz="1100" b="1" dirty="0">
-                <a:solidFill>
-                  <a:srgbClr val="12304F"/>
-                </a:solidFill>
-                <a:latin typeface="Calibri" pitchFamily="34" charset="0"/>
-                <a:ea typeface="Calibri" pitchFamily="34" charset="-122"/>
-                <a:cs typeface="Calibri" pitchFamily="34" charset="-120"/>
-              </a:rPr>
-              <a:t>Customer Data Foundation</a:t>
-            </a:r>
-            <a:endParaRPr lang="en-US" sz="1100" dirty="0"/>
-          </a:p>
-        </p:txBody>
-      </p:sp>
-      <p:sp>
-        <p:nvSpPr>
-          <p:cNvPr id="6" name="Text 4"/>
-          <p:cNvSpPr txBox="1"/>
-          <p:nvPr/>
-        </p:nvSpPr>
-        <p:spPr>
-          <a:xfrm>
-            <a:off x="228600" y="1554480"/>
-            <a:ext cx="2286000" cy="438912"/>
-          </a:xfrm>
-          <a:prstGeom prst="rect">
-            <a:avLst/>
-          </a:prstGeom>
-          <a:noFill/>
-          <a:ln/>
-        </p:spPr>
-        <p:txBody>
-          <a:bodyPr wrap="square" lIns="0" tIns="0" rIns="0" bIns="0" rtlCol="0" anchor="t"/>
-          <a:lstStyle/>
-          <a:p>
-            <a:pPr algn="ctr" indent="0" marL="0">
-              <a:lnSpc>
-                <a:spcPct val="94000"/>
-              </a:lnSpc>
-              <a:buNone/>
-            </a:pPr>
-            <a:r>
-              <a:rPr lang="en-US" sz="820" i="1" dirty="0">
-                <a:solidFill>
-                  <a:srgbClr val="76889A"/>
-                </a:solidFill>
-                <a:latin typeface="Calibri" pitchFamily="34" charset="0"/>
-                <a:ea typeface="Calibri" pitchFamily="34" charset="-122"/>
-                <a:cs typeface="Calibri" pitchFamily="34" charset="-120"/>
-              </a:rPr>
-              <a:t>Bring all the scattered customer data together into one reliable view.</a:t>
-            </a:r>
-            <a:endParaRPr lang="en-US" sz="820" dirty="0"/>
-          </a:p>
-        </p:txBody>
-      </p:sp>
-      <p:sp>
-        <p:nvSpPr>
-          <p:cNvPr id="7" name="Shape 5"/>
-          <p:cNvSpPr/>
-          <p:nvPr/>
-        </p:nvSpPr>
-        <p:spPr>
-          <a:xfrm>
-            <a:off x="1097280" y="2011680"/>
-            <a:ext cx="548640" cy="548640"/>
+          <p:cNvPr id="5" name="Shape 3"/>
+          <p:cNvSpPr/>
+          <p:nvPr/>
+        </p:nvSpPr>
+        <p:spPr>
+          <a:xfrm>
+            <a:off x="493776" y="1316736"/>
+            <a:ext cx="329184" cy="329184"/>
           </a:xfrm>
           <a:prstGeom prst="ellipse">
             <a:avLst/>
@@ -4357,7 +4277,7 @@
       </p:sp>
       <p:pic>
         <p:nvPicPr>
-          <p:cNvPr id="8" name="Image 0" descr="preencoded.png">    </p:cNvPr>
+          <p:cNvPr id="6" name="Image 0" descr="preencoded.png">    </p:cNvPr>
           <p:cNvPicPr>
             <a:picLocks noChangeAspect="1"/>
           </p:cNvPicPr>
@@ -4371,8 +4291,8 @@
         </p:blipFill>
         <p:spPr>
           <a:xfrm>
-            <a:off x="1228954" y="2143354"/>
-            <a:ext cx="285293" cy="285293"/>
+            <a:off x="572780" y="1395740"/>
+            <a:ext cx="171176" cy="171176"/>
           </a:xfrm>
           <a:prstGeom prst="rect">
             <a:avLst/>
@@ -4381,254 +4301,105 @@
       </p:pic>
       <p:sp>
         <p:nvSpPr>
+          <p:cNvPr id="7" name="Text 4"/>
+          <p:cNvSpPr txBox="1"/>
+          <p:nvPr/>
+        </p:nvSpPr>
+        <p:spPr>
+          <a:xfrm>
+            <a:off x="877824" y="1344168"/>
+            <a:ext cx="1847088" cy="201168"/>
+          </a:xfrm>
+          <a:prstGeom prst="rect">
+            <a:avLst/>
+          </a:prstGeom>
+          <a:noFill/>
+          <a:ln/>
+        </p:spPr>
+        <p:txBody>
+          <a:bodyPr wrap="square" lIns="0" tIns="0" rIns="0" bIns="0" rtlCol="0" anchor="ctr"/>
+          <a:lstStyle/>
+          <a:p>
+            <a:pPr indent="0" marL="0">
+              <a:buNone/>
+            </a:pPr>
+            <a:r>
+              <a:rPr lang="en-US" sz="1050" b="1" dirty="0">
+                <a:solidFill>
+                  <a:srgbClr val="12304F"/>
+                </a:solidFill>
+                <a:latin typeface="Calibri" pitchFamily="34" charset="0"/>
+                <a:ea typeface="Calibri" pitchFamily="34" charset="-122"/>
+                <a:cs typeface="Calibri" pitchFamily="34" charset="-120"/>
+              </a:rPr>
+              <a:t>DATA FOUNDATION</a:t>
+            </a:r>
+            <a:endParaRPr lang="en-US" sz="1050" dirty="0"/>
+          </a:p>
+        </p:txBody>
+      </p:sp>
+      <p:sp>
+        <p:nvSpPr>
+          <p:cNvPr id="8" name="Text 5"/>
+          <p:cNvSpPr txBox="1"/>
+          <p:nvPr/>
+        </p:nvSpPr>
+        <p:spPr>
+          <a:xfrm>
+            <a:off x="512064" y="1682496"/>
+            <a:ext cx="2121408" cy="164592"/>
+          </a:xfrm>
+          <a:prstGeom prst="rect">
+            <a:avLst/>
+          </a:prstGeom>
+          <a:noFill/>
+          <a:ln/>
+        </p:spPr>
+        <p:txBody>
+          <a:bodyPr wrap="square" lIns="0" tIns="0" rIns="0" bIns="0" rtlCol="0" anchor="t"/>
+          <a:lstStyle/>
+          <a:p>
+            <a:pPr indent="0" marL="0">
+              <a:buNone/>
+            </a:pPr>
+            <a:r>
+              <a:rPr lang="en-US" sz="760" i="1" dirty="0">
+                <a:solidFill>
+                  <a:srgbClr val="6E8090"/>
+                </a:solidFill>
+                <a:latin typeface="Calibri" pitchFamily="34" charset="0"/>
+                <a:ea typeface="Calibri" pitchFamily="34" charset="-122"/>
+                <a:cs typeface="Calibri" pitchFamily="34" charset="-120"/>
+              </a:rPr>
+              <a:t>Signals we ingest, per customer</a:t>
+            </a:r>
+            <a:endParaRPr lang="en-US" sz="760" dirty="0"/>
+          </a:p>
+        </p:txBody>
+      </p:sp>
+      <p:sp>
+        <p:nvSpPr>
           <p:cNvPr id="9" name="Shape 6"/>
           <p:cNvSpPr/>
           <p:nvPr/>
         </p:nvSpPr>
         <p:spPr>
           <a:xfrm>
-            <a:off x="1508760" y="1920240"/>
-            <a:ext cx="237744" cy="237744"/>
+            <a:off x="576072" y="1911096"/>
+            <a:ext cx="201168" cy="201168"/>
           </a:xfrm>
           <a:prstGeom prst="ellipse">
             <a:avLst/>
           </a:prstGeom>
           <a:solidFill>
-            <a:srgbClr val="12304F"/>
-          </a:solidFill>
-          <a:ln/>
-        </p:spPr>
-      </p:sp>
-      <p:sp>
-        <p:nvSpPr>
-          <p:cNvPr id="10" name="Text 7"/>
-          <p:cNvSpPr txBox="1"/>
-          <p:nvPr/>
-        </p:nvSpPr>
-        <p:spPr>
-          <a:xfrm>
-            <a:off x="1508760" y="1920240"/>
-            <a:ext cx="237744" cy="237744"/>
-          </a:xfrm>
-          <a:prstGeom prst="rect">
-            <a:avLst/>
-          </a:prstGeom>
-          <a:noFill/>
-          <a:ln/>
-        </p:spPr>
-        <p:txBody>
-          <a:bodyPr wrap="square" lIns="0" tIns="0" rIns="0" bIns="0" rtlCol="0" anchor="ctr"/>
-          <a:lstStyle/>
-          <a:p>
-            <a:pPr algn="ctr" indent="0" marL="0">
-              <a:buNone/>
-            </a:pPr>
-            <a:r>
-              <a:rPr lang="en-US" sz="1050" b="1" dirty="0">
-                <a:solidFill>
-                  <a:srgbClr val="FFFFFF"/>
-                </a:solidFill>
-                <a:latin typeface="Calibri" pitchFamily="34" charset="0"/>
-                <a:ea typeface="Calibri" pitchFamily="34" charset="-122"/>
-                <a:cs typeface="Calibri" pitchFamily="34" charset="-120"/>
-              </a:rPr>
-              <a:t>1</a:t>
-            </a:r>
-            <a:endParaRPr lang="en-US" sz="1050" dirty="0"/>
-          </a:p>
-        </p:txBody>
-      </p:sp>
-      <p:sp>
-        <p:nvSpPr>
-          <p:cNvPr id="11" name="Shape 8"/>
-          <p:cNvSpPr/>
-          <p:nvPr/>
-        </p:nvSpPr>
-        <p:spPr>
-          <a:xfrm>
-            <a:off x="256032" y="2724912"/>
-            <a:ext cx="2231136" cy="457200"/>
-          </a:xfrm>
-          <a:prstGeom prst="roundRect">
-            <a:avLst>
-              <a:gd name="adj" fmla="val 14000"/>
-            </a:avLst>
-          </a:prstGeom>
-          <a:solidFill>
             <a:srgbClr val="1F6FB0"/>
-          </a:solidFill>
-          <a:ln/>
-        </p:spPr>
-      </p:sp>
-      <p:sp>
-        <p:nvSpPr>
-          <p:cNvPr id="12" name="Text 9"/>
-          <p:cNvSpPr txBox="1"/>
-          <p:nvPr/>
-        </p:nvSpPr>
-        <p:spPr>
-          <a:xfrm>
-            <a:off x="310896" y="2724912"/>
-            <a:ext cx="2121408" cy="457200"/>
-          </a:xfrm>
-          <a:prstGeom prst="rect">
-            <a:avLst/>
-          </a:prstGeom>
-          <a:noFill/>
-          <a:ln/>
-        </p:spPr>
-        <p:txBody>
-          <a:bodyPr wrap="square" lIns="0" tIns="0" rIns="0" bIns="0" rtlCol="0" anchor="ctr"/>
-          <a:lstStyle/>
-          <a:p>
-            <a:pPr algn="ctr" indent="0" marL="0">
-              <a:lnSpc>
-                <a:spcPct val="90000"/>
-              </a:lnSpc>
-              <a:buNone/>
-            </a:pPr>
-            <a:r>
-              <a:rPr lang="en-US" sz="840" b="1" dirty="0">
-                <a:solidFill>
-                  <a:srgbClr val="FFFFFF"/>
-                </a:solidFill>
-                <a:latin typeface="Calibri" pitchFamily="34" charset="0"/>
-                <a:ea typeface="Calibri" pitchFamily="34" charset="-122"/>
-                <a:cs typeface="Calibri" pitchFamily="34" charset="-120"/>
-              </a:rPr>
-              <a:t>One unified customer view</a:t>
-            </a:r>
-            <a:endParaRPr lang="en-US" sz="840" dirty="0"/>
-          </a:p>
-        </p:txBody>
-      </p:sp>
-      <p:sp>
-        <p:nvSpPr>
-          <p:cNvPr id="13" name="Shape 10"/>
-          <p:cNvSpPr/>
-          <p:nvPr/>
-        </p:nvSpPr>
-        <p:spPr>
-          <a:xfrm>
-            <a:off x="1920240" y="2194560"/>
-            <a:ext cx="219456" cy="182880"/>
-          </a:xfrm>
-          <a:prstGeom prst="rightArrow">
-            <a:avLst/>
-          </a:prstGeom>
-          <a:solidFill>
-            <a:srgbClr val="12304F"/>
-          </a:solidFill>
-          <a:ln/>
-        </p:spPr>
-      </p:sp>
-      <p:sp>
-        <p:nvSpPr>
-          <p:cNvPr id="14" name="Text 11"/>
-          <p:cNvSpPr txBox="1"/>
-          <p:nvPr/>
-        </p:nvSpPr>
-        <p:spPr>
-          <a:xfrm>
-            <a:off x="2642616" y="1188720"/>
-            <a:ext cx="2286000" cy="384048"/>
-          </a:xfrm>
-          <a:prstGeom prst="rect">
-            <a:avLst/>
-          </a:prstGeom>
-          <a:noFill/>
-          <a:ln/>
-        </p:spPr>
-        <p:txBody>
-          <a:bodyPr wrap="square" lIns="0" tIns="0" rIns="0" bIns="0" rtlCol="0" anchor="t"/>
-          <a:lstStyle/>
-          <a:p>
-            <a:pPr algn="ctr" indent="0" marL="0">
-              <a:lnSpc>
-                <a:spcPct val="90000"/>
-              </a:lnSpc>
-              <a:buNone/>
-            </a:pPr>
-            <a:r>
-              <a:rPr lang="en-US" sz="1100" b="1" dirty="0">
-                <a:solidFill>
-                  <a:srgbClr val="12304F"/>
-                </a:solidFill>
-                <a:latin typeface="Calibri" pitchFamily="34" charset="0"/>
-                <a:ea typeface="Calibri" pitchFamily="34" charset="-122"/>
-                <a:cs typeface="Calibri" pitchFamily="34" charset="-120"/>
-              </a:rPr>
-              <a:t>Customer Interpretation</a:t>
-            </a:r>
-            <a:endParaRPr lang="en-US" sz="1100" dirty="0"/>
-          </a:p>
-        </p:txBody>
-      </p:sp>
-      <p:sp>
-        <p:nvSpPr>
-          <p:cNvPr id="15" name="Text 12"/>
-          <p:cNvSpPr txBox="1"/>
-          <p:nvPr/>
-        </p:nvSpPr>
-        <p:spPr>
-          <a:xfrm>
-            <a:off x="2642616" y="1554480"/>
-            <a:ext cx="2286000" cy="438912"/>
-          </a:xfrm>
-          <a:prstGeom prst="rect">
-            <a:avLst/>
-          </a:prstGeom>
-          <a:noFill/>
-          <a:ln/>
-        </p:spPr>
-        <p:txBody>
-          <a:bodyPr wrap="square" lIns="0" tIns="0" rIns="0" bIns="0" rtlCol="0" anchor="t"/>
-          <a:lstStyle/>
-          <a:p>
-            <a:pPr algn="ctr" indent="0" marL="0">
-              <a:lnSpc>
-                <a:spcPct val="94000"/>
-              </a:lnSpc>
-              <a:buNone/>
-            </a:pPr>
-            <a:r>
-              <a:rPr lang="en-US" sz="820" i="1" dirty="0">
-                <a:solidFill>
-                  <a:srgbClr val="76889A"/>
-                </a:solidFill>
-                <a:latin typeface="Calibri" pitchFamily="34" charset="0"/>
-                <a:ea typeface="Calibri" pitchFamily="34" charset="-122"/>
-                <a:cs typeface="Calibri" pitchFamily="34" charset="-120"/>
-              </a:rPr>
-              <a:t>Work out what each customer needs, wants and is about to do.</a:t>
-            </a:r>
-            <a:endParaRPr lang="en-US" sz="820" dirty="0"/>
-          </a:p>
-        </p:txBody>
-      </p:sp>
-      <p:sp>
-        <p:nvSpPr>
-          <p:cNvPr id="16" name="Shape 13"/>
-          <p:cNvSpPr/>
-          <p:nvPr/>
-        </p:nvSpPr>
-        <p:spPr>
-          <a:xfrm>
-            <a:off x="3511296" y="2011680"/>
-            <a:ext cx="548640" cy="548640"/>
-          </a:xfrm>
-          <a:prstGeom prst="ellipse">
-            <a:avLst/>
-          </a:prstGeom>
-          <a:solidFill>
-            <a:srgbClr val="0E7C86"/>
           </a:solidFill>
           <a:ln/>
         </p:spPr>
       </p:sp>
       <p:pic>
         <p:nvPicPr>
-          <p:cNvPr id="17" name="Image 1" descr="preencoded.png">    </p:cNvPr>
+          <p:cNvPr id="10" name="Image 1" descr="preencoded.png">    </p:cNvPr>
           <p:cNvPicPr>
             <a:picLocks noChangeAspect="1"/>
           </p:cNvPicPr>
@@ -4642,8 +4413,8 @@
         </p:blipFill>
         <p:spPr>
           <a:xfrm>
-            <a:off x="3642970" y="2143354"/>
-            <a:ext cx="285293" cy="285293"/>
+            <a:off x="624352" y="1959376"/>
+            <a:ext cx="104607" cy="104607"/>
           </a:xfrm>
           <a:prstGeom prst="rect">
             <a:avLst/>
@@ -4652,254 +4423,66 @@
       </p:pic>
       <p:sp>
         <p:nvSpPr>
-          <p:cNvPr id="18" name="Shape 14"/>
-          <p:cNvSpPr/>
-          <p:nvPr/>
-        </p:nvSpPr>
-        <p:spPr>
-          <a:xfrm>
-            <a:off x="3922776" y="1920240"/>
-            <a:ext cx="237744" cy="237744"/>
+          <p:cNvPr id="11" name="Text 7"/>
+          <p:cNvSpPr txBox="1"/>
+          <p:nvPr/>
+        </p:nvSpPr>
+        <p:spPr>
+          <a:xfrm>
+            <a:off x="859536" y="1901952"/>
+            <a:ext cx="1828800" cy="219456"/>
+          </a:xfrm>
+          <a:prstGeom prst="rect">
+            <a:avLst/>
+          </a:prstGeom>
+          <a:noFill/>
+          <a:ln/>
+        </p:spPr>
+        <p:txBody>
+          <a:bodyPr wrap="square" lIns="0" tIns="0" rIns="0" bIns="0" rtlCol="0" anchor="ctr"/>
+          <a:lstStyle/>
+          <a:p>
+            <a:pPr indent="0" marL="0">
+              <a:buNone/>
+            </a:pPr>
+            <a:r>
+              <a:rPr lang="en-US" sz="840" dirty="0">
+                <a:solidFill>
+                  <a:srgbClr val="3E5163"/>
+                </a:solidFill>
+                <a:latin typeface="Calibri" pitchFamily="34" charset="0"/>
+                <a:ea typeface="Calibri" pitchFamily="34" charset="-122"/>
+                <a:cs typeface="Calibri" pitchFamily="34" charset="-120"/>
+              </a:rPr>
+              <a:t>Policy history</a:t>
+            </a:r>
+            <a:endParaRPr lang="en-US" sz="840" dirty="0"/>
+          </a:p>
+        </p:txBody>
+      </p:sp>
+      <p:sp>
+        <p:nvSpPr>
+          <p:cNvPr id="12" name="Shape 8"/>
+          <p:cNvSpPr/>
+          <p:nvPr/>
+        </p:nvSpPr>
+        <p:spPr>
+          <a:xfrm>
+            <a:off x="576072" y="2125980"/>
+            <a:ext cx="201168" cy="201168"/>
           </a:xfrm>
           <a:prstGeom prst="ellipse">
             <a:avLst/>
           </a:prstGeom>
           <a:solidFill>
-            <a:srgbClr val="12304F"/>
-          </a:solidFill>
-          <a:ln/>
-        </p:spPr>
-      </p:sp>
-      <p:sp>
-        <p:nvSpPr>
-          <p:cNvPr id="19" name="Text 15"/>
-          <p:cNvSpPr txBox="1"/>
-          <p:nvPr/>
-        </p:nvSpPr>
-        <p:spPr>
-          <a:xfrm>
-            <a:off x="3922776" y="1920240"/>
-            <a:ext cx="237744" cy="237744"/>
-          </a:xfrm>
-          <a:prstGeom prst="rect">
-            <a:avLst/>
-          </a:prstGeom>
-          <a:noFill/>
-          <a:ln/>
-        </p:spPr>
-        <p:txBody>
-          <a:bodyPr wrap="square" lIns="0" tIns="0" rIns="0" bIns="0" rtlCol="0" anchor="ctr"/>
-          <a:lstStyle/>
-          <a:p>
-            <a:pPr algn="ctr" indent="0" marL="0">
-              <a:buNone/>
-            </a:pPr>
-            <a:r>
-              <a:rPr lang="en-US" sz="1050" b="1" dirty="0">
-                <a:solidFill>
-                  <a:srgbClr val="FFFFFF"/>
-                </a:solidFill>
-                <a:latin typeface="Calibri" pitchFamily="34" charset="0"/>
-                <a:ea typeface="Calibri" pitchFamily="34" charset="-122"/>
-                <a:cs typeface="Calibri" pitchFamily="34" charset="-120"/>
-              </a:rPr>
-              <a:t>2</a:t>
-            </a:r>
-            <a:endParaRPr lang="en-US" sz="1050" dirty="0"/>
-          </a:p>
-        </p:txBody>
-      </p:sp>
-      <p:sp>
-        <p:nvSpPr>
-          <p:cNvPr id="20" name="Shape 16"/>
-          <p:cNvSpPr/>
-          <p:nvPr/>
-        </p:nvSpPr>
-        <p:spPr>
-          <a:xfrm>
-            <a:off x="2670048" y="2724912"/>
-            <a:ext cx="2231136" cy="457200"/>
-          </a:xfrm>
-          <a:prstGeom prst="roundRect">
-            <a:avLst>
-              <a:gd name="adj" fmla="val 14000"/>
-            </a:avLst>
-          </a:prstGeom>
-          <a:solidFill>
-            <a:srgbClr val="0E7C86"/>
-          </a:solidFill>
-          <a:ln/>
-        </p:spPr>
-      </p:sp>
-      <p:sp>
-        <p:nvSpPr>
-          <p:cNvPr id="21" name="Text 17"/>
-          <p:cNvSpPr txBox="1"/>
-          <p:nvPr/>
-        </p:nvSpPr>
-        <p:spPr>
-          <a:xfrm>
-            <a:off x="2724912" y="2724912"/>
-            <a:ext cx="2121408" cy="457200"/>
-          </a:xfrm>
-          <a:prstGeom prst="rect">
-            <a:avLst/>
-          </a:prstGeom>
-          <a:noFill/>
-          <a:ln/>
-        </p:spPr>
-        <p:txBody>
-          <a:bodyPr wrap="square" lIns="0" tIns="0" rIns="0" bIns="0" rtlCol="0" anchor="ctr"/>
-          <a:lstStyle/>
-          <a:p>
-            <a:pPr algn="ctr" indent="0" marL="0">
-              <a:lnSpc>
-                <a:spcPct val="90000"/>
-              </a:lnSpc>
-              <a:buNone/>
-            </a:pPr>
-            <a:r>
-              <a:rPr lang="en-US" sz="840" b="1" dirty="0">
-                <a:solidFill>
-                  <a:srgbClr val="FFFFFF"/>
-                </a:solidFill>
-                <a:latin typeface="Calibri" pitchFamily="34" charset="0"/>
-                <a:ea typeface="Calibri" pitchFamily="34" charset="-122"/>
-                <a:cs typeface="Calibri" pitchFamily="34" charset="-120"/>
-              </a:rPr>
-              <a:t>A live profile (Behavioral DNA)</a:t>
-            </a:r>
-            <a:endParaRPr lang="en-US" sz="840" dirty="0"/>
-          </a:p>
-        </p:txBody>
-      </p:sp>
-      <p:sp>
-        <p:nvSpPr>
-          <p:cNvPr id="22" name="Shape 18"/>
-          <p:cNvSpPr/>
-          <p:nvPr/>
-        </p:nvSpPr>
-        <p:spPr>
-          <a:xfrm>
-            <a:off x="4334256" y="2194560"/>
-            <a:ext cx="219456" cy="182880"/>
-          </a:xfrm>
-          <a:prstGeom prst="rightArrow">
-            <a:avLst/>
-          </a:prstGeom>
-          <a:solidFill>
-            <a:srgbClr val="12304F"/>
-          </a:solidFill>
-          <a:ln/>
-        </p:spPr>
-      </p:sp>
-      <p:sp>
-        <p:nvSpPr>
-          <p:cNvPr id="23" name="Text 19"/>
-          <p:cNvSpPr txBox="1"/>
-          <p:nvPr/>
-        </p:nvSpPr>
-        <p:spPr>
-          <a:xfrm>
-            <a:off x="5056632" y="1188720"/>
-            <a:ext cx="2286000" cy="384048"/>
-          </a:xfrm>
-          <a:prstGeom prst="rect">
-            <a:avLst/>
-          </a:prstGeom>
-          <a:noFill/>
-          <a:ln/>
-        </p:spPr>
-        <p:txBody>
-          <a:bodyPr wrap="square" lIns="0" tIns="0" rIns="0" bIns="0" rtlCol="0" anchor="t"/>
-          <a:lstStyle/>
-          <a:p>
-            <a:pPr algn="ctr" indent="0" marL="0">
-              <a:lnSpc>
-                <a:spcPct val="90000"/>
-              </a:lnSpc>
-              <a:buNone/>
-            </a:pPr>
-            <a:r>
-              <a:rPr lang="en-US" sz="1100" b="1" dirty="0">
-                <a:solidFill>
-                  <a:srgbClr val="12304F"/>
-                </a:solidFill>
-                <a:latin typeface="Calibri" pitchFamily="34" charset="0"/>
-                <a:ea typeface="Calibri" pitchFamily="34" charset="-122"/>
-                <a:cs typeface="Calibri" pitchFamily="34" charset="-120"/>
-              </a:rPr>
-              <a:t>Decision Intelligence</a:t>
-            </a:r>
-            <a:endParaRPr lang="en-US" sz="1100" dirty="0"/>
-          </a:p>
-        </p:txBody>
-      </p:sp>
-      <p:sp>
-        <p:nvSpPr>
-          <p:cNvPr id="24" name="Text 20"/>
-          <p:cNvSpPr txBox="1"/>
-          <p:nvPr/>
-        </p:nvSpPr>
-        <p:spPr>
-          <a:xfrm>
-            <a:off x="5056632" y="1554480"/>
-            <a:ext cx="2286000" cy="438912"/>
-          </a:xfrm>
-          <a:prstGeom prst="rect">
-            <a:avLst/>
-          </a:prstGeom>
-          <a:noFill/>
-          <a:ln/>
-        </p:spPr>
-        <p:txBody>
-          <a:bodyPr wrap="square" lIns="0" tIns="0" rIns="0" bIns="0" rtlCol="0" anchor="t"/>
-          <a:lstStyle/>
-          <a:p>
-            <a:pPr algn="ctr" indent="0" marL="0">
-              <a:lnSpc>
-                <a:spcPct val="94000"/>
-              </a:lnSpc>
-              <a:buNone/>
-            </a:pPr>
-            <a:r>
-              <a:rPr lang="en-US" sz="820" i="1" dirty="0">
-                <a:solidFill>
-                  <a:srgbClr val="76889A"/>
-                </a:solidFill>
-                <a:latin typeface="Calibri" pitchFamily="34" charset="0"/>
-                <a:ea typeface="Calibri" pitchFamily="34" charset="-122"/>
-                <a:cs typeface="Calibri" pitchFamily="34" charset="-120"/>
-              </a:rPr>
-              <a:t>Weigh up every possible action and choose the best one for them.</a:t>
-            </a:r>
-            <a:endParaRPr lang="en-US" sz="820" dirty="0"/>
-          </a:p>
-        </p:txBody>
-      </p:sp>
-      <p:sp>
-        <p:nvSpPr>
-          <p:cNvPr id="25" name="Shape 21"/>
-          <p:cNvSpPr/>
-          <p:nvPr/>
-        </p:nvSpPr>
-        <p:spPr>
-          <a:xfrm>
-            <a:off x="5925312" y="2011680"/>
-            <a:ext cx="548640" cy="548640"/>
-          </a:xfrm>
-          <a:prstGeom prst="ellipse">
-            <a:avLst/>
-          </a:prstGeom>
-          <a:solidFill>
-            <a:srgbClr val="6A4C93"/>
+            <a:srgbClr val="1F6FB0"/>
           </a:solidFill>
           <a:ln/>
         </p:spPr>
       </p:sp>
       <p:pic>
         <p:nvPicPr>
-          <p:cNvPr id="26" name="Image 2" descr="preencoded.png">    </p:cNvPr>
+          <p:cNvPr id="13" name="Image 2" descr="preencoded.png">    </p:cNvPr>
           <p:cNvPicPr>
             <a:picLocks noChangeAspect="1"/>
           </p:cNvPicPr>
@@ -4913,8 +4496,8 @@
         </p:blipFill>
         <p:spPr>
           <a:xfrm>
-            <a:off x="6056986" y="2143354"/>
-            <a:ext cx="285293" cy="285293"/>
+            <a:off x="624352" y="2174260"/>
+            <a:ext cx="104607" cy="104607"/>
           </a:xfrm>
           <a:prstGeom prst="rect">
             <a:avLst/>
@@ -4923,254 +4506,66 @@
       </p:pic>
       <p:sp>
         <p:nvSpPr>
-          <p:cNvPr id="27" name="Shape 22"/>
-          <p:cNvSpPr/>
-          <p:nvPr/>
-        </p:nvSpPr>
-        <p:spPr>
-          <a:xfrm>
-            <a:off x="6336792" y="1920240"/>
-            <a:ext cx="237744" cy="237744"/>
+          <p:cNvPr id="14" name="Text 9"/>
+          <p:cNvSpPr txBox="1"/>
+          <p:nvPr/>
+        </p:nvSpPr>
+        <p:spPr>
+          <a:xfrm>
+            <a:off x="859536" y="2116836"/>
+            <a:ext cx="1828800" cy="219456"/>
+          </a:xfrm>
+          <a:prstGeom prst="rect">
+            <a:avLst/>
+          </a:prstGeom>
+          <a:noFill/>
+          <a:ln/>
+        </p:spPr>
+        <p:txBody>
+          <a:bodyPr wrap="square" lIns="0" tIns="0" rIns="0" bIns="0" rtlCol="0" anchor="ctr"/>
+          <a:lstStyle/>
+          <a:p>
+            <a:pPr indent="0" marL="0">
+              <a:buNone/>
+            </a:pPr>
+            <a:r>
+              <a:rPr lang="en-US" sz="840" dirty="0">
+                <a:solidFill>
+                  <a:srgbClr val="3E5163"/>
+                </a:solidFill>
+                <a:latin typeface="Calibri" pitchFamily="34" charset="0"/>
+                <a:ea typeface="Calibri" pitchFamily="34" charset="-122"/>
+                <a:cs typeface="Calibri" pitchFamily="34" charset="-120"/>
+              </a:rPr>
+              <a:t>Claims history</a:t>
+            </a:r>
+            <a:endParaRPr lang="en-US" sz="840" dirty="0"/>
+          </a:p>
+        </p:txBody>
+      </p:sp>
+      <p:sp>
+        <p:nvSpPr>
+          <p:cNvPr id="15" name="Shape 10"/>
+          <p:cNvSpPr/>
+          <p:nvPr/>
+        </p:nvSpPr>
+        <p:spPr>
+          <a:xfrm>
+            <a:off x="576072" y="2340864"/>
+            <a:ext cx="201168" cy="201168"/>
           </a:xfrm>
           <a:prstGeom prst="ellipse">
             <a:avLst/>
           </a:prstGeom>
           <a:solidFill>
-            <a:srgbClr val="12304F"/>
-          </a:solidFill>
-          <a:ln/>
-        </p:spPr>
-      </p:sp>
-      <p:sp>
-        <p:nvSpPr>
-          <p:cNvPr id="28" name="Text 23"/>
-          <p:cNvSpPr txBox="1"/>
-          <p:nvPr/>
-        </p:nvSpPr>
-        <p:spPr>
-          <a:xfrm>
-            <a:off x="6336792" y="1920240"/>
-            <a:ext cx="237744" cy="237744"/>
-          </a:xfrm>
-          <a:prstGeom prst="rect">
-            <a:avLst/>
-          </a:prstGeom>
-          <a:noFill/>
-          <a:ln/>
-        </p:spPr>
-        <p:txBody>
-          <a:bodyPr wrap="square" lIns="0" tIns="0" rIns="0" bIns="0" rtlCol="0" anchor="ctr"/>
-          <a:lstStyle/>
-          <a:p>
-            <a:pPr algn="ctr" indent="0" marL="0">
-              <a:buNone/>
-            </a:pPr>
-            <a:r>
-              <a:rPr lang="en-US" sz="1050" b="1" dirty="0">
-                <a:solidFill>
-                  <a:srgbClr val="FFFFFF"/>
-                </a:solidFill>
-                <a:latin typeface="Calibri" pitchFamily="34" charset="0"/>
-                <a:ea typeface="Calibri" pitchFamily="34" charset="-122"/>
-                <a:cs typeface="Calibri" pitchFamily="34" charset="-120"/>
-              </a:rPr>
-              <a:t>3</a:t>
-            </a:r>
-            <a:endParaRPr lang="en-US" sz="1050" dirty="0"/>
-          </a:p>
-        </p:txBody>
-      </p:sp>
-      <p:sp>
-        <p:nvSpPr>
-          <p:cNvPr id="29" name="Shape 24"/>
-          <p:cNvSpPr/>
-          <p:nvPr/>
-        </p:nvSpPr>
-        <p:spPr>
-          <a:xfrm>
-            <a:off x="5084064" y="2724912"/>
-            <a:ext cx="2231136" cy="457200"/>
-          </a:xfrm>
-          <a:prstGeom prst="roundRect">
-            <a:avLst>
-              <a:gd name="adj" fmla="val 14000"/>
-            </a:avLst>
-          </a:prstGeom>
-          <a:solidFill>
-            <a:srgbClr val="6A4C93"/>
-          </a:solidFill>
-          <a:ln/>
-        </p:spPr>
-      </p:sp>
-      <p:sp>
-        <p:nvSpPr>
-          <p:cNvPr id="30" name="Text 25"/>
-          <p:cNvSpPr txBox="1"/>
-          <p:nvPr/>
-        </p:nvSpPr>
-        <p:spPr>
-          <a:xfrm>
-            <a:off x="5138928" y="2724912"/>
-            <a:ext cx="2121408" cy="457200"/>
-          </a:xfrm>
-          <a:prstGeom prst="rect">
-            <a:avLst/>
-          </a:prstGeom>
-          <a:noFill/>
-          <a:ln/>
-        </p:spPr>
-        <p:txBody>
-          <a:bodyPr wrap="square" lIns="0" tIns="0" rIns="0" bIns="0" rtlCol="0" anchor="ctr"/>
-          <a:lstStyle/>
-          <a:p>
-            <a:pPr algn="ctr" indent="0" marL="0">
-              <a:lnSpc>
-                <a:spcPct val="90000"/>
-              </a:lnSpc>
-              <a:buNone/>
-            </a:pPr>
-            <a:r>
-              <a:rPr lang="en-US" sz="840" b="1" dirty="0">
-                <a:solidFill>
-                  <a:srgbClr val="FFFFFF"/>
-                </a:solidFill>
-                <a:latin typeface="Calibri" pitchFamily="34" charset="0"/>
-                <a:ea typeface="Calibri" pitchFamily="34" charset="-122"/>
-                <a:cs typeface="Calibri" pitchFamily="34" charset="-120"/>
-              </a:rPr>
-              <a:t>Best action, offer &amp; channel</a:t>
-            </a:r>
-            <a:endParaRPr lang="en-US" sz="840" dirty="0"/>
-          </a:p>
-        </p:txBody>
-      </p:sp>
-      <p:sp>
-        <p:nvSpPr>
-          <p:cNvPr id="31" name="Shape 26"/>
-          <p:cNvSpPr/>
-          <p:nvPr/>
-        </p:nvSpPr>
-        <p:spPr>
-          <a:xfrm>
-            <a:off x="6748272" y="2194560"/>
-            <a:ext cx="219456" cy="182880"/>
-          </a:xfrm>
-          <a:prstGeom prst="rightArrow">
-            <a:avLst/>
-          </a:prstGeom>
-          <a:solidFill>
-            <a:srgbClr val="12304F"/>
-          </a:solidFill>
-          <a:ln/>
-        </p:spPr>
-      </p:sp>
-      <p:sp>
-        <p:nvSpPr>
-          <p:cNvPr id="32" name="Text 27"/>
-          <p:cNvSpPr txBox="1"/>
-          <p:nvPr/>
-        </p:nvSpPr>
-        <p:spPr>
-          <a:xfrm>
-            <a:off x="7470648" y="1188720"/>
-            <a:ext cx="2286000" cy="384048"/>
-          </a:xfrm>
-          <a:prstGeom prst="rect">
-            <a:avLst/>
-          </a:prstGeom>
-          <a:noFill/>
-          <a:ln/>
-        </p:spPr>
-        <p:txBody>
-          <a:bodyPr wrap="square" lIns="0" tIns="0" rIns="0" bIns="0" rtlCol="0" anchor="t"/>
-          <a:lstStyle/>
-          <a:p>
-            <a:pPr algn="ctr" indent="0" marL="0">
-              <a:lnSpc>
-                <a:spcPct val="90000"/>
-              </a:lnSpc>
-              <a:buNone/>
-            </a:pPr>
-            <a:r>
-              <a:rPr lang="en-US" sz="1100" b="1" dirty="0">
-                <a:solidFill>
-                  <a:srgbClr val="12304F"/>
-                </a:solidFill>
-                <a:latin typeface="Calibri" pitchFamily="34" charset="0"/>
-                <a:ea typeface="Calibri" pitchFamily="34" charset="-122"/>
-                <a:cs typeface="Calibri" pitchFamily="34" charset="-120"/>
-              </a:rPr>
-              <a:t>Engagement Deployment</a:t>
-            </a:r>
-            <a:endParaRPr lang="en-US" sz="1100" dirty="0"/>
-          </a:p>
-        </p:txBody>
-      </p:sp>
-      <p:sp>
-        <p:nvSpPr>
-          <p:cNvPr id="33" name="Text 28"/>
-          <p:cNvSpPr txBox="1"/>
-          <p:nvPr/>
-        </p:nvSpPr>
-        <p:spPr>
-          <a:xfrm>
-            <a:off x="7470648" y="1554480"/>
-            <a:ext cx="2286000" cy="438912"/>
-          </a:xfrm>
-          <a:prstGeom prst="rect">
-            <a:avLst/>
-          </a:prstGeom>
-          <a:noFill/>
-          <a:ln/>
-        </p:spPr>
-        <p:txBody>
-          <a:bodyPr wrap="square" lIns="0" tIns="0" rIns="0" bIns="0" rtlCol="0" anchor="t"/>
-          <a:lstStyle/>
-          <a:p>
-            <a:pPr algn="ctr" indent="0" marL="0">
-              <a:lnSpc>
-                <a:spcPct val="94000"/>
-              </a:lnSpc>
-              <a:buNone/>
-            </a:pPr>
-            <a:r>
-              <a:rPr lang="en-US" sz="820" i="1" dirty="0">
-                <a:solidFill>
-                  <a:srgbClr val="76889A"/>
-                </a:solidFill>
-                <a:latin typeface="Calibri" pitchFamily="34" charset="0"/>
-                <a:ea typeface="Calibri" pitchFamily="34" charset="-122"/>
-                <a:cs typeface="Calibri" pitchFamily="34" charset="-120"/>
-              </a:rPr>
-              <a:t>Deliver that action through the channel the customer actually uses.</a:t>
-            </a:r>
-            <a:endParaRPr lang="en-US" sz="820" dirty="0"/>
-          </a:p>
-        </p:txBody>
-      </p:sp>
-      <p:sp>
-        <p:nvSpPr>
-          <p:cNvPr id="34" name="Shape 29"/>
-          <p:cNvSpPr/>
-          <p:nvPr/>
-        </p:nvSpPr>
-        <p:spPr>
-          <a:xfrm>
-            <a:off x="8339328" y="2011680"/>
-            <a:ext cx="548640" cy="548640"/>
-          </a:xfrm>
-          <a:prstGeom prst="ellipse">
-            <a:avLst/>
-          </a:prstGeom>
-          <a:solidFill>
-            <a:srgbClr val="CF8A18"/>
+            <a:srgbClr val="1F6FB0"/>
           </a:solidFill>
           <a:ln/>
         </p:spPr>
       </p:sp>
       <p:pic>
         <p:nvPicPr>
-          <p:cNvPr id="35" name="Image 3" descr="preencoded.png">    </p:cNvPr>
+          <p:cNvPr id="16" name="Image 3" descr="preencoded.png">    </p:cNvPr>
           <p:cNvPicPr>
             <a:picLocks noChangeAspect="1"/>
           </p:cNvPicPr>
@@ -5184,8 +4579,8 @@
         </p:blipFill>
         <p:spPr>
           <a:xfrm>
-            <a:off x="8471002" y="2143354"/>
-            <a:ext cx="285293" cy="285293"/>
+            <a:off x="624352" y="2389144"/>
+            <a:ext cx="104607" cy="104607"/>
           </a:xfrm>
           <a:prstGeom prst="rect">
             <a:avLst/>
@@ -5194,254 +4589,66 @@
       </p:pic>
       <p:sp>
         <p:nvSpPr>
-          <p:cNvPr id="36" name="Shape 30"/>
-          <p:cNvSpPr/>
-          <p:nvPr/>
-        </p:nvSpPr>
-        <p:spPr>
-          <a:xfrm>
-            <a:off x="8750808" y="1920240"/>
-            <a:ext cx="237744" cy="237744"/>
+          <p:cNvPr id="17" name="Text 11"/>
+          <p:cNvSpPr txBox="1"/>
+          <p:nvPr/>
+        </p:nvSpPr>
+        <p:spPr>
+          <a:xfrm>
+            <a:off x="859536" y="2331720"/>
+            <a:ext cx="1828800" cy="219456"/>
+          </a:xfrm>
+          <a:prstGeom prst="rect">
+            <a:avLst/>
+          </a:prstGeom>
+          <a:noFill/>
+          <a:ln/>
+        </p:spPr>
+        <p:txBody>
+          <a:bodyPr wrap="square" lIns="0" tIns="0" rIns="0" bIns="0" rtlCol="0" anchor="ctr"/>
+          <a:lstStyle/>
+          <a:p>
+            <a:pPr indent="0" marL="0">
+              <a:buNone/>
+            </a:pPr>
+            <a:r>
+              <a:rPr lang="en-US" sz="840" dirty="0">
+                <a:solidFill>
+                  <a:srgbClr val="3E5163"/>
+                </a:solidFill>
+                <a:latin typeface="Calibri" pitchFamily="34" charset="0"/>
+                <a:ea typeface="Calibri" pitchFamily="34" charset="-122"/>
+                <a:cs typeface="Calibri" pitchFamily="34" charset="-120"/>
+              </a:rPr>
+              <a:t>Agent interactions</a:t>
+            </a:r>
+            <a:endParaRPr lang="en-US" sz="840" dirty="0"/>
+          </a:p>
+        </p:txBody>
+      </p:sp>
+      <p:sp>
+        <p:nvSpPr>
+          <p:cNvPr id="18" name="Shape 12"/>
+          <p:cNvSpPr/>
+          <p:nvPr/>
+        </p:nvSpPr>
+        <p:spPr>
+          <a:xfrm>
+            <a:off x="576072" y="2555748"/>
+            <a:ext cx="201168" cy="201168"/>
           </a:xfrm>
           <a:prstGeom prst="ellipse">
             <a:avLst/>
           </a:prstGeom>
           <a:solidFill>
-            <a:srgbClr val="12304F"/>
-          </a:solidFill>
-          <a:ln/>
-        </p:spPr>
-      </p:sp>
-      <p:sp>
-        <p:nvSpPr>
-          <p:cNvPr id="37" name="Text 31"/>
-          <p:cNvSpPr txBox="1"/>
-          <p:nvPr/>
-        </p:nvSpPr>
-        <p:spPr>
-          <a:xfrm>
-            <a:off x="8750808" y="1920240"/>
-            <a:ext cx="237744" cy="237744"/>
-          </a:xfrm>
-          <a:prstGeom prst="rect">
-            <a:avLst/>
-          </a:prstGeom>
-          <a:noFill/>
-          <a:ln/>
-        </p:spPr>
-        <p:txBody>
-          <a:bodyPr wrap="square" lIns="0" tIns="0" rIns="0" bIns="0" rtlCol="0" anchor="ctr"/>
-          <a:lstStyle/>
-          <a:p>
-            <a:pPr algn="ctr" indent="0" marL="0">
-              <a:buNone/>
-            </a:pPr>
-            <a:r>
-              <a:rPr lang="en-US" sz="1050" b="1" dirty="0">
-                <a:solidFill>
-                  <a:srgbClr val="FFFFFF"/>
-                </a:solidFill>
-                <a:latin typeface="Calibri" pitchFamily="34" charset="0"/>
-                <a:ea typeface="Calibri" pitchFamily="34" charset="-122"/>
-                <a:cs typeface="Calibri" pitchFamily="34" charset="-120"/>
-              </a:rPr>
-              <a:t>4</a:t>
-            </a:r>
-            <a:endParaRPr lang="en-US" sz="1050" dirty="0"/>
-          </a:p>
-        </p:txBody>
-      </p:sp>
-      <p:sp>
-        <p:nvSpPr>
-          <p:cNvPr id="38" name="Shape 32"/>
-          <p:cNvSpPr/>
-          <p:nvPr/>
-        </p:nvSpPr>
-        <p:spPr>
-          <a:xfrm>
-            <a:off x="7498080" y="2724912"/>
-            <a:ext cx="2231136" cy="457200"/>
-          </a:xfrm>
-          <a:prstGeom prst="roundRect">
-            <a:avLst>
-              <a:gd name="adj" fmla="val 14000"/>
-            </a:avLst>
-          </a:prstGeom>
-          <a:solidFill>
-            <a:srgbClr val="CF8A18"/>
-          </a:solidFill>
-          <a:ln/>
-        </p:spPr>
-      </p:sp>
-      <p:sp>
-        <p:nvSpPr>
-          <p:cNvPr id="39" name="Text 33"/>
-          <p:cNvSpPr txBox="1"/>
-          <p:nvPr/>
-        </p:nvSpPr>
-        <p:spPr>
-          <a:xfrm>
-            <a:off x="7552944" y="2724912"/>
-            <a:ext cx="2121408" cy="457200"/>
-          </a:xfrm>
-          <a:prstGeom prst="rect">
-            <a:avLst/>
-          </a:prstGeom>
-          <a:noFill/>
-          <a:ln/>
-        </p:spPr>
-        <p:txBody>
-          <a:bodyPr wrap="square" lIns="0" tIns="0" rIns="0" bIns="0" rtlCol="0" anchor="ctr"/>
-          <a:lstStyle/>
-          <a:p>
-            <a:pPr algn="ctr" indent="0" marL="0">
-              <a:lnSpc>
-                <a:spcPct val="90000"/>
-              </a:lnSpc>
-              <a:buNone/>
-            </a:pPr>
-            <a:r>
-              <a:rPr lang="en-US" sz="840" b="1" dirty="0">
-                <a:solidFill>
-                  <a:srgbClr val="FFFFFF"/>
-                </a:solidFill>
-                <a:latin typeface="Calibri" pitchFamily="34" charset="0"/>
-                <a:ea typeface="Calibri" pitchFamily="34" charset="-122"/>
-                <a:cs typeface="Calibri" pitchFamily="34" charset="-120"/>
-              </a:rPr>
-              <a:t>One joined-up experience</a:t>
-            </a:r>
-            <a:endParaRPr lang="en-US" sz="840" dirty="0"/>
-          </a:p>
-        </p:txBody>
-      </p:sp>
-      <p:sp>
-        <p:nvSpPr>
-          <p:cNvPr id="40" name="Shape 34"/>
-          <p:cNvSpPr/>
-          <p:nvPr/>
-        </p:nvSpPr>
-        <p:spPr>
-          <a:xfrm>
-            <a:off x="9162288" y="2194560"/>
-            <a:ext cx="219456" cy="182880"/>
-          </a:xfrm>
-          <a:prstGeom prst="rightArrow">
-            <a:avLst/>
-          </a:prstGeom>
-          <a:solidFill>
-            <a:srgbClr val="12304F"/>
-          </a:solidFill>
-          <a:ln/>
-        </p:spPr>
-      </p:sp>
-      <p:sp>
-        <p:nvSpPr>
-          <p:cNvPr id="41" name="Text 35"/>
-          <p:cNvSpPr txBox="1"/>
-          <p:nvPr/>
-        </p:nvSpPr>
-        <p:spPr>
-          <a:xfrm>
-            <a:off x="9884664" y="1188720"/>
-            <a:ext cx="2286000" cy="384048"/>
-          </a:xfrm>
-          <a:prstGeom prst="rect">
-            <a:avLst/>
-          </a:prstGeom>
-          <a:noFill/>
-          <a:ln/>
-        </p:spPr>
-        <p:txBody>
-          <a:bodyPr wrap="square" lIns="0" tIns="0" rIns="0" bIns="0" rtlCol="0" anchor="t"/>
-          <a:lstStyle/>
-          <a:p>
-            <a:pPr algn="ctr" indent="0" marL="0">
-              <a:lnSpc>
-                <a:spcPct val="90000"/>
-              </a:lnSpc>
-              <a:buNone/>
-            </a:pPr>
-            <a:r>
-              <a:rPr lang="en-US" sz="1100" b="1" dirty="0">
-                <a:solidFill>
-                  <a:srgbClr val="12304F"/>
-                </a:solidFill>
-                <a:latin typeface="Calibri" pitchFamily="34" charset="0"/>
-                <a:ea typeface="Calibri" pitchFamily="34" charset="-122"/>
-                <a:cs typeface="Calibri" pitchFamily="34" charset="-120"/>
-              </a:rPr>
-              <a:t>Response &amp; Learning</a:t>
-            </a:r>
-            <a:endParaRPr lang="en-US" sz="1100" dirty="0"/>
-          </a:p>
-        </p:txBody>
-      </p:sp>
-      <p:sp>
-        <p:nvSpPr>
-          <p:cNvPr id="42" name="Text 36"/>
-          <p:cNvSpPr txBox="1"/>
-          <p:nvPr/>
-        </p:nvSpPr>
-        <p:spPr>
-          <a:xfrm>
-            <a:off x="9884664" y="1554480"/>
-            <a:ext cx="2286000" cy="438912"/>
-          </a:xfrm>
-          <a:prstGeom prst="rect">
-            <a:avLst/>
-          </a:prstGeom>
-          <a:noFill/>
-          <a:ln/>
-        </p:spPr>
-        <p:txBody>
-          <a:bodyPr wrap="square" lIns="0" tIns="0" rIns="0" bIns="0" rtlCol="0" anchor="t"/>
-          <a:lstStyle/>
-          <a:p>
-            <a:pPr algn="ctr" indent="0" marL="0">
-              <a:lnSpc>
-                <a:spcPct val="94000"/>
-              </a:lnSpc>
-              <a:buNone/>
-            </a:pPr>
-            <a:r>
-              <a:rPr lang="en-US" sz="820" i="1" dirty="0">
-                <a:solidFill>
-                  <a:srgbClr val="76889A"/>
-                </a:solidFill>
-                <a:latin typeface="Calibri" pitchFamily="34" charset="0"/>
-                <a:ea typeface="Calibri" pitchFamily="34" charset="-122"/>
-                <a:cs typeface="Calibri" pitchFamily="34" charset="-120"/>
-              </a:rPr>
-              <a:t>See how customers respond and use it to sharpen the next decision.</a:t>
-            </a:r>
-            <a:endParaRPr lang="en-US" sz="820" dirty="0"/>
-          </a:p>
-        </p:txBody>
-      </p:sp>
-      <p:sp>
-        <p:nvSpPr>
-          <p:cNvPr id="43" name="Shape 37"/>
-          <p:cNvSpPr/>
-          <p:nvPr/>
-        </p:nvSpPr>
-        <p:spPr>
-          <a:xfrm>
-            <a:off x="10753344" y="2011680"/>
-            <a:ext cx="548640" cy="548640"/>
-          </a:xfrm>
-          <a:prstGeom prst="ellipse">
-            <a:avLst/>
-          </a:prstGeom>
-          <a:solidFill>
-            <a:srgbClr val="2E8B63"/>
+            <a:srgbClr val="1F6FB0"/>
           </a:solidFill>
           <a:ln/>
         </p:spPr>
       </p:sp>
       <p:pic>
         <p:nvPicPr>
-          <p:cNvPr id="44" name="Image 4" descr="preencoded.png">    </p:cNvPr>
+          <p:cNvPr id="19" name="Image 4" descr="preencoded.png">    </p:cNvPr>
           <p:cNvPicPr>
             <a:picLocks noChangeAspect="1"/>
           </p:cNvPicPr>
@@ -5455,8 +4662,8 @@
         </p:blipFill>
         <p:spPr>
           <a:xfrm>
-            <a:off x="10885018" y="2143354"/>
-            <a:ext cx="285293" cy="285293"/>
+            <a:off x="624352" y="2604028"/>
+            <a:ext cx="104607" cy="104607"/>
           </a:xfrm>
           <a:prstGeom prst="rect">
             <a:avLst/>
@@ -5465,421 +4672,66 @@
       </p:pic>
       <p:sp>
         <p:nvSpPr>
-          <p:cNvPr id="45" name="Shape 38"/>
-          <p:cNvSpPr/>
-          <p:nvPr/>
-        </p:nvSpPr>
-        <p:spPr>
-          <a:xfrm>
-            <a:off x="11164824" y="1920240"/>
-            <a:ext cx="237744" cy="237744"/>
+          <p:cNvPr id="20" name="Text 13"/>
+          <p:cNvSpPr txBox="1"/>
+          <p:nvPr/>
+        </p:nvSpPr>
+        <p:spPr>
+          <a:xfrm>
+            <a:off x="859536" y="2546604"/>
+            <a:ext cx="1828800" cy="219456"/>
+          </a:xfrm>
+          <a:prstGeom prst="rect">
+            <a:avLst/>
+          </a:prstGeom>
+          <a:noFill/>
+          <a:ln/>
+        </p:spPr>
+        <p:txBody>
+          <a:bodyPr wrap="square" lIns="0" tIns="0" rIns="0" bIns="0" rtlCol="0" anchor="ctr"/>
+          <a:lstStyle/>
+          <a:p>
+            <a:pPr indent="0" marL="0">
+              <a:buNone/>
+            </a:pPr>
+            <a:r>
+              <a:rPr lang="en-US" sz="840" dirty="0">
+                <a:solidFill>
+                  <a:srgbClr val="3E5163"/>
+                </a:solidFill>
+                <a:latin typeface="Calibri" pitchFamily="34" charset="0"/>
+                <a:ea typeface="Calibri" pitchFamily="34" charset="-122"/>
+                <a:cs typeface="Calibri" pitchFamily="34" charset="-120"/>
+              </a:rPr>
+              <a:t>Renewal behavior</a:t>
+            </a:r>
+            <a:endParaRPr lang="en-US" sz="840" dirty="0"/>
+          </a:p>
+        </p:txBody>
+      </p:sp>
+      <p:sp>
+        <p:nvSpPr>
+          <p:cNvPr id="21" name="Shape 14"/>
+          <p:cNvSpPr/>
+          <p:nvPr/>
+        </p:nvSpPr>
+        <p:spPr>
+          <a:xfrm>
+            <a:off x="576072" y="2770632"/>
+            <a:ext cx="201168" cy="201168"/>
           </a:xfrm>
           <a:prstGeom prst="ellipse">
             <a:avLst/>
           </a:prstGeom>
           <a:solidFill>
-            <a:srgbClr val="12304F"/>
-          </a:solidFill>
-          <a:ln/>
-        </p:spPr>
-      </p:sp>
-      <p:sp>
-        <p:nvSpPr>
-          <p:cNvPr id="46" name="Text 39"/>
-          <p:cNvSpPr txBox="1"/>
-          <p:nvPr/>
-        </p:nvSpPr>
-        <p:spPr>
-          <a:xfrm>
-            <a:off x="11164824" y="1920240"/>
-            <a:ext cx="237744" cy="237744"/>
-          </a:xfrm>
-          <a:prstGeom prst="rect">
-            <a:avLst/>
-          </a:prstGeom>
-          <a:noFill/>
-          <a:ln/>
-        </p:spPr>
-        <p:txBody>
-          <a:bodyPr wrap="square" lIns="0" tIns="0" rIns="0" bIns="0" rtlCol="0" anchor="ctr"/>
-          <a:lstStyle/>
-          <a:p>
-            <a:pPr algn="ctr" indent="0" marL="0">
-              <a:buNone/>
-            </a:pPr>
-            <a:r>
-              <a:rPr lang="en-US" sz="1050" b="1" dirty="0">
-                <a:solidFill>
-                  <a:srgbClr val="FFFFFF"/>
-                </a:solidFill>
-                <a:latin typeface="Calibri" pitchFamily="34" charset="0"/>
-                <a:ea typeface="Calibri" pitchFamily="34" charset="-122"/>
-                <a:cs typeface="Calibri" pitchFamily="34" charset="-120"/>
-              </a:rPr>
-              <a:t>5</a:t>
-            </a:r>
-            <a:endParaRPr lang="en-US" sz="1050" dirty="0"/>
-          </a:p>
-        </p:txBody>
-      </p:sp>
-      <p:sp>
-        <p:nvSpPr>
-          <p:cNvPr id="47" name="Shape 40"/>
-          <p:cNvSpPr/>
-          <p:nvPr/>
-        </p:nvSpPr>
-        <p:spPr>
-          <a:xfrm>
-            <a:off x="9912096" y="2724912"/>
-            <a:ext cx="2231136" cy="457200"/>
-          </a:xfrm>
-          <a:prstGeom prst="roundRect">
-            <a:avLst>
-              <a:gd name="adj" fmla="val 14000"/>
-            </a:avLst>
-          </a:prstGeom>
-          <a:solidFill>
-            <a:srgbClr val="2E8B63"/>
-          </a:solidFill>
-          <a:ln/>
-        </p:spPr>
-      </p:sp>
-      <p:sp>
-        <p:nvSpPr>
-          <p:cNvPr id="48" name="Text 41"/>
-          <p:cNvSpPr txBox="1"/>
-          <p:nvPr/>
-        </p:nvSpPr>
-        <p:spPr>
-          <a:xfrm>
-            <a:off x="9966960" y="2724912"/>
-            <a:ext cx="2121408" cy="457200"/>
-          </a:xfrm>
-          <a:prstGeom prst="rect">
-            <a:avLst/>
-          </a:prstGeom>
-          <a:noFill/>
-          <a:ln/>
-        </p:spPr>
-        <p:txBody>
-          <a:bodyPr wrap="square" lIns="0" tIns="0" rIns="0" bIns="0" rtlCol="0" anchor="ctr"/>
-          <a:lstStyle/>
-          <a:p>
-            <a:pPr algn="ctr" indent="0" marL="0">
-              <a:lnSpc>
-                <a:spcPct val="90000"/>
-              </a:lnSpc>
-              <a:buNone/>
-            </a:pPr>
-            <a:r>
-              <a:rPr lang="en-US" sz="840" b="1" dirty="0">
-                <a:solidFill>
-                  <a:srgbClr val="FFFFFF"/>
-                </a:solidFill>
-                <a:latin typeface="Calibri" pitchFamily="34" charset="0"/>
-                <a:ea typeface="Calibri" pitchFamily="34" charset="-122"/>
-                <a:cs typeface="Calibri" pitchFamily="34" charset="-120"/>
-              </a:rPr>
-              <a:t>Every response improves the next</a:t>
-            </a:r>
-            <a:endParaRPr lang="en-US" sz="840" dirty="0"/>
-          </a:p>
-        </p:txBody>
-      </p:sp>
-      <p:sp>
-        <p:nvSpPr>
-          <p:cNvPr id="49" name="Shape 42"/>
-          <p:cNvSpPr/>
-          <p:nvPr/>
-        </p:nvSpPr>
-        <p:spPr>
-          <a:xfrm>
-            <a:off x="3785616" y="3273552"/>
-            <a:ext cx="7242048" cy="0"/>
-          </a:xfrm>
-          <a:prstGeom prst="line">
-            <a:avLst/>
-          </a:prstGeom>
-          <a:noFill/>
-          <a:ln w="22225">
-            <a:solidFill>
-              <a:srgbClr val="2E8B63"/>
-            </a:solidFill>
-            <a:prstDash val="solid"/>
-            <a:tailEnd type="triangle"/>
-          </a:ln>
-        </p:spPr>
-      </p:sp>
-      <p:sp>
-        <p:nvSpPr>
-          <p:cNvPr id="50" name="Shape 43"/>
-          <p:cNvSpPr/>
-          <p:nvPr/>
-        </p:nvSpPr>
-        <p:spPr>
-          <a:xfrm>
-            <a:off x="11027664" y="3200400"/>
-            <a:ext cx="0" cy="73152"/>
-          </a:xfrm>
-          <a:prstGeom prst="line">
-            <a:avLst/>
-          </a:prstGeom>
-          <a:noFill/>
-          <a:ln w="22225">
-            <a:solidFill>
-              <a:srgbClr val="2E8B63"/>
-            </a:solidFill>
-            <a:prstDash val="solid"/>
-          </a:ln>
-        </p:spPr>
-      </p:sp>
-      <p:sp>
-        <p:nvSpPr>
-          <p:cNvPr id="51" name="Shape 44"/>
-          <p:cNvSpPr/>
-          <p:nvPr/>
-        </p:nvSpPr>
-        <p:spPr>
-          <a:xfrm>
-            <a:off x="3785616" y="3200400"/>
-            <a:ext cx="0" cy="73152"/>
-          </a:xfrm>
-          <a:prstGeom prst="line">
-            <a:avLst/>
-          </a:prstGeom>
-          <a:noFill/>
-          <a:ln w="22225">
-            <a:solidFill>
-              <a:srgbClr val="2E8B63"/>
-            </a:solidFill>
-            <a:prstDash val="solid"/>
-          </a:ln>
-        </p:spPr>
-      </p:sp>
-      <p:sp>
-        <p:nvSpPr>
-          <p:cNvPr id="52" name="Text 45"/>
-          <p:cNvSpPr txBox="1"/>
-          <p:nvPr/>
-        </p:nvSpPr>
-        <p:spPr>
-          <a:xfrm>
-            <a:off x="5029200" y="3255264"/>
-            <a:ext cx="4754880" cy="201168"/>
-          </a:xfrm>
-          <a:prstGeom prst="rect">
-            <a:avLst/>
-          </a:prstGeom>
-          <a:solidFill>
-            <a:srgbClr val="FFFFFF"/>
-          </a:solidFill>
-          <a:ln/>
-        </p:spPr>
-        <p:txBody>
-          <a:bodyPr wrap="square" lIns="0" tIns="0" rIns="0" bIns="0" rtlCol="0" anchor="ctr"/>
-          <a:lstStyle/>
-          <a:p>
-            <a:pPr algn="ctr" indent="0" marL="0">
-              <a:buNone/>
-            </a:pPr>
-            <a:r>
-              <a:rPr lang="en-US" sz="840" b="1" i="1" dirty="0">
-                <a:solidFill>
-                  <a:srgbClr val="2E8B63"/>
-                </a:solidFill>
-                <a:latin typeface="Calibri" pitchFamily="34" charset="0"/>
-                <a:ea typeface="Calibri" pitchFamily="34" charset="-122"/>
-                <a:cs typeface="Calibri" pitchFamily="34" charset="-120"/>
-              </a:rPr>
-              <a:t>Every response feeds back — improving the next decision</a:t>
-            </a:r>
-            <a:endParaRPr lang="en-US" sz="840" dirty="0"/>
-          </a:p>
-        </p:txBody>
-      </p:sp>
-      <p:sp>
-        <p:nvSpPr>
-          <p:cNvPr id="53" name="Shape 46"/>
-          <p:cNvSpPr/>
-          <p:nvPr/>
-        </p:nvSpPr>
-        <p:spPr>
-          <a:xfrm>
-            <a:off x="457200" y="3621024"/>
-            <a:ext cx="11274552" cy="0"/>
-          </a:xfrm>
-          <a:prstGeom prst="line">
-            <a:avLst/>
-          </a:prstGeom>
-          <a:noFill/>
-          <a:ln w="12700">
-            <a:solidFill>
-              <a:srgbClr val="D2E1EE"/>
-            </a:solidFill>
-            <a:prstDash val="solid"/>
-          </a:ln>
-        </p:spPr>
-      </p:sp>
-      <p:sp>
-        <p:nvSpPr>
-          <p:cNvPr id="54" name="Text 47"/>
-          <p:cNvSpPr txBox="1"/>
-          <p:nvPr/>
-        </p:nvSpPr>
-        <p:spPr>
-          <a:xfrm>
-            <a:off x="457200" y="3749040"/>
-            <a:ext cx="11274552" cy="256032"/>
-          </a:xfrm>
-          <a:prstGeom prst="rect">
-            <a:avLst/>
-          </a:prstGeom>
-          <a:noFill/>
-          <a:ln/>
-        </p:spPr>
-        <p:txBody>
-          <a:bodyPr wrap="square" lIns="0" tIns="0" rIns="0" bIns="0" rtlCol="0" anchor="ctr"/>
-          <a:lstStyle/>
-          <a:p>
-            <a:pPr indent="0" marL="0">
-              <a:buNone/>
-            </a:pPr>
-            <a:r>
-              <a:rPr lang="en-US" sz="1500" b="1" dirty="0">
-                <a:solidFill>
-                  <a:srgbClr val="12304F"/>
-                </a:solidFill>
-                <a:latin typeface="Calibri" pitchFamily="34" charset="0"/>
-                <a:ea typeface="Calibri" pitchFamily="34" charset="-122"/>
-                <a:cs typeface="Calibri" pitchFamily="34" charset="-120"/>
-              </a:rPr>
-              <a:t>Dynamic, need-based segmentation   </a:t>
-            </a:r>
-            <a:pPr indent="0" marL="0">
-              <a:buNone/>
-            </a:pPr>
-            <a:r>
-              <a:rPr lang="en-US" sz="1000" i="1" dirty="0">
-                <a:solidFill>
-                  <a:srgbClr val="0E7C86"/>
-                </a:solidFill>
-                <a:latin typeface="Calibri" pitchFamily="34" charset="0"/>
-                <a:ea typeface="Calibri" pitchFamily="34" charset="-122"/>
-                <a:cs typeface="Calibri" pitchFamily="34" charset="-120"/>
-              </a:rPr>
-              <a:t>— built on the live profile from Stage 2</a:t>
-            </a:r>
-            <a:endParaRPr lang="en-US" sz="1500" dirty="0"/>
-          </a:p>
-        </p:txBody>
-      </p:sp>
-      <p:sp>
-        <p:nvSpPr>
-          <p:cNvPr id="55" name="Text 48"/>
-          <p:cNvSpPr txBox="1"/>
-          <p:nvPr/>
-        </p:nvSpPr>
-        <p:spPr>
-          <a:xfrm>
-            <a:off x="457200" y="4059936"/>
-            <a:ext cx="11274552" cy="402336"/>
-          </a:xfrm>
-          <a:prstGeom prst="rect">
-            <a:avLst/>
-          </a:prstGeom>
-          <a:noFill/>
-          <a:ln/>
-        </p:spPr>
-        <p:txBody>
-          <a:bodyPr wrap="square" lIns="0" tIns="0" rIns="0" bIns="0" rtlCol="0" anchor="t"/>
-          <a:lstStyle/>
-          <a:p>
-            <a:pPr indent="0" marL="0">
-              <a:lnSpc>
-                <a:spcPct val="95000"/>
-              </a:lnSpc>
-              <a:buNone/>
-            </a:pPr>
-            <a:r>
-              <a:rPr lang="en-US" sz="960" dirty="0">
-                <a:solidFill>
-                  <a:srgbClr val="3E5163"/>
-                </a:solidFill>
-                <a:latin typeface="Calibri" pitchFamily="34" charset="0"/>
-                <a:ea typeface="Calibri" pitchFamily="34" charset="-122"/>
-                <a:cs typeface="Calibri" pitchFamily="34" charset="-120"/>
-              </a:rPr>
-              <a:t>Rather than fixing customers into permanent groups, the engine sorts each person into the segment that matches their need right now — and moves them to a different segment the moment their life stage, behavior or the products on offer change.</a:t>
-            </a:r>
-            <a:endParaRPr lang="en-US" sz="960" dirty="0"/>
-          </a:p>
-        </p:txBody>
-      </p:sp>
-      <p:sp>
-        <p:nvSpPr>
-          <p:cNvPr id="56" name="Shape 49"/>
-          <p:cNvSpPr/>
-          <p:nvPr/>
-        </p:nvSpPr>
-        <p:spPr>
-          <a:xfrm>
-            <a:off x="740664" y="4489704"/>
-            <a:ext cx="1481328" cy="1481328"/>
-          </a:xfrm>
-          <a:prstGeom prst="ellipse">
-            <a:avLst/>
-          </a:prstGeom>
-          <a:ln w="12700">
-            <a:solidFill>
-              <a:srgbClr val="0E7C86"/>
-            </a:solidFill>
-            <a:prstDash val="dash"/>
-          </a:ln>
-        </p:spPr>
-      </p:sp>
-      <p:sp>
-        <p:nvSpPr>
-          <p:cNvPr id="57" name="Shape 50"/>
-          <p:cNvSpPr/>
-          <p:nvPr/>
-        </p:nvSpPr>
-        <p:spPr>
-          <a:xfrm>
-            <a:off x="813816" y="4562856"/>
-            <a:ext cx="1335024" cy="1335024"/>
-          </a:xfrm>
-          <a:prstGeom prst="ellipse">
-            <a:avLst/>
-          </a:prstGeom>
-          <a:solidFill>
-            <a:srgbClr val="0E7C86"/>
-          </a:solidFill>
-          <a:ln/>
-        </p:spPr>
-      </p:sp>
-      <p:sp>
-        <p:nvSpPr>
-          <p:cNvPr id="58" name="Shape 51"/>
-          <p:cNvSpPr/>
-          <p:nvPr/>
-        </p:nvSpPr>
-        <p:spPr>
-          <a:xfrm>
-            <a:off x="1316736" y="4828032"/>
-            <a:ext cx="329184" cy="329184"/>
-          </a:xfrm>
-          <a:prstGeom prst="ellipse">
-            <a:avLst/>
-          </a:prstGeom>
-          <a:solidFill>
-            <a:srgbClr val="0A5C64"/>
+            <a:srgbClr val="1F6FB0"/>
           </a:solidFill>
           <a:ln/>
         </p:spPr>
       </p:sp>
       <p:pic>
         <p:nvPicPr>
-          <p:cNvPr id="59" name="Image 5" descr="preencoded.png">    </p:cNvPr>
+          <p:cNvPr id="22" name="Image 5" descr="preencoded.png">    </p:cNvPr>
           <p:cNvPicPr>
             <a:picLocks noChangeAspect="1"/>
           </p:cNvPicPr>
@@ -5893,8 +4745,8 @@
         </p:blipFill>
         <p:spPr>
           <a:xfrm>
-            <a:off x="1395740" y="4907036"/>
-            <a:ext cx="171176" cy="171176"/>
+            <a:off x="624352" y="2818912"/>
+            <a:ext cx="104607" cy="104607"/>
           </a:xfrm>
           <a:prstGeom prst="rect">
             <a:avLst/>
@@ -5903,123 +4755,53 @@
       </p:pic>
       <p:sp>
         <p:nvSpPr>
-          <p:cNvPr id="60" name="Text 52"/>
-          <p:cNvSpPr txBox="1"/>
-          <p:nvPr/>
-        </p:nvSpPr>
-        <p:spPr>
-          <a:xfrm>
-            <a:off x="841248" y="5230368"/>
-            <a:ext cx="1280160" cy="420624"/>
-          </a:xfrm>
-          <a:prstGeom prst="rect">
-            <a:avLst/>
-          </a:prstGeom>
-          <a:noFill/>
-          <a:ln/>
-        </p:spPr>
-        <p:txBody>
-          <a:bodyPr wrap="square" lIns="0" tIns="0" rIns="0" bIns="0" rtlCol="0" anchor="t"/>
-          <a:lstStyle/>
-          <a:p>
-            <a:pPr algn="ctr" indent="0" marL="0">
-              <a:lnSpc>
-                <a:spcPct val="90000"/>
-              </a:lnSpc>
-              <a:buNone/>
-            </a:pPr>
-            <a:r>
-              <a:rPr lang="en-US" sz="1150" b="1" dirty="0">
-                <a:solidFill>
-                  <a:srgbClr val="FFFFFF"/>
-                </a:solidFill>
-                <a:latin typeface="Calibri" pitchFamily="34" charset="0"/>
-                <a:ea typeface="Calibri" pitchFamily="34" charset="-122"/>
-                <a:cs typeface="Calibri" pitchFamily="34" charset="-120"/>
-              </a:rPr>
-              <a:t>Behavioral</a:t>
-            </a:r>
-            <a:endParaRPr lang="en-US" sz="1150" dirty="0"/>
-          </a:p>
-          <a:p>
-            <a:pPr algn="ctr" indent="0" marL="0">
-              <a:lnSpc>
-                <a:spcPct val="90000"/>
-              </a:lnSpc>
-              <a:buNone/>
-            </a:pPr>
-            <a:r>
-              <a:rPr lang="en-US" sz="1150" b="1" dirty="0">
-                <a:solidFill>
-                  <a:srgbClr val="FFFFFF"/>
-                </a:solidFill>
-                <a:latin typeface="Calibri" pitchFamily="34" charset="0"/>
-                <a:ea typeface="Calibri" pitchFamily="34" charset="-122"/>
-                <a:cs typeface="Calibri" pitchFamily="34" charset="-120"/>
-              </a:rPr>
-              <a:t>DNA</a:t>
-            </a:r>
-            <a:endParaRPr lang="en-US" sz="1150" dirty="0"/>
-          </a:p>
-        </p:txBody>
-      </p:sp>
-      <p:sp>
-        <p:nvSpPr>
-          <p:cNvPr id="61" name="Shape 53"/>
-          <p:cNvSpPr/>
-          <p:nvPr/>
-        </p:nvSpPr>
-        <p:spPr>
-          <a:xfrm>
-            <a:off x="2167128" y="5111496"/>
-            <a:ext cx="457200" cy="237744"/>
-          </a:xfrm>
-          <a:prstGeom prst="rightArrow">
-            <a:avLst/>
-          </a:prstGeom>
-          <a:solidFill>
-            <a:srgbClr val="0E7C86"/>
-          </a:solidFill>
-          <a:ln/>
-        </p:spPr>
-      </p:sp>
-      <p:sp>
-        <p:nvSpPr>
-          <p:cNvPr id="62" name="Shape 54"/>
-          <p:cNvSpPr/>
-          <p:nvPr/>
-        </p:nvSpPr>
-        <p:spPr>
-          <a:xfrm>
-            <a:off x="3127248" y="4553712"/>
-            <a:ext cx="1574597" cy="1371600"/>
-          </a:xfrm>
-          <a:prstGeom prst="roundRect">
-            <a:avLst>
-              <a:gd name="adj" fmla="val 6000"/>
-            </a:avLst>
-          </a:prstGeom>
-          <a:solidFill>
-            <a:srgbClr val="F5F9FC"/>
-          </a:solidFill>
-          <a:ln w="12700">
-            <a:solidFill>
-              <a:srgbClr val="D2E1EE"/>
-            </a:solidFill>
-            <a:prstDash val="solid"/>
-          </a:ln>
-        </p:spPr>
-      </p:sp>
-      <p:sp>
-        <p:nvSpPr>
-          <p:cNvPr id="63" name="Shape 55"/>
-          <p:cNvSpPr/>
-          <p:nvPr/>
-        </p:nvSpPr>
-        <p:spPr>
-          <a:xfrm>
-            <a:off x="3704234" y="4636008"/>
-            <a:ext cx="420624" cy="420624"/>
+          <p:cNvPr id="23" name="Text 15"/>
+          <p:cNvSpPr txBox="1"/>
+          <p:nvPr/>
+        </p:nvSpPr>
+        <p:spPr>
+          <a:xfrm>
+            <a:off x="859536" y="2761488"/>
+            <a:ext cx="1828800" cy="219456"/>
+          </a:xfrm>
+          <a:prstGeom prst="rect">
+            <a:avLst/>
+          </a:prstGeom>
+          <a:noFill/>
+          <a:ln/>
+        </p:spPr>
+        <p:txBody>
+          <a:bodyPr wrap="square" lIns="0" tIns="0" rIns="0" bIns="0" rtlCol="0" anchor="ctr"/>
+          <a:lstStyle/>
+          <a:p>
+            <a:pPr indent="0" marL="0">
+              <a:buNone/>
+            </a:pPr>
+            <a:r>
+              <a:rPr lang="en-US" sz="840" dirty="0">
+                <a:solidFill>
+                  <a:srgbClr val="3E5163"/>
+                </a:solidFill>
+                <a:latin typeface="Calibri" pitchFamily="34" charset="0"/>
+                <a:ea typeface="Calibri" pitchFamily="34" charset="-122"/>
+                <a:cs typeface="Calibri" pitchFamily="34" charset="-120"/>
+              </a:rPr>
+              <a:t>Website journeys</a:t>
+            </a:r>
+            <a:endParaRPr lang="en-US" sz="840" dirty="0"/>
+          </a:p>
+        </p:txBody>
+      </p:sp>
+      <p:sp>
+        <p:nvSpPr>
+          <p:cNvPr id="24" name="Shape 16"/>
+          <p:cNvSpPr/>
+          <p:nvPr/>
+        </p:nvSpPr>
+        <p:spPr>
+          <a:xfrm>
+            <a:off x="576072" y="2985516"/>
+            <a:ext cx="201168" cy="201168"/>
           </a:xfrm>
           <a:prstGeom prst="ellipse">
             <a:avLst/>
@@ -6032,7 +4814,7 @@
       </p:sp>
       <p:pic>
         <p:nvPicPr>
-          <p:cNvPr id="64" name="Image 6" descr="preencoded.png">    </p:cNvPr>
+          <p:cNvPr id="25" name="Image 6" descr="preencoded.png">    </p:cNvPr>
           <p:cNvPicPr>
             <a:picLocks noChangeAspect="1"/>
           </p:cNvPicPr>
@@ -6046,8 +4828,8 @@
         </p:blipFill>
         <p:spPr>
           <a:xfrm>
-            <a:off x="3805184" y="4736958"/>
-            <a:ext cx="218724" cy="218724"/>
+            <a:off x="624352" y="3033796"/>
+            <a:ext cx="104607" cy="104607"/>
           </a:xfrm>
           <a:prstGeom prst="rect">
             <a:avLst/>
@@ -6056,135 +4838,66 @@
       </p:pic>
       <p:sp>
         <p:nvSpPr>
-          <p:cNvPr id="65" name="Text 56"/>
-          <p:cNvSpPr txBox="1"/>
-          <p:nvPr/>
-        </p:nvSpPr>
-        <p:spPr>
-          <a:xfrm>
-            <a:off x="3182112" y="5102352"/>
-            <a:ext cx="1464869" cy="219456"/>
-          </a:xfrm>
-          <a:prstGeom prst="rect">
-            <a:avLst/>
-          </a:prstGeom>
-          <a:noFill/>
-          <a:ln/>
-        </p:spPr>
-        <p:txBody>
-          <a:bodyPr wrap="square" lIns="0" tIns="0" rIns="0" bIns="0" rtlCol="0" anchor="t"/>
-          <a:lstStyle/>
-          <a:p>
-            <a:pPr algn="ctr" indent="0" marL="0">
-              <a:buNone/>
-            </a:pPr>
-            <a:r>
-              <a:rPr lang="en-US" sz="960" b="1" dirty="0">
-                <a:solidFill>
-                  <a:srgbClr val="12304F"/>
-                </a:solidFill>
-                <a:latin typeface="Calibri" pitchFamily="34" charset="0"/>
-                <a:ea typeface="Calibri" pitchFamily="34" charset="-122"/>
-                <a:cs typeface="Calibri" pitchFamily="34" charset="-120"/>
-              </a:rPr>
-              <a:t>Protection-seeker</a:t>
-            </a:r>
-            <a:endParaRPr lang="en-US" sz="960" dirty="0"/>
-          </a:p>
-        </p:txBody>
-      </p:sp>
-      <p:sp>
-        <p:nvSpPr>
-          <p:cNvPr id="66" name="Text 57"/>
-          <p:cNvSpPr txBox="1"/>
-          <p:nvPr/>
-        </p:nvSpPr>
-        <p:spPr>
-          <a:xfrm>
-            <a:off x="3200400" y="5340096"/>
-            <a:ext cx="1428293" cy="530352"/>
-          </a:xfrm>
-          <a:prstGeom prst="rect">
-            <a:avLst/>
-          </a:prstGeom>
-          <a:noFill/>
-          <a:ln/>
-        </p:spPr>
-        <p:txBody>
-          <a:bodyPr wrap="square" lIns="0" tIns="0" rIns="0" bIns="0" rtlCol="0" anchor="t"/>
-          <a:lstStyle/>
-          <a:p>
-            <a:pPr algn="ctr" indent="0" marL="0">
-              <a:lnSpc>
-                <a:spcPct val="94000"/>
-              </a:lnSpc>
-              <a:buNone/>
-            </a:pPr>
-            <a:r>
-              <a:rPr lang="en-US" sz="790" i="1" dirty="0">
-                <a:solidFill>
-                  <a:srgbClr val="76889A"/>
-                </a:solidFill>
-                <a:latin typeface="Calibri" pitchFamily="34" charset="0"/>
-                <a:ea typeface="Calibri" pitchFamily="34" charset="-122"/>
-                <a:cs typeface="Calibri" pitchFamily="34" charset="-120"/>
-              </a:rPr>
-              <a:t>Wants wider, stronger cover for peace of mind.</a:t>
-            </a:r>
-            <a:endParaRPr lang="en-US" sz="790" dirty="0"/>
-          </a:p>
-        </p:txBody>
-      </p:sp>
-      <p:sp>
-        <p:nvSpPr>
-          <p:cNvPr id="67" name="Shape 58"/>
-          <p:cNvSpPr/>
-          <p:nvPr/>
-        </p:nvSpPr>
-        <p:spPr>
-          <a:xfrm>
-            <a:off x="4884725" y="4553712"/>
-            <a:ext cx="1574597" cy="1371600"/>
-          </a:xfrm>
-          <a:prstGeom prst="roundRect">
-            <a:avLst>
-              <a:gd name="adj" fmla="val 6000"/>
-            </a:avLst>
-          </a:prstGeom>
-          <a:solidFill>
-            <a:srgbClr val="F5F9FC"/>
-          </a:solidFill>
-          <a:ln w="12700">
-            <a:solidFill>
-              <a:srgbClr val="D2E1EE"/>
-            </a:solidFill>
-            <a:prstDash val="solid"/>
-          </a:ln>
-        </p:spPr>
-      </p:sp>
-      <p:sp>
-        <p:nvSpPr>
-          <p:cNvPr id="68" name="Shape 59"/>
-          <p:cNvSpPr/>
-          <p:nvPr/>
-        </p:nvSpPr>
-        <p:spPr>
-          <a:xfrm>
-            <a:off x="5461711" y="4636008"/>
-            <a:ext cx="420624" cy="420624"/>
+          <p:cNvPr id="26" name="Text 17"/>
+          <p:cNvSpPr txBox="1"/>
+          <p:nvPr/>
+        </p:nvSpPr>
+        <p:spPr>
+          <a:xfrm>
+            <a:off x="859536" y="2976372"/>
+            <a:ext cx="1828800" cy="219456"/>
+          </a:xfrm>
+          <a:prstGeom prst="rect">
+            <a:avLst/>
+          </a:prstGeom>
+          <a:noFill/>
+          <a:ln/>
+        </p:spPr>
+        <p:txBody>
+          <a:bodyPr wrap="square" lIns="0" tIns="0" rIns="0" bIns="0" rtlCol="0" anchor="ctr"/>
+          <a:lstStyle/>
+          <a:p>
+            <a:pPr indent="0" marL="0">
+              <a:buNone/>
+            </a:pPr>
+            <a:r>
+              <a:rPr lang="en-US" sz="840" dirty="0">
+                <a:solidFill>
+                  <a:srgbClr val="3E5163"/>
+                </a:solidFill>
+                <a:latin typeface="Calibri" pitchFamily="34" charset="0"/>
+                <a:ea typeface="Calibri" pitchFamily="34" charset="-122"/>
+                <a:cs typeface="Calibri" pitchFamily="34" charset="-120"/>
+              </a:rPr>
+              <a:t>Mobile app activity</a:t>
+            </a:r>
+            <a:endParaRPr lang="en-US" sz="840" dirty="0"/>
+          </a:p>
+        </p:txBody>
+      </p:sp>
+      <p:sp>
+        <p:nvSpPr>
+          <p:cNvPr id="27" name="Shape 18"/>
+          <p:cNvSpPr/>
+          <p:nvPr/>
+        </p:nvSpPr>
+        <p:spPr>
+          <a:xfrm>
+            <a:off x="576072" y="3200400"/>
+            <a:ext cx="201168" cy="201168"/>
           </a:xfrm>
           <a:prstGeom prst="ellipse">
             <a:avLst/>
           </a:prstGeom>
           <a:solidFill>
-            <a:srgbClr val="6A4C93"/>
+            <a:srgbClr val="1F6FB0"/>
           </a:solidFill>
           <a:ln/>
         </p:spPr>
       </p:sp>
       <p:pic>
         <p:nvPicPr>
-          <p:cNvPr id="69" name="Image 7" descr="preencoded.png">    </p:cNvPr>
+          <p:cNvPr id="28" name="Image 7" descr="preencoded.png">    </p:cNvPr>
           <p:cNvPicPr>
             <a:picLocks noChangeAspect="1"/>
           </p:cNvPicPr>
@@ -6198,8 +4911,8 @@
         </p:blipFill>
         <p:spPr>
           <a:xfrm>
-            <a:off x="5562661" y="4736958"/>
-            <a:ext cx="218724" cy="218724"/>
+            <a:off x="624352" y="3248680"/>
+            <a:ext cx="104607" cy="104607"/>
           </a:xfrm>
           <a:prstGeom prst="rect">
             <a:avLst/>
@@ -6208,135 +4921,66 @@
       </p:pic>
       <p:sp>
         <p:nvSpPr>
-          <p:cNvPr id="70" name="Text 60"/>
-          <p:cNvSpPr txBox="1"/>
-          <p:nvPr/>
-        </p:nvSpPr>
-        <p:spPr>
-          <a:xfrm>
-            <a:off x="4939589" y="5102352"/>
-            <a:ext cx="1464869" cy="219456"/>
-          </a:xfrm>
-          <a:prstGeom prst="rect">
-            <a:avLst/>
-          </a:prstGeom>
-          <a:noFill/>
-          <a:ln/>
-        </p:spPr>
-        <p:txBody>
-          <a:bodyPr wrap="square" lIns="0" tIns="0" rIns="0" bIns="0" rtlCol="0" anchor="t"/>
-          <a:lstStyle/>
-          <a:p>
-            <a:pPr algn="ctr" indent="0" marL="0">
-              <a:buNone/>
-            </a:pPr>
-            <a:r>
-              <a:rPr lang="en-US" sz="960" b="1" dirty="0">
-                <a:solidFill>
-                  <a:srgbClr val="12304F"/>
-                </a:solidFill>
-                <a:latin typeface="Calibri" pitchFamily="34" charset="0"/>
-                <a:ea typeface="Calibri" pitchFamily="34" charset="-122"/>
-                <a:cs typeface="Calibri" pitchFamily="34" charset="-120"/>
-              </a:rPr>
-              <a:t>Family-builder</a:t>
-            </a:r>
-            <a:endParaRPr lang="en-US" sz="960" dirty="0"/>
-          </a:p>
-        </p:txBody>
-      </p:sp>
-      <p:sp>
-        <p:nvSpPr>
-          <p:cNvPr id="71" name="Text 61"/>
-          <p:cNvSpPr txBox="1"/>
-          <p:nvPr/>
-        </p:nvSpPr>
-        <p:spPr>
-          <a:xfrm>
-            <a:off x="4957877" y="5340096"/>
-            <a:ext cx="1428293" cy="530352"/>
-          </a:xfrm>
-          <a:prstGeom prst="rect">
-            <a:avLst/>
-          </a:prstGeom>
-          <a:noFill/>
-          <a:ln/>
-        </p:spPr>
-        <p:txBody>
-          <a:bodyPr wrap="square" lIns="0" tIns="0" rIns="0" bIns="0" rtlCol="0" anchor="t"/>
-          <a:lstStyle/>
-          <a:p>
-            <a:pPr algn="ctr" indent="0" marL="0">
-              <a:lnSpc>
-                <a:spcPct val="94000"/>
-              </a:lnSpc>
-              <a:buNone/>
-            </a:pPr>
-            <a:r>
-              <a:rPr lang="en-US" sz="790" i="1" dirty="0">
-                <a:solidFill>
-                  <a:srgbClr val="76889A"/>
-                </a:solidFill>
-                <a:latin typeface="Calibri" pitchFamily="34" charset="0"/>
-                <a:ea typeface="Calibri" pitchFamily="34" charset="-122"/>
-                <a:cs typeface="Calibri" pitchFamily="34" charset="-120"/>
-              </a:rPr>
-              <a:t>Focused on protecting dependents and the home.</a:t>
-            </a:r>
-            <a:endParaRPr lang="en-US" sz="790" dirty="0"/>
-          </a:p>
-        </p:txBody>
-      </p:sp>
-      <p:sp>
-        <p:nvSpPr>
-          <p:cNvPr id="72" name="Shape 62"/>
-          <p:cNvSpPr/>
-          <p:nvPr/>
-        </p:nvSpPr>
-        <p:spPr>
-          <a:xfrm>
-            <a:off x="6642202" y="4553712"/>
-            <a:ext cx="1574597" cy="1371600"/>
-          </a:xfrm>
-          <a:prstGeom prst="roundRect">
-            <a:avLst>
-              <a:gd name="adj" fmla="val 6000"/>
-            </a:avLst>
-          </a:prstGeom>
-          <a:solidFill>
-            <a:srgbClr val="F5F9FC"/>
-          </a:solidFill>
-          <a:ln w="12700">
-            <a:solidFill>
-              <a:srgbClr val="D2E1EE"/>
-            </a:solidFill>
-            <a:prstDash val="solid"/>
-          </a:ln>
-        </p:spPr>
-      </p:sp>
-      <p:sp>
-        <p:nvSpPr>
-          <p:cNvPr id="73" name="Shape 63"/>
-          <p:cNvSpPr/>
-          <p:nvPr/>
-        </p:nvSpPr>
-        <p:spPr>
-          <a:xfrm>
-            <a:off x="7219188" y="4636008"/>
-            <a:ext cx="420624" cy="420624"/>
+          <p:cNvPr id="29" name="Text 19"/>
+          <p:cNvSpPr txBox="1"/>
+          <p:nvPr/>
+        </p:nvSpPr>
+        <p:spPr>
+          <a:xfrm>
+            <a:off x="859536" y="3191256"/>
+            <a:ext cx="1828800" cy="219456"/>
+          </a:xfrm>
+          <a:prstGeom prst="rect">
+            <a:avLst/>
+          </a:prstGeom>
+          <a:noFill/>
+          <a:ln/>
+        </p:spPr>
+        <p:txBody>
+          <a:bodyPr wrap="square" lIns="0" tIns="0" rIns="0" bIns="0" rtlCol="0" anchor="ctr"/>
+          <a:lstStyle/>
+          <a:p>
+            <a:pPr indent="0" marL="0">
+              <a:buNone/>
+            </a:pPr>
+            <a:r>
+              <a:rPr lang="en-US" sz="840" dirty="0">
+                <a:solidFill>
+                  <a:srgbClr val="3E5163"/>
+                </a:solidFill>
+                <a:latin typeface="Calibri" pitchFamily="34" charset="0"/>
+                <a:ea typeface="Calibri" pitchFamily="34" charset="-122"/>
+                <a:cs typeface="Calibri" pitchFamily="34" charset="-120"/>
+              </a:rPr>
+              <a:t>Service requests</a:t>
+            </a:r>
+            <a:endParaRPr lang="en-US" sz="840" dirty="0"/>
+          </a:p>
+        </p:txBody>
+      </p:sp>
+      <p:sp>
+        <p:nvSpPr>
+          <p:cNvPr id="30" name="Shape 20"/>
+          <p:cNvSpPr/>
+          <p:nvPr/>
+        </p:nvSpPr>
+        <p:spPr>
+          <a:xfrm>
+            <a:off x="576072" y="3415284"/>
+            <a:ext cx="201168" cy="201168"/>
           </a:xfrm>
           <a:prstGeom prst="ellipse">
             <a:avLst/>
           </a:prstGeom>
           <a:solidFill>
-            <a:srgbClr val="CF8A18"/>
+            <a:srgbClr val="1F6FB0"/>
           </a:solidFill>
           <a:ln/>
         </p:spPr>
       </p:sp>
       <p:pic>
         <p:nvPicPr>
-          <p:cNvPr id="74" name="Image 8" descr="preencoded.png">    </p:cNvPr>
+          <p:cNvPr id="31" name="Image 8" descr="preencoded.png">    </p:cNvPr>
           <p:cNvPicPr>
             <a:picLocks noChangeAspect="1"/>
           </p:cNvPicPr>
@@ -6350,8 +4994,8 @@
         </p:blipFill>
         <p:spPr>
           <a:xfrm>
-            <a:off x="7320138" y="4736958"/>
-            <a:ext cx="218724" cy="218724"/>
+            <a:off x="624352" y="3463564"/>
+            <a:ext cx="104607" cy="104607"/>
           </a:xfrm>
           <a:prstGeom prst="rect">
             <a:avLst/>
@@ -6360,135 +5004,66 @@
       </p:pic>
       <p:sp>
         <p:nvSpPr>
-          <p:cNvPr id="75" name="Text 64"/>
-          <p:cNvSpPr txBox="1"/>
-          <p:nvPr/>
-        </p:nvSpPr>
-        <p:spPr>
-          <a:xfrm>
-            <a:off x="6697066" y="5102352"/>
-            <a:ext cx="1464869" cy="219456"/>
-          </a:xfrm>
-          <a:prstGeom prst="rect">
-            <a:avLst/>
-          </a:prstGeom>
-          <a:noFill/>
-          <a:ln/>
-        </p:spPr>
-        <p:txBody>
-          <a:bodyPr wrap="square" lIns="0" tIns="0" rIns="0" bIns="0" rtlCol="0" anchor="t"/>
-          <a:lstStyle/>
-          <a:p>
-            <a:pPr algn="ctr" indent="0" marL="0">
-              <a:buNone/>
-            </a:pPr>
-            <a:r>
-              <a:rPr lang="en-US" sz="960" b="1" dirty="0">
-                <a:solidFill>
-                  <a:srgbClr val="12304F"/>
-                </a:solidFill>
-                <a:latin typeface="Calibri" pitchFamily="34" charset="0"/>
-                <a:ea typeface="Calibri" pitchFamily="34" charset="-122"/>
-                <a:cs typeface="Calibri" pitchFamily="34" charset="-120"/>
-              </a:rPr>
-              <a:t>Price-sensitive</a:t>
-            </a:r>
-            <a:endParaRPr lang="en-US" sz="960" dirty="0"/>
-          </a:p>
-        </p:txBody>
-      </p:sp>
-      <p:sp>
-        <p:nvSpPr>
-          <p:cNvPr id="76" name="Text 65"/>
-          <p:cNvSpPr txBox="1"/>
-          <p:nvPr/>
-        </p:nvSpPr>
-        <p:spPr>
-          <a:xfrm>
-            <a:off x="6715354" y="5340096"/>
-            <a:ext cx="1428293" cy="530352"/>
-          </a:xfrm>
-          <a:prstGeom prst="rect">
-            <a:avLst/>
-          </a:prstGeom>
-          <a:noFill/>
-          <a:ln/>
-        </p:spPr>
-        <p:txBody>
-          <a:bodyPr wrap="square" lIns="0" tIns="0" rIns="0" bIns="0" rtlCol="0" anchor="t"/>
-          <a:lstStyle/>
-          <a:p>
-            <a:pPr algn="ctr" indent="0" marL="0">
-              <a:lnSpc>
-                <a:spcPct val="94000"/>
-              </a:lnSpc>
-              <a:buNone/>
-            </a:pPr>
-            <a:r>
-              <a:rPr lang="en-US" sz="790" i="1" dirty="0">
-                <a:solidFill>
-                  <a:srgbClr val="76889A"/>
-                </a:solidFill>
-                <a:latin typeface="Calibri" pitchFamily="34" charset="0"/>
-                <a:ea typeface="Calibri" pitchFamily="34" charset="-122"/>
-                <a:cs typeface="Calibri" pitchFamily="34" charset="-120"/>
-              </a:rPr>
-              <a:t>Weighs cost carefully; responds to value and offers.</a:t>
-            </a:r>
-            <a:endParaRPr lang="en-US" sz="790" dirty="0"/>
-          </a:p>
-        </p:txBody>
-      </p:sp>
-      <p:sp>
-        <p:nvSpPr>
-          <p:cNvPr id="77" name="Shape 66"/>
-          <p:cNvSpPr/>
-          <p:nvPr/>
-        </p:nvSpPr>
-        <p:spPr>
-          <a:xfrm>
-            <a:off x="8399678" y="4553712"/>
-            <a:ext cx="1574597" cy="1371600"/>
-          </a:xfrm>
-          <a:prstGeom prst="roundRect">
-            <a:avLst>
-              <a:gd name="adj" fmla="val 6000"/>
-            </a:avLst>
-          </a:prstGeom>
-          <a:solidFill>
-            <a:srgbClr val="F5F9FC"/>
-          </a:solidFill>
-          <a:ln w="12700">
-            <a:solidFill>
-              <a:srgbClr val="D2E1EE"/>
-            </a:solidFill>
-            <a:prstDash val="solid"/>
-          </a:ln>
-        </p:spPr>
-      </p:sp>
-      <p:sp>
-        <p:nvSpPr>
-          <p:cNvPr id="78" name="Shape 67"/>
-          <p:cNvSpPr/>
-          <p:nvPr/>
-        </p:nvSpPr>
-        <p:spPr>
-          <a:xfrm>
-            <a:off x="8976665" y="4636008"/>
-            <a:ext cx="420624" cy="420624"/>
+          <p:cNvPr id="32" name="Text 21"/>
+          <p:cNvSpPr txBox="1"/>
+          <p:nvPr/>
+        </p:nvSpPr>
+        <p:spPr>
+          <a:xfrm>
+            <a:off x="859536" y="3406140"/>
+            <a:ext cx="1828800" cy="219456"/>
+          </a:xfrm>
+          <a:prstGeom prst="rect">
+            <a:avLst/>
+          </a:prstGeom>
+          <a:noFill/>
+          <a:ln/>
+        </p:spPr>
+        <p:txBody>
+          <a:bodyPr wrap="square" lIns="0" tIns="0" rIns="0" bIns="0" rtlCol="0" anchor="ctr"/>
+          <a:lstStyle/>
+          <a:p>
+            <a:pPr indent="0" marL="0">
+              <a:buNone/>
+            </a:pPr>
+            <a:r>
+              <a:rPr lang="en-US" sz="840" dirty="0">
+                <a:solidFill>
+                  <a:srgbClr val="3E5163"/>
+                </a:solidFill>
+                <a:latin typeface="Calibri" pitchFamily="34" charset="0"/>
+                <a:ea typeface="Calibri" pitchFamily="34" charset="-122"/>
+                <a:cs typeface="Calibri" pitchFamily="34" charset="-120"/>
+              </a:rPr>
+              <a:t>Call-center conversations</a:t>
+            </a:r>
+            <a:endParaRPr lang="en-US" sz="840" dirty="0"/>
+          </a:p>
+        </p:txBody>
+      </p:sp>
+      <p:sp>
+        <p:nvSpPr>
+          <p:cNvPr id="33" name="Shape 22"/>
+          <p:cNvSpPr/>
+          <p:nvPr/>
+        </p:nvSpPr>
+        <p:spPr>
+          <a:xfrm>
+            <a:off x="576072" y="3630168"/>
+            <a:ext cx="201168" cy="201168"/>
           </a:xfrm>
           <a:prstGeom prst="ellipse">
             <a:avLst/>
           </a:prstGeom>
           <a:solidFill>
-            <a:srgbClr val="2E8B63"/>
+            <a:srgbClr val="1F6FB0"/>
           </a:solidFill>
           <a:ln/>
         </p:spPr>
       </p:sp>
       <p:pic>
         <p:nvPicPr>
-          <p:cNvPr id="79" name="Image 9" descr="preencoded.png">    </p:cNvPr>
+          <p:cNvPr id="34" name="Image 9" descr="preencoded.png">    </p:cNvPr>
           <p:cNvPicPr>
             <a:picLocks noChangeAspect="1"/>
           </p:cNvPicPr>
@@ -6502,8 +5077,8 @@
         </p:blipFill>
         <p:spPr>
           <a:xfrm>
-            <a:off x="9077615" y="4736958"/>
-            <a:ext cx="218724" cy="218724"/>
+            <a:off x="624352" y="3678448"/>
+            <a:ext cx="104607" cy="104607"/>
           </a:xfrm>
           <a:prstGeom prst="rect">
             <a:avLst/>
@@ -6512,103 +5087,81 @@
       </p:pic>
       <p:sp>
         <p:nvSpPr>
-          <p:cNvPr id="80" name="Text 68"/>
-          <p:cNvSpPr txBox="1"/>
-          <p:nvPr/>
-        </p:nvSpPr>
-        <p:spPr>
-          <a:xfrm>
-            <a:off x="8454542" y="5102352"/>
-            <a:ext cx="1464869" cy="219456"/>
-          </a:xfrm>
-          <a:prstGeom prst="rect">
-            <a:avLst/>
-          </a:prstGeom>
-          <a:noFill/>
-          <a:ln/>
-        </p:spPr>
-        <p:txBody>
-          <a:bodyPr wrap="square" lIns="0" tIns="0" rIns="0" bIns="0" rtlCol="0" anchor="t"/>
-          <a:lstStyle/>
-          <a:p>
-            <a:pPr algn="ctr" indent="0" marL="0">
-              <a:buNone/>
-            </a:pPr>
-            <a:r>
-              <a:rPr lang="en-US" sz="960" b="1" dirty="0">
-                <a:solidFill>
-                  <a:srgbClr val="12304F"/>
-                </a:solidFill>
-                <a:latin typeface="Calibri" pitchFamily="34" charset="0"/>
-                <a:ea typeface="Calibri" pitchFamily="34" charset="-122"/>
-                <a:cs typeface="Calibri" pitchFamily="34" charset="-120"/>
-              </a:rPr>
-              <a:t>Claims-sensitive</a:t>
-            </a:r>
-            <a:endParaRPr lang="en-US" sz="960" dirty="0"/>
-          </a:p>
-        </p:txBody>
-      </p:sp>
-      <p:sp>
-        <p:nvSpPr>
-          <p:cNvPr id="81" name="Text 69"/>
-          <p:cNvSpPr txBox="1"/>
-          <p:nvPr/>
-        </p:nvSpPr>
-        <p:spPr>
-          <a:xfrm>
-            <a:off x="8472830" y="5340096"/>
-            <a:ext cx="1428293" cy="530352"/>
-          </a:xfrm>
-          <a:prstGeom prst="rect">
-            <a:avLst/>
-          </a:prstGeom>
-          <a:noFill/>
-          <a:ln/>
-        </p:spPr>
-        <p:txBody>
-          <a:bodyPr wrap="square" lIns="0" tIns="0" rIns="0" bIns="0" rtlCol="0" anchor="t"/>
-          <a:lstStyle/>
-          <a:p>
-            <a:pPr algn="ctr" indent="0" marL="0">
-              <a:lnSpc>
-                <a:spcPct val="94000"/>
-              </a:lnSpc>
-              <a:buNone/>
-            </a:pPr>
-            <a:r>
-              <a:rPr lang="en-US" sz="790" i="1" dirty="0">
-                <a:solidFill>
-                  <a:srgbClr val="76889A"/>
-                </a:solidFill>
-                <a:latin typeface="Calibri" pitchFamily="34" charset="0"/>
-                <a:ea typeface="Calibri" pitchFamily="34" charset="-122"/>
-                <a:cs typeface="Calibri" pitchFamily="34" charset="-120"/>
-              </a:rPr>
-              <a:t>Cares most about smooth claims and good service.</a:t>
-            </a:r>
-            <a:endParaRPr lang="en-US" sz="790" dirty="0"/>
-          </a:p>
-        </p:txBody>
-      </p:sp>
-      <p:sp>
-        <p:nvSpPr>
-          <p:cNvPr id="82" name="Shape 70"/>
-          <p:cNvSpPr/>
-          <p:nvPr/>
-        </p:nvSpPr>
-        <p:spPr>
-          <a:xfrm>
-            <a:off x="10157155" y="4553712"/>
-            <a:ext cx="1574597" cy="1371600"/>
+          <p:cNvPr id="35" name="Text 23"/>
+          <p:cNvSpPr txBox="1"/>
+          <p:nvPr/>
+        </p:nvSpPr>
+        <p:spPr>
+          <a:xfrm>
+            <a:off x="859536" y="3621024"/>
+            <a:ext cx="1828800" cy="219456"/>
+          </a:xfrm>
+          <a:prstGeom prst="rect">
+            <a:avLst/>
+          </a:prstGeom>
+          <a:noFill/>
+          <a:ln/>
+        </p:spPr>
+        <p:txBody>
+          <a:bodyPr wrap="square" lIns="0" tIns="0" rIns="0" bIns="0" rtlCol="0" anchor="ctr"/>
+          <a:lstStyle/>
+          <a:p>
+            <a:pPr indent="0" marL="0">
+              <a:buNone/>
+            </a:pPr>
+            <a:r>
+              <a:rPr lang="en-US" sz="840" dirty="0">
+                <a:solidFill>
+                  <a:srgbClr val="3E5163"/>
+                </a:solidFill>
+                <a:latin typeface="Calibri" pitchFamily="34" charset="0"/>
+                <a:ea typeface="Calibri" pitchFamily="34" charset="-122"/>
+                <a:cs typeface="Calibri" pitchFamily="34" charset="-120"/>
+              </a:rPr>
+              <a:t>Complaint history</a:t>
+            </a:r>
+            <a:endParaRPr lang="en-US" sz="840" dirty="0"/>
+          </a:p>
+        </p:txBody>
+      </p:sp>
+      <p:sp>
+        <p:nvSpPr>
+          <p:cNvPr id="36" name="Shape 24"/>
+          <p:cNvSpPr/>
+          <p:nvPr/>
+        </p:nvSpPr>
+        <p:spPr>
+          <a:xfrm>
+            <a:off x="2798064" y="2514600"/>
+            <a:ext cx="292608" cy="219456"/>
+          </a:xfrm>
+          <a:prstGeom prst="rightArrow">
+            <a:avLst/>
+          </a:prstGeom>
+          <a:solidFill>
+            <a:srgbClr val="12304F"/>
+          </a:solidFill>
+          <a:ln/>
+        </p:spPr>
+      </p:sp>
+      <p:sp>
+        <p:nvSpPr>
+          <p:cNvPr id="37" name="Shape 25"/>
+          <p:cNvSpPr/>
+          <p:nvPr/>
+        </p:nvSpPr>
+        <p:spPr>
+          <a:xfrm>
+            <a:off x="3163824" y="1298448"/>
+            <a:ext cx="1956816" cy="2651760"/>
           </a:xfrm>
           <a:prstGeom prst="roundRect">
             <a:avLst>
-              <a:gd name="adj" fmla="val 6000"/>
+              <a:gd name="adj" fmla="val 3738"/>
             </a:avLst>
           </a:prstGeom>
           <a:solidFill>
-            <a:srgbClr val="F5F9FC"/>
+            <a:srgbClr val="EFF6FC"/>
           </a:solidFill>
           <a:ln w="12700">
             <a:solidFill>
@@ -6620,14 +5173,14 @@
       </p:sp>
       <p:sp>
         <p:nvSpPr>
-          <p:cNvPr id="83" name="Shape 71"/>
-          <p:cNvSpPr/>
-          <p:nvPr/>
-        </p:nvSpPr>
-        <p:spPr>
-          <a:xfrm>
-            <a:off x="10734142" y="4636008"/>
-            <a:ext cx="420624" cy="420624"/>
+          <p:cNvPr id="38" name="Shape 26"/>
+          <p:cNvSpPr/>
+          <p:nvPr/>
+        </p:nvSpPr>
+        <p:spPr>
+          <a:xfrm>
+            <a:off x="3886200" y="1426464"/>
+            <a:ext cx="512064" cy="512064"/>
           </a:xfrm>
           <a:prstGeom prst="ellipse">
             <a:avLst/>
@@ -6640,7 +5193,7 @@
       </p:sp>
       <p:pic>
         <p:nvPicPr>
-          <p:cNvPr id="84" name="Image 10" descr="preencoded.png">    </p:cNvPr>
+          <p:cNvPr id="39" name="Image 10" descr="preencoded.png">    </p:cNvPr>
           <p:cNvPicPr>
             <a:picLocks noChangeAspect="1"/>
           </p:cNvPicPr>
@@ -6654,8 +5207,8 @@
         </p:blipFill>
         <p:spPr>
           <a:xfrm>
-            <a:off x="10835091" y="4736958"/>
-            <a:ext cx="218724" cy="218724"/>
+            <a:off x="4009095" y="1549359"/>
+            <a:ext cx="266273" cy="266273"/>
           </a:xfrm>
           <a:prstGeom prst="rect">
             <a:avLst/>
@@ -6664,53 +5217,14 @@
       </p:pic>
       <p:sp>
         <p:nvSpPr>
-          <p:cNvPr id="85" name="Text 72"/>
-          <p:cNvSpPr txBox="1"/>
-          <p:nvPr/>
-        </p:nvSpPr>
-        <p:spPr>
-          <a:xfrm>
-            <a:off x="10212019" y="5102352"/>
-            <a:ext cx="1464869" cy="219456"/>
-          </a:xfrm>
-          <a:prstGeom prst="rect">
-            <a:avLst/>
-          </a:prstGeom>
-          <a:noFill/>
-          <a:ln/>
-        </p:spPr>
-        <p:txBody>
-          <a:bodyPr wrap="square" lIns="0" tIns="0" rIns="0" bIns="0" rtlCol="0" anchor="t"/>
-          <a:lstStyle/>
-          <a:p>
-            <a:pPr algn="ctr" indent="0" marL="0">
-              <a:buNone/>
-            </a:pPr>
-            <a:r>
-              <a:rPr lang="en-US" sz="960" b="1" dirty="0">
-                <a:solidFill>
-                  <a:srgbClr val="12304F"/>
-                </a:solidFill>
-                <a:latin typeface="Calibri" pitchFamily="34" charset="0"/>
-                <a:ea typeface="Calibri" pitchFamily="34" charset="-122"/>
-                <a:cs typeface="Calibri" pitchFamily="34" charset="-120"/>
-              </a:rPr>
-              <a:t>Digital-first</a:t>
-            </a:r>
-            <a:endParaRPr lang="en-US" sz="960" dirty="0"/>
-          </a:p>
-        </p:txBody>
-      </p:sp>
-      <p:sp>
-        <p:nvSpPr>
-          <p:cNvPr id="86" name="Text 73"/>
-          <p:cNvSpPr txBox="1"/>
-          <p:nvPr/>
-        </p:nvSpPr>
-        <p:spPr>
-          <a:xfrm>
-            <a:off x="10230307" y="5340096"/>
-            <a:ext cx="1428293" cy="530352"/>
+          <p:cNvPr id="40" name="Text 27"/>
+          <p:cNvSpPr txBox="1"/>
+          <p:nvPr/>
+        </p:nvSpPr>
+        <p:spPr>
+          <a:xfrm>
+            <a:off x="3236976" y="2011680"/>
+            <a:ext cx="1810512" cy="384048"/>
           </a:xfrm>
           <a:prstGeom prst="rect">
             <a:avLst/>
@@ -6724,60 +5238,1273 @@
           <a:p>
             <a:pPr algn="ctr" indent="0" marL="0">
               <a:lnSpc>
-                <a:spcPct val="94000"/>
+                <a:spcPct val="90000"/>
               </a:lnSpc>
               <a:buNone/>
             </a:pPr>
             <a:r>
-              <a:rPr lang="en-US" sz="790" i="1" dirty="0">
-                <a:solidFill>
-                  <a:srgbClr val="76889A"/>
-                </a:solidFill>
-                <a:latin typeface="Calibri" pitchFamily="34" charset="0"/>
-                <a:ea typeface="Calibri" pitchFamily="34" charset="-122"/>
-                <a:cs typeface="Calibri" pitchFamily="34" charset="-120"/>
-              </a:rPr>
-              <a:t>Prefers to research and buy on app or website.</a:t>
-            </a:r>
-            <a:endParaRPr lang="en-US" sz="790" dirty="0"/>
-          </a:p>
-        </p:txBody>
-      </p:sp>
-      <p:sp>
-        <p:nvSpPr>
-          <p:cNvPr id="87" name="Shape 74"/>
-          <p:cNvSpPr/>
-          <p:nvPr/>
-        </p:nvSpPr>
-        <p:spPr>
-          <a:xfrm>
-            <a:off x="3914546" y="6071616"/>
-            <a:ext cx="7029907" cy="0"/>
+              <a:rPr lang="en-US" sz="1050" b="1" dirty="0">
+                <a:solidFill>
+                  <a:srgbClr val="12304F"/>
+                </a:solidFill>
+                <a:latin typeface="Calibri" pitchFamily="34" charset="0"/>
+                <a:ea typeface="Calibri" pitchFamily="34" charset="-122"/>
+                <a:cs typeface="Calibri" pitchFamily="34" charset="-120"/>
+              </a:rPr>
+              <a:t>Embedding Engine</a:t>
+            </a:r>
+            <a:endParaRPr lang="en-US" sz="1050" dirty="0"/>
+          </a:p>
+        </p:txBody>
+      </p:sp>
+      <p:sp>
+        <p:nvSpPr>
+          <p:cNvPr id="41" name="Text 28"/>
+          <p:cNvSpPr txBox="1"/>
+          <p:nvPr/>
+        </p:nvSpPr>
+        <p:spPr>
+          <a:xfrm>
+            <a:off x="3273552" y="2414016"/>
+            <a:ext cx="1737360" cy="1463040"/>
+          </a:xfrm>
+          <a:prstGeom prst="rect">
+            <a:avLst/>
+          </a:prstGeom>
+          <a:noFill/>
+          <a:ln/>
+        </p:spPr>
+        <p:txBody>
+          <a:bodyPr wrap="square" lIns="0" tIns="0" rIns="0" bIns="0" rtlCol="0" anchor="t"/>
+          <a:lstStyle/>
+          <a:p>
+            <a:pPr algn="ctr" indent="0" marL="0">
+              <a:lnSpc>
+                <a:spcPct val="98000"/>
+              </a:lnSpc>
+              <a:buNone/>
+            </a:pPr>
+            <a:r>
+              <a:rPr lang="en-US" sz="820" dirty="0">
+                <a:solidFill>
+                  <a:srgbClr val="3E5163"/>
+                </a:solidFill>
+                <a:latin typeface="Calibri" pitchFamily="34" charset="0"/>
+                <a:ea typeface="Calibri" pitchFamily="34" charset="-122"/>
+                <a:cs typeface="Calibri" pitchFamily="34" charset="-120"/>
+              </a:rPr>
+              <a:t>Turns each customer's signals into a compact numeric “fingerprint,” and keeps it updated as behavior changes. A new feature just extends the fingerprint — the model never breaks.</a:t>
+            </a:r>
+            <a:endParaRPr lang="en-US" sz="820" dirty="0"/>
+          </a:p>
+        </p:txBody>
+      </p:sp>
+      <p:sp>
+        <p:nvSpPr>
+          <p:cNvPr id="42" name="Shape 29"/>
+          <p:cNvSpPr/>
+          <p:nvPr/>
+        </p:nvSpPr>
+        <p:spPr>
+          <a:xfrm>
+            <a:off x="5148072" y="1581912"/>
+            <a:ext cx="256032" cy="201168"/>
+          </a:xfrm>
+          <a:prstGeom prst="rightArrow">
+            <a:avLst/>
+          </a:prstGeom>
+          <a:solidFill>
+            <a:srgbClr val="12304F"/>
+          </a:solidFill>
+          <a:ln/>
+        </p:spPr>
+      </p:sp>
+      <p:sp>
+        <p:nvSpPr>
+          <p:cNvPr id="43" name="Shape 30"/>
+          <p:cNvSpPr/>
+          <p:nvPr/>
+        </p:nvSpPr>
+        <p:spPr>
+          <a:xfrm>
+            <a:off x="5358384" y="1298448"/>
+            <a:ext cx="1956816" cy="2651760"/>
+          </a:xfrm>
+          <a:prstGeom prst="roundRect">
+            <a:avLst>
+              <a:gd name="adj" fmla="val 3738"/>
+            </a:avLst>
+          </a:prstGeom>
+          <a:solidFill>
+            <a:srgbClr val="EFF6FC"/>
+          </a:solidFill>
+          <a:ln w="12700">
+            <a:solidFill>
+              <a:srgbClr val="D2E1EE"/>
+            </a:solidFill>
+            <a:prstDash val="solid"/>
+          </a:ln>
+        </p:spPr>
+      </p:sp>
+      <p:sp>
+        <p:nvSpPr>
+          <p:cNvPr id="44" name="Shape 31"/>
+          <p:cNvSpPr/>
+          <p:nvPr/>
+        </p:nvSpPr>
+        <p:spPr>
+          <a:xfrm>
+            <a:off x="6080760" y="1426464"/>
+            <a:ext cx="512064" cy="512064"/>
+          </a:xfrm>
+          <a:prstGeom prst="ellipse">
+            <a:avLst/>
+          </a:prstGeom>
+          <a:solidFill>
+            <a:srgbClr val="1F6FB0"/>
+          </a:solidFill>
+          <a:ln/>
+        </p:spPr>
+      </p:sp>
+      <p:pic>
+        <p:nvPicPr>
+          <p:cNvPr id="45" name="Image 11" descr="preencoded.png">    </p:cNvPr>
+          <p:cNvPicPr>
+            <a:picLocks noChangeAspect="1"/>
+          </p:cNvPicPr>
+          <p:nvPr/>
+        </p:nvPicPr>
+        <p:blipFill>
+          <a:blip r:embed="rId12"/>
+          <a:stretch>
+            <a:fillRect/>
+          </a:stretch>
+        </p:blipFill>
+        <p:spPr>
+          <a:xfrm>
+            <a:off x="6203655" y="1549359"/>
+            <a:ext cx="266273" cy="266273"/>
+          </a:xfrm>
+          <a:prstGeom prst="rect">
+            <a:avLst/>
+          </a:prstGeom>
+        </p:spPr>
+      </p:pic>
+      <p:sp>
+        <p:nvSpPr>
+          <p:cNvPr id="46" name="Text 32"/>
+          <p:cNvSpPr txBox="1"/>
+          <p:nvPr/>
+        </p:nvSpPr>
+        <p:spPr>
+          <a:xfrm>
+            <a:off x="5431536" y="2011680"/>
+            <a:ext cx="1810512" cy="384048"/>
+          </a:xfrm>
+          <a:prstGeom prst="rect">
+            <a:avLst/>
+          </a:prstGeom>
+          <a:noFill/>
+          <a:ln/>
+        </p:spPr>
+        <p:txBody>
+          <a:bodyPr wrap="square" lIns="0" tIns="0" rIns="0" bIns="0" rtlCol="0" anchor="t"/>
+          <a:lstStyle/>
+          <a:p>
+            <a:pPr algn="ctr" indent="0" marL="0">
+              <a:lnSpc>
+                <a:spcPct val="90000"/>
+              </a:lnSpc>
+              <a:buNone/>
+            </a:pPr>
+            <a:r>
+              <a:rPr lang="en-US" sz="1050" b="1" dirty="0">
+                <a:solidFill>
+                  <a:srgbClr val="12304F"/>
+                </a:solidFill>
+                <a:latin typeface="Calibri" pitchFamily="34" charset="0"/>
+                <a:ea typeface="Calibri" pitchFamily="34" charset="-122"/>
+                <a:cs typeface="Calibri" pitchFamily="34" charset="-120"/>
+              </a:rPr>
+              <a:t>Embedding Space &amp; Segments</a:t>
+            </a:r>
+            <a:endParaRPr lang="en-US" sz="1050" dirty="0"/>
+          </a:p>
+        </p:txBody>
+      </p:sp>
+      <p:sp>
+        <p:nvSpPr>
+          <p:cNvPr id="47" name="Text 33"/>
+          <p:cNvSpPr txBox="1"/>
+          <p:nvPr/>
+        </p:nvSpPr>
+        <p:spPr>
+          <a:xfrm>
+            <a:off x="5468112" y="2414016"/>
+            <a:ext cx="1737360" cy="1463040"/>
+          </a:xfrm>
+          <a:prstGeom prst="rect">
+            <a:avLst/>
+          </a:prstGeom>
+          <a:noFill/>
+          <a:ln/>
+        </p:spPr>
+        <p:txBody>
+          <a:bodyPr wrap="square" lIns="0" tIns="0" rIns="0" bIns="0" rtlCol="0" anchor="t"/>
+          <a:lstStyle/>
+          <a:p>
+            <a:pPr algn="ctr" indent="0" marL="0">
+              <a:lnSpc>
+                <a:spcPct val="98000"/>
+              </a:lnSpc>
+              <a:buNone/>
+            </a:pPr>
+            <a:r>
+              <a:rPr lang="en-US" sz="820" dirty="0">
+                <a:solidFill>
+                  <a:srgbClr val="3E5163"/>
+                </a:solidFill>
+                <a:latin typeface="Calibri" pitchFamily="34" charset="0"/>
+                <a:ea typeface="Calibri" pitchFamily="34" charset="-122"/>
+                <a:cs typeface="Calibri" pitchFamily="34" charset="-120"/>
+              </a:rPr>
+              <a:t>All ~14 crore fingerprints live in one space, where similar customers naturally cluster into need-based segments.</a:t>
+            </a:r>
+            <a:endParaRPr lang="en-US" sz="820" dirty="0"/>
+          </a:p>
+        </p:txBody>
+      </p:sp>
+      <p:sp>
+        <p:nvSpPr>
+          <p:cNvPr id="48" name="Shape 34"/>
+          <p:cNvSpPr/>
+          <p:nvPr/>
+        </p:nvSpPr>
+        <p:spPr>
+          <a:xfrm>
+            <a:off x="7342632" y="1581912"/>
+            <a:ext cx="256032" cy="201168"/>
+          </a:xfrm>
+          <a:prstGeom prst="rightArrow">
+            <a:avLst/>
+          </a:prstGeom>
+          <a:solidFill>
+            <a:srgbClr val="12304F"/>
+          </a:solidFill>
+          <a:ln/>
+        </p:spPr>
+      </p:sp>
+      <p:sp>
+        <p:nvSpPr>
+          <p:cNvPr id="49" name="Shape 35"/>
+          <p:cNvSpPr/>
+          <p:nvPr/>
+        </p:nvSpPr>
+        <p:spPr>
+          <a:xfrm>
+            <a:off x="7552944" y="1298448"/>
+            <a:ext cx="1956816" cy="2651760"/>
+          </a:xfrm>
+          <a:prstGeom prst="roundRect">
+            <a:avLst>
+              <a:gd name="adj" fmla="val 3738"/>
+            </a:avLst>
+          </a:prstGeom>
+          <a:solidFill>
+            <a:srgbClr val="EFF6FC"/>
+          </a:solidFill>
+          <a:ln w="12700">
+            <a:solidFill>
+              <a:srgbClr val="D2E1EE"/>
+            </a:solidFill>
+            <a:prstDash val="solid"/>
+          </a:ln>
+        </p:spPr>
+      </p:sp>
+      <p:sp>
+        <p:nvSpPr>
+          <p:cNvPr id="50" name="Shape 36"/>
+          <p:cNvSpPr/>
+          <p:nvPr/>
+        </p:nvSpPr>
+        <p:spPr>
+          <a:xfrm>
+            <a:off x="8275320" y="1426464"/>
+            <a:ext cx="512064" cy="512064"/>
+          </a:xfrm>
+          <a:prstGeom prst="ellipse">
+            <a:avLst/>
+          </a:prstGeom>
+          <a:solidFill>
+            <a:srgbClr val="6A4C93"/>
+          </a:solidFill>
+          <a:ln/>
+        </p:spPr>
+      </p:sp>
+      <p:pic>
+        <p:nvPicPr>
+          <p:cNvPr id="51" name="Image 12" descr="preencoded.png">    </p:cNvPr>
+          <p:cNvPicPr>
+            <a:picLocks noChangeAspect="1"/>
+          </p:cNvPicPr>
+          <p:nvPr/>
+        </p:nvPicPr>
+        <p:blipFill>
+          <a:blip r:embed="rId13"/>
+          <a:stretch>
+            <a:fillRect/>
+          </a:stretch>
+        </p:blipFill>
+        <p:spPr>
+          <a:xfrm>
+            <a:off x="8398215" y="1549359"/>
+            <a:ext cx="266273" cy="266273"/>
+          </a:xfrm>
+          <a:prstGeom prst="rect">
+            <a:avLst/>
+          </a:prstGeom>
+        </p:spPr>
+      </p:pic>
+      <p:sp>
+        <p:nvSpPr>
+          <p:cNvPr id="52" name="Text 37"/>
+          <p:cNvSpPr txBox="1"/>
+          <p:nvPr/>
+        </p:nvSpPr>
+        <p:spPr>
+          <a:xfrm>
+            <a:off x="7626096" y="2011680"/>
+            <a:ext cx="1810512" cy="384048"/>
+          </a:xfrm>
+          <a:prstGeom prst="rect">
+            <a:avLst/>
+          </a:prstGeom>
+          <a:noFill/>
+          <a:ln/>
+        </p:spPr>
+        <p:txBody>
+          <a:bodyPr wrap="square" lIns="0" tIns="0" rIns="0" bIns="0" rtlCol="0" anchor="t"/>
+          <a:lstStyle/>
+          <a:p>
+            <a:pPr algn="ctr" indent="0" marL="0">
+              <a:lnSpc>
+                <a:spcPct val="90000"/>
+              </a:lnSpc>
+              <a:buNone/>
+            </a:pPr>
+            <a:r>
+              <a:rPr lang="en-US" sz="1050" b="1" dirty="0">
+                <a:solidFill>
+                  <a:srgbClr val="12304F"/>
+                </a:solidFill>
+                <a:latin typeface="Calibri" pitchFamily="34" charset="0"/>
+                <a:ea typeface="Calibri" pitchFamily="34" charset="-122"/>
+                <a:cs typeface="Calibri" pitchFamily="34" charset="-120"/>
+              </a:rPr>
+              <a:t>Similarity Search</a:t>
+            </a:r>
+            <a:endParaRPr lang="en-US" sz="1050" dirty="0"/>
+          </a:p>
+        </p:txBody>
+      </p:sp>
+      <p:sp>
+        <p:nvSpPr>
+          <p:cNvPr id="53" name="Text 38"/>
+          <p:cNvSpPr txBox="1"/>
+          <p:nvPr/>
+        </p:nvSpPr>
+        <p:spPr>
+          <a:xfrm>
+            <a:off x="7662672" y="2414016"/>
+            <a:ext cx="1737360" cy="1463040"/>
+          </a:xfrm>
+          <a:prstGeom prst="rect">
+            <a:avLst/>
+          </a:prstGeom>
+          <a:noFill/>
+          <a:ln/>
+        </p:spPr>
+        <p:txBody>
+          <a:bodyPr wrap="square" lIns="0" tIns="0" rIns="0" bIns="0" rtlCol="0" anchor="t"/>
+          <a:lstStyle/>
+          <a:p>
+            <a:pPr algn="ctr" indent="0" marL="0">
+              <a:lnSpc>
+                <a:spcPct val="98000"/>
+              </a:lnSpc>
+              <a:buNone/>
+            </a:pPr>
+            <a:r>
+              <a:rPr lang="en-US" sz="820" dirty="0">
+                <a:solidFill>
+                  <a:srgbClr val="3E5163"/>
+                </a:solidFill>
+                <a:latin typeface="Calibri" pitchFamily="34" charset="0"/>
+                <a:ea typeface="Calibri" pitchFamily="34" charset="-122"/>
+                <a:cs typeface="Calibri" pitchFamily="34" charset="-120"/>
+              </a:rPr>
+              <a:t>Find each customer's closest look-alikes. A brand-new customer is matched to similar existing ones — exactly how Spotify suggests songs.</a:t>
+            </a:r>
+            <a:endParaRPr lang="en-US" sz="820" dirty="0"/>
+          </a:p>
+        </p:txBody>
+      </p:sp>
+      <p:sp>
+        <p:nvSpPr>
+          <p:cNvPr id="54" name="Shape 39"/>
+          <p:cNvSpPr/>
+          <p:nvPr/>
+        </p:nvSpPr>
+        <p:spPr>
+          <a:xfrm>
+            <a:off x="9537192" y="1581912"/>
+            <a:ext cx="256032" cy="201168"/>
+          </a:xfrm>
+          <a:prstGeom prst="rightArrow">
+            <a:avLst/>
+          </a:prstGeom>
+          <a:solidFill>
+            <a:srgbClr val="12304F"/>
+          </a:solidFill>
+          <a:ln/>
+        </p:spPr>
+      </p:sp>
+      <p:sp>
+        <p:nvSpPr>
+          <p:cNvPr id="55" name="Shape 40"/>
+          <p:cNvSpPr/>
+          <p:nvPr/>
+        </p:nvSpPr>
+        <p:spPr>
+          <a:xfrm>
+            <a:off x="9747504" y="1298448"/>
+            <a:ext cx="1956816" cy="2651760"/>
+          </a:xfrm>
+          <a:prstGeom prst="roundRect">
+            <a:avLst>
+              <a:gd name="adj" fmla="val 3738"/>
+            </a:avLst>
+          </a:prstGeom>
+          <a:solidFill>
+            <a:srgbClr val="EFF6FC"/>
+          </a:solidFill>
+          <a:ln w="12700">
+            <a:solidFill>
+              <a:srgbClr val="D2E1EE"/>
+            </a:solidFill>
+            <a:prstDash val="solid"/>
+          </a:ln>
+        </p:spPr>
+      </p:sp>
+      <p:sp>
+        <p:nvSpPr>
+          <p:cNvPr id="56" name="Shape 41"/>
+          <p:cNvSpPr/>
+          <p:nvPr/>
+        </p:nvSpPr>
+        <p:spPr>
+          <a:xfrm>
+            <a:off x="10469880" y="1426464"/>
+            <a:ext cx="512064" cy="512064"/>
+          </a:xfrm>
+          <a:prstGeom prst="ellipse">
+            <a:avLst/>
+          </a:prstGeom>
+          <a:solidFill>
+            <a:srgbClr val="2E8B63"/>
+          </a:solidFill>
+          <a:ln/>
+        </p:spPr>
+      </p:sp>
+      <p:pic>
+        <p:nvPicPr>
+          <p:cNvPr id="57" name="Image 13" descr="preencoded.png">    </p:cNvPr>
+          <p:cNvPicPr>
+            <a:picLocks noChangeAspect="1"/>
+          </p:cNvPicPr>
+          <p:nvPr/>
+        </p:nvPicPr>
+        <p:blipFill>
+          <a:blip r:embed="rId14"/>
+          <a:stretch>
+            <a:fillRect/>
+          </a:stretch>
+        </p:blipFill>
+        <p:spPr>
+          <a:xfrm>
+            <a:off x="10592775" y="1549359"/>
+            <a:ext cx="266273" cy="266273"/>
+          </a:xfrm>
+          <a:prstGeom prst="rect">
+            <a:avLst/>
+          </a:prstGeom>
+        </p:spPr>
+      </p:pic>
+      <p:sp>
+        <p:nvSpPr>
+          <p:cNvPr id="58" name="Text 42"/>
+          <p:cNvSpPr txBox="1"/>
+          <p:nvPr/>
+        </p:nvSpPr>
+        <p:spPr>
+          <a:xfrm>
+            <a:off x="9820656" y="2011680"/>
+            <a:ext cx="1810512" cy="384048"/>
+          </a:xfrm>
+          <a:prstGeom prst="rect">
+            <a:avLst/>
+          </a:prstGeom>
+          <a:noFill/>
+          <a:ln/>
+        </p:spPr>
+        <p:txBody>
+          <a:bodyPr wrap="square" lIns="0" tIns="0" rIns="0" bIns="0" rtlCol="0" anchor="t"/>
+          <a:lstStyle/>
+          <a:p>
+            <a:pPr algn="ctr" indent="0" marL="0">
+              <a:lnSpc>
+                <a:spcPct val="90000"/>
+              </a:lnSpc>
+              <a:buNone/>
+            </a:pPr>
+            <a:r>
+              <a:rPr lang="en-US" sz="1050" b="1" dirty="0">
+                <a:solidFill>
+                  <a:srgbClr val="12304F"/>
+                </a:solidFill>
+                <a:latin typeface="Calibri" pitchFamily="34" charset="0"/>
+                <a:ea typeface="Calibri" pitchFamily="34" charset="-122"/>
+                <a:cs typeface="Calibri" pitchFamily="34" charset="-120"/>
+              </a:rPr>
+              <a:t>Dynamic Recommendation</a:t>
+            </a:r>
+            <a:endParaRPr lang="en-US" sz="1050" dirty="0"/>
+          </a:p>
+        </p:txBody>
+      </p:sp>
+      <p:sp>
+        <p:nvSpPr>
+          <p:cNvPr id="59" name="Text 43"/>
+          <p:cNvSpPr txBox="1"/>
+          <p:nvPr/>
+        </p:nvSpPr>
+        <p:spPr>
+          <a:xfrm>
+            <a:off x="9857232" y="2414016"/>
+            <a:ext cx="1737360" cy="1463040"/>
+          </a:xfrm>
+          <a:prstGeom prst="rect">
+            <a:avLst/>
+          </a:prstGeom>
+          <a:noFill/>
+          <a:ln/>
+        </p:spPr>
+        <p:txBody>
+          <a:bodyPr wrap="square" lIns="0" tIns="0" rIns="0" bIns="0" rtlCol="0" anchor="t"/>
+          <a:lstStyle/>
+          <a:p>
+            <a:pPr algn="ctr" indent="0" marL="0">
+              <a:lnSpc>
+                <a:spcPct val="98000"/>
+              </a:lnSpc>
+              <a:buNone/>
+            </a:pPr>
+            <a:r>
+              <a:rPr lang="en-US" sz="820" dirty="0">
+                <a:solidFill>
+                  <a:srgbClr val="3E5163"/>
+                </a:solidFill>
+                <a:latin typeface="Calibri" pitchFamily="34" charset="0"/>
+                <a:ea typeface="Calibri" pitchFamily="34" charset="-122"/>
+                <a:cs typeface="Calibri" pitchFamily="34" charset="-120"/>
+              </a:rPr>
+              <a:t>Recommend what the look-alikes needed. As a fingerprint shifts, the recommendation updates in near real time.</a:t>
+            </a:r>
+            <a:endParaRPr lang="en-US" sz="820" dirty="0"/>
+          </a:p>
+        </p:txBody>
+      </p:sp>
+      <p:sp>
+        <p:nvSpPr>
+          <p:cNvPr id="60" name="Shape 44"/>
+          <p:cNvSpPr/>
+          <p:nvPr/>
+        </p:nvSpPr>
+        <p:spPr>
+          <a:xfrm>
+            <a:off x="5820156" y="3543300"/>
+            <a:ext cx="82296" cy="82296"/>
+          </a:xfrm>
+          <a:prstGeom prst="ellipse">
+            <a:avLst/>
+          </a:prstGeom>
+          <a:solidFill>
+            <a:srgbClr val="1F6FB0"/>
+          </a:solidFill>
+          <a:ln/>
+        </p:spPr>
+      </p:sp>
+      <p:sp>
+        <p:nvSpPr>
+          <p:cNvPr id="61" name="Shape 45"/>
+          <p:cNvSpPr/>
+          <p:nvPr/>
+        </p:nvSpPr>
+        <p:spPr>
+          <a:xfrm>
+            <a:off x="5975604" y="3433572"/>
+            <a:ext cx="82296" cy="82296"/>
+          </a:xfrm>
+          <a:prstGeom prst="ellipse">
+            <a:avLst/>
+          </a:prstGeom>
+          <a:solidFill>
+            <a:srgbClr val="1F6FB0"/>
+          </a:solidFill>
+          <a:ln/>
+        </p:spPr>
+      </p:sp>
+      <p:sp>
+        <p:nvSpPr>
+          <p:cNvPr id="62" name="Shape 46"/>
+          <p:cNvSpPr/>
+          <p:nvPr/>
+        </p:nvSpPr>
+        <p:spPr>
+          <a:xfrm>
+            <a:off x="5884164" y="3662172"/>
+            <a:ext cx="82296" cy="82296"/>
+          </a:xfrm>
+          <a:prstGeom prst="ellipse">
+            <a:avLst/>
+          </a:prstGeom>
+          <a:solidFill>
+            <a:srgbClr val="1F6FB0"/>
+          </a:solidFill>
+          <a:ln/>
+        </p:spPr>
+      </p:sp>
+      <p:sp>
+        <p:nvSpPr>
+          <p:cNvPr id="63" name="Shape 47"/>
+          <p:cNvSpPr/>
+          <p:nvPr/>
+        </p:nvSpPr>
+        <p:spPr>
+          <a:xfrm>
+            <a:off x="6094476" y="3561588"/>
+            <a:ext cx="82296" cy="82296"/>
+          </a:xfrm>
+          <a:prstGeom prst="ellipse">
+            <a:avLst/>
+          </a:prstGeom>
+          <a:solidFill>
+            <a:srgbClr val="1F6FB0"/>
+          </a:solidFill>
+          <a:ln/>
+        </p:spPr>
+      </p:sp>
+      <p:sp>
+        <p:nvSpPr>
+          <p:cNvPr id="64" name="Shape 48"/>
+          <p:cNvSpPr/>
+          <p:nvPr/>
+        </p:nvSpPr>
+        <p:spPr>
+          <a:xfrm>
+            <a:off x="6643116" y="3497580"/>
+            <a:ext cx="82296" cy="82296"/>
+          </a:xfrm>
+          <a:prstGeom prst="ellipse">
+            <a:avLst/>
+          </a:prstGeom>
+          <a:solidFill>
+            <a:srgbClr val="6A4C93"/>
+          </a:solidFill>
+          <a:ln/>
+        </p:spPr>
+      </p:sp>
+      <p:sp>
+        <p:nvSpPr>
+          <p:cNvPr id="65" name="Shape 49"/>
+          <p:cNvSpPr/>
+          <p:nvPr/>
+        </p:nvSpPr>
+        <p:spPr>
+          <a:xfrm>
+            <a:off x="6798564" y="3616452"/>
+            <a:ext cx="82296" cy="82296"/>
+          </a:xfrm>
+          <a:prstGeom prst="ellipse">
+            <a:avLst/>
+          </a:prstGeom>
+          <a:solidFill>
+            <a:srgbClr val="6A4C93"/>
+          </a:solidFill>
+          <a:ln/>
+        </p:spPr>
+      </p:sp>
+      <p:sp>
+        <p:nvSpPr>
+          <p:cNvPr id="66" name="Shape 50"/>
+          <p:cNvSpPr/>
+          <p:nvPr/>
+        </p:nvSpPr>
+        <p:spPr>
+          <a:xfrm>
+            <a:off x="6734556" y="3396996"/>
+            <a:ext cx="82296" cy="82296"/>
+          </a:xfrm>
+          <a:prstGeom prst="ellipse">
+            <a:avLst/>
+          </a:prstGeom>
+          <a:solidFill>
+            <a:srgbClr val="6A4C93"/>
+          </a:solidFill>
+          <a:ln/>
+        </p:spPr>
+      </p:sp>
+      <p:sp>
+        <p:nvSpPr>
+          <p:cNvPr id="67" name="Shape 51"/>
+          <p:cNvSpPr/>
+          <p:nvPr/>
+        </p:nvSpPr>
+        <p:spPr>
+          <a:xfrm>
+            <a:off x="8476488" y="3547872"/>
+            <a:ext cx="109728" cy="109728"/>
+          </a:xfrm>
+          <a:prstGeom prst="ellipse">
+            <a:avLst/>
+          </a:prstGeom>
+          <a:solidFill>
+            <a:srgbClr val="6A4C93"/>
+          </a:solidFill>
+          <a:ln/>
+        </p:spPr>
+      </p:sp>
+      <p:sp>
+        <p:nvSpPr>
+          <p:cNvPr id="68" name="Shape 52"/>
+          <p:cNvSpPr/>
+          <p:nvPr/>
+        </p:nvSpPr>
+        <p:spPr>
+          <a:xfrm>
+            <a:off x="8238744" y="3547872"/>
+            <a:ext cx="73152" cy="73152"/>
+          </a:xfrm>
+          <a:prstGeom prst="ellipse">
+            <a:avLst/>
+          </a:prstGeom>
+          <a:solidFill>
+            <a:srgbClr val="B9A6D6"/>
+          </a:solidFill>
+          <a:ln/>
+        </p:spPr>
+      </p:sp>
+      <p:sp>
+        <p:nvSpPr>
+          <p:cNvPr id="69" name="Shape 53"/>
+          <p:cNvSpPr/>
+          <p:nvPr/>
+        </p:nvSpPr>
+        <p:spPr>
+          <a:xfrm>
+            <a:off x="8732520" y="3602736"/>
+            <a:ext cx="73152" cy="73152"/>
+          </a:xfrm>
+          <a:prstGeom prst="ellipse">
+            <a:avLst/>
+          </a:prstGeom>
+          <a:solidFill>
+            <a:srgbClr val="B9A6D6"/>
+          </a:solidFill>
+          <a:ln/>
+        </p:spPr>
+      </p:sp>
+      <p:sp>
+        <p:nvSpPr>
+          <p:cNvPr id="70" name="Shape 54"/>
+          <p:cNvSpPr/>
+          <p:nvPr/>
+        </p:nvSpPr>
+        <p:spPr>
+          <a:xfrm>
+            <a:off x="8449056" y="3712464"/>
+            <a:ext cx="73152" cy="73152"/>
+          </a:xfrm>
+          <a:prstGeom prst="ellipse">
+            <a:avLst/>
+          </a:prstGeom>
+          <a:solidFill>
+            <a:srgbClr val="B9A6D6"/>
+          </a:solidFill>
+          <a:ln/>
+        </p:spPr>
+      </p:sp>
+      <p:sp>
+        <p:nvSpPr>
+          <p:cNvPr id="71" name="Shape 55"/>
+          <p:cNvSpPr/>
+          <p:nvPr/>
+        </p:nvSpPr>
+        <p:spPr>
+          <a:xfrm>
+            <a:off x="8604504" y="3419856"/>
+            <a:ext cx="73152" cy="73152"/>
+          </a:xfrm>
+          <a:prstGeom prst="ellipse">
+            <a:avLst/>
+          </a:prstGeom>
+          <a:solidFill>
+            <a:srgbClr val="B9A6D6"/>
+          </a:solidFill>
+          <a:ln/>
+        </p:spPr>
+      </p:sp>
+      <p:sp>
+        <p:nvSpPr>
+          <p:cNvPr id="72" name="Shape 56"/>
+          <p:cNvSpPr/>
+          <p:nvPr/>
+        </p:nvSpPr>
+        <p:spPr>
+          <a:xfrm>
+            <a:off x="4142232" y="4059936"/>
+            <a:ext cx="6583680" cy="0"/>
           </a:xfrm>
           <a:prstGeom prst="line">
             <a:avLst/>
           </a:prstGeom>
           <a:noFill/>
-          <a:ln w="25400">
+          <a:ln w="22225">
+            <a:solidFill>
+              <a:srgbClr val="2E8B63"/>
+            </a:solidFill>
+            <a:prstDash val="solid"/>
+            <a:headEnd type="triangle"/>
+          </a:ln>
+        </p:spPr>
+      </p:sp>
+      <p:sp>
+        <p:nvSpPr>
+          <p:cNvPr id="73" name="Shape 57"/>
+          <p:cNvSpPr/>
+          <p:nvPr/>
+        </p:nvSpPr>
+        <p:spPr>
+          <a:xfrm>
+            <a:off x="4142232" y="3968496"/>
+            <a:ext cx="0" cy="91440"/>
+          </a:xfrm>
+          <a:prstGeom prst="line">
+            <a:avLst/>
+          </a:prstGeom>
+          <a:noFill/>
+          <a:ln w="22225">
+            <a:solidFill>
+              <a:srgbClr val="2E8B63"/>
+            </a:solidFill>
+            <a:prstDash val="solid"/>
+          </a:ln>
+        </p:spPr>
+      </p:sp>
+      <p:sp>
+        <p:nvSpPr>
+          <p:cNvPr id="74" name="Shape 58"/>
+          <p:cNvSpPr/>
+          <p:nvPr/>
+        </p:nvSpPr>
+        <p:spPr>
+          <a:xfrm>
+            <a:off x="10725912" y="3968496"/>
+            <a:ext cx="0" cy="91440"/>
+          </a:xfrm>
+          <a:prstGeom prst="line">
+            <a:avLst/>
+          </a:prstGeom>
+          <a:noFill/>
+          <a:ln w="22225">
+            <a:solidFill>
+              <a:srgbClr val="2E8B63"/>
+            </a:solidFill>
+            <a:prstDash val="solid"/>
+          </a:ln>
+        </p:spPr>
+      </p:sp>
+      <p:sp>
+        <p:nvSpPr>
+          <p:cNvPr id="75" name="Text 59"/>
+          <p:cNvSpPr txBox="1"/>
+          <p:nvPr/>
+        </p:nvSpPr>
+        <p:spPr>
+          <a:xfrm>
+            <a:off x="4142232" y="4087368"/>
+            <a:ext cx="6583680" cy="182880"/>
+          </a:xfrm>
+          <a:prstGeom prst="rect">
+            <a:avLst/>
+          </a:prstGeom>
+          <a:noFill/>
+          <a:ln/>
+        </p:spPr>
+        <p:txBody>
+          <a:bodyPr wrap="square" lIns="0" tIns="0" rIns="0" bIns="0" rtlCol="0" anchor="ctr"/>
+          <a:lstStyle/>
+          <a:p>
+            <a:pPr algn="ctr" indent="0" marL="0">
+              <a:buNone/>
+            </a:pPr>
+            <a:r>
+              <a:rPr lang="en-US" sz="840" b="1" i="1" dirty="0">
+                <a:solidFill>
+                  <a:srgbClr val="2E8B63"/>
+                </a:solidFill>
+                <a:latin typeface="Calibri" pitchFamily="34" charset="0"/>
+                <a:ea typeface="Calibri" pitchFamily="34" charset="-122"/>
+                <a:cs typeface="Calibri" pitchFamily="34" charset="-120"/>
+              </a:rPr>
+              <a:t>Dynamic Preference Evolution — every new behavior updates the fingerprint, keeping recommendations current</a:t>
+            </a:r>
+            <a:endParaRPr lang="en-US" sz="840" dirty="0"/>
+          </a:p>
+        </p:txBody>
+      </p:sp>
+      <p:sp>
+        <p:nvSpPr>
+          <p:cNvPr id="76" name="Shape 60"/>
+          <p:cNvSpPr/>
+          <p:nvPr/>
+        </p:nvSpPr>
+        <p:spPr>
+          <a:xfrm>
+            <a:off x="365760" y="4315968"/>
+            <a:ext cx="11430000" cy="0"/>
+          </a:xfrm>
+          <a:prstGeom prst="line">
+            <a:avLst/>
+          </a:prstGeom>
+          <a:noFill/>
+          <a:ln w="12700">
+            <a:solidFill>
+              <a:srgbClr val="D2E1EE"/>
+            </a:solidFill>
+            <a:prstDash val="solid"/>
+          </a:ln>
+        </p:spPr>
+      </p:sp>
+      <p:sp>
+        <p:nvSpPr>
+          <p:cNvPr id="77" name="Shape 61"/>
+          <p:cNvSpPr/>
+          <p:nvPr/>
+        </p:nvSpPr>
+        <p:spPr>
+          <a:xfrm>
+            <a:off x="365760" y="4407408"/>
+            <a:ext cx="5394960" cy="2048256"/>
+          </a:xfrm>
+          <a:prstGeom prst="roundRect">
+            <a:avLst>
+              <a:gd name="adj" fmla="val 3571"/>
+            </a:avLst>
+          </a:prstGeom>
+          <a:solidFill>
+            <a:srgbClr val="EEF5FB"/>
+          </a:solidFill>
+          <a:ln w="12700">
+            <a:solidFill>
+              <a:srgbClr val="D2E1EE"/>
+            </a:solidFill>
+            <a:prstDash val="solid"/>
+          </a:ln>
+        </p:spPr>
+      </p:sp>
+      <p:sp>
+        <p:nvSpPr>
+          <p:cNvPr id="78" name="Text 62"/>
+          <p:cNvSpPr txBox="1"/>
+          <p:nvPr/>
+        </p:nvSpPr>
+        <p:spPr>
+          <a:xfrm>
+            <a:off x="548640" y="4535424"/>
+            <a:ext cx="5029200" cy="274320"/>
+          </a:xfrm>
+          <a:prstGeom prst="rect">
+            <a:avLst/>
+          </a:prstGeom>
+          <a:noFill/>
+          <a:ln/>
+        </p:spPr>
+        <p:txBody>
+          <a:bodyPr wrap="square" lIns="0" tIns="0" rIns="0" bIns="0" rtlCol="0" anchor="t"/>
+          <a:lstStyle/>
+          <a:p>
+            <a:pPr indent="0" marL="0">
+              <a:buNone/>
+            </a:pPr>
+            <a:r>
+              <a:rPr lang="en-US" sz="1300" b="1" dirty="0">
+                <a:solidFill>
+                  <a:srgbClr val="12304F"/>
+                </a:solidFill>
+                <a:latin typeface="Calibri" pitchFamily="34" charset="0"/>
+                <a:ea typeface="Calibri" pitchFamily="34" charset="-122"/>
+                <a:cs typeface="Calibri" pitchFamily="34" charset="-120"/>
+              </a:rPr>
+              <a:t>Why dynamic beats static</a:t>
+            </a:r>
+            <a:endParaRPr lang="en-US" sz="1300" dirty="0"/>
+          </a:p>
+        </p:txBody>
+      </p:sp>
+      <p:sp>
+        <p:nvSpPr>
+          <p:cNvPr id="79" name="Shape 63"/>
+          <p:cNvSpPr/>
+          <p:nvPr/>
+        </p:nvSpPr>
+        <p:spPr>
+          <a:xfrm>
+            <a:off x="521208" y="4873752"/>
+            <a:ext cx="384048" cy="384048"/>
+          </a:xfrm>
+          <a:prstGeom prst="ellipse">
+            <a:avLst/>
+          </a:prstGeom>
+          <a:solidFill>
+            <a:srgbClr val="CF8A18"/>
+          </a:solidFill>
+          <a:ln/>
+        </p:spPr>
+      </p:sp>
+      <p:pic>
+        <p:nvPicPr>
+          <p:cNvPr id="80" name="Image 14" descr="preencoded.png">    </p:cNvPr>
+          <p:cNvPicPr>
+            <a:picLocks noChangeAspect="1"/>
+          </p:cNvPicPr>
+          <p:nvPr/>
+        </p:nvPicPr>
+        <p:blipFill>
+          <a:blip r:embed="rId15"/>
+          <a:stretch>
+            <a:fillRect/>
+          </a:stretch>
+        </p:blipFill>
+        <p:spPr>
+          <a:xfrm>
+            <a:off x="613380" y="4965924"/>
+            <a:ext cx="199705" cy="199705"/>
+          </a:xfrm>
+          <a:prstGeom prst="rect">
+            <a:avLst/>
+          </a:prstGeom>
+        </p:spPr>
+      </p:pic>
+      <p:sp>
+        <p:nvSpPr>
+          <p:cNvPr id="81" name="Text 64"/>
+          <p:cNvSpPr txBox="1"/>
+          <p:nvPr/>
+        </p:nvSpPr>
+        <p:spPr>
+          <a:xfrm>
+            <a:off x="1024128" y="4901184"/>
+            <a:ext cx="4617720" cy="603504"/>
+          </a:xfrm>
+          <a:prstGeom prst="rect">
+            <a:avLst/>
+          </a:prstGeom>
+          <a:noFill/>
+          <a:ln/>
+        </p:spPr>
+        <p:txBody>
+          <a:bodyPr wrap="square" lIns="0" tIns="0" rIns="0" bIns="0" rtlCol="0" anchor="t"/>
+          <a:lstStyle/>
+          <a:p>
+            <a:pPr indent="0" marL="0">
+              <a:lnSpc>
+                <a:spcPct val="96000"/>
+              </a:lnSpc>
+              <a:buNone/>
+            </a:pPr>
+            <a:r>
+              <a:rPr lang="en-US" sz="1050" b="1" dirty="0">
+                <a:solidFill>
+                  <a:srgbClr val="CF8A18"/>
+                </a:solidFill>
+                <a:latin typeface="Calibri" pitchFamily="34" charset="0"/>
+                <a:ea typeface="Calibri" pitchFamily="34" charset="-122"/>
+                <a:cs typeface="Calibri" pitchFamily="34" charset="-120"/>
+              </a:rPr>
+              <a:t>Static (today)   </a:t>
+            </a:r>
+            <a:pPr indent="0" marL="0">
+              <a:lnSpc>
+                <a:spcPct val="96000"/>
+              </a:lnSpc>
+              <a:buNone/>
+            </a:pPr>
+            <a:r>
+              <a:rPr lang="en-US" sz="930" dirty="0">
+                <a:solidFill>
+                  <a:srgbClr val="3E5163"/>
+                </a:solidFill>
+                <a:latin typeface="Calibri" pitchFamily="34" charset="0"/>
+                <a:ea typeface="Calibri" pitchFamily="34" charset="-122"/>
+                <a:cs typeface="Calibri" pitchFamily="34" charset="-120"/>
+              </a:rPr>
+              <a:t>One fixed set of variables. Add or drop a feature and the model breaks or must be rebuilt from scratch.</a:t>
+            </a:r>
+            <a:endParaRPr lang="en-US" sz="1050" dirty="0"/>
+          </a:p>
+        </p:txBody>
+      </p:sp>
+      <p:sp>
+        <p:nvSpPr>
+          <p:cNvPr id="82" name="Shape 65"/>
+          <p:cNvSpPr/>
+          <p:nvPr/>
+        </p:nvSpPr>
+        <p:spPr>
+          <a:xfrm>
+            <a:off x="521208" y="5660136"/>
+            <a:ext cx="384048" cy="384048"/>
+          </a:xfrm>
+          <a:prstGeom prst="ellipse">
+            <a:avLst/>
+          </a:prstGeom>
+          <a:solidFill>
+            <a:srgbClr val="0E7C86"/>
+          </a:solidFill>
+          <a:ln/>
+        </p:spPr>
+      </p:sp>
+      <p:pic>
+        <p:nvPicPr>
+          <p:cNvPr id="83" name="Image 15" descr="preencoded.png">    </p:cNvPr>
+          <p:cNvPicPr>
+            <a:picLocks noChangeAspect="1"/>
+          </p:cNvPicPr>
+          <p:nvPr/>
+        </p:nvPicPr>
+        <p:blipFill>
+          <a:blip r:embed="rId16"/>
+          <a:stretch>
+            <a:fillRect/>
+          </a:stretch>
+        </p:blipFill>
+        <p:spPr>
+          <a:xfrm>
+            <a:off x="613380" y="5752308"/>
+            <a:ext cx="199705" cy="199705"/>
+          </a:xfrm>
+          <a:prstGeom prst="rect">
+            <a:avLst/>
+          </a:prstGeom>
+        </p:spPr>
+      </p:pic>
+      <p:sp>
+        <p:nvSpPr>
+          <p:cNvPr id="84" name="Text 66"/>
+          <p:cNvSpPr txBox="1"/>
+          <p:nvPr/>
+        </p:nvSpPr>
+        <p:spPr>
+          <a:xfrm>
+            <a:off x="1024128" y="5687568"/>
+            <a:ext cx="4617720" cy="603504"/>
+          </a:xfrm>
+          <a:prstGeom prst="rect">
+            <a:avLst/>
+          </a:prstGeom>
+          <a:noFill/>
+          <a:ln/>
+        </p:spPr>
+        <p:txBody>
+          <a:bodyPr wrap="square" lIns="0" tIns="0" rIns="0" bIns="0" rtlCol="0" anchor="t"/>
+          <a:lstStyle/>
+          <a:p>
+            <a:pPr indent="0" marL="0">
+              <a:lnSpc>
+                <a:spcPct val="96000"/>
+              </a:lnSpc>
+              <a:buNone/>
+            </a:pPr>
+            <a:r>
+              <a:rPr lang="en-US" sz="1050" b="1" dirty="0">
+                <a:solidFill>
+                  <a:srgbClr val="0E7C86"/>
+                </a:solidFill>
+                <a:latin typeface="Calibri" pitchFamily="34" charset="0"/>
+                <a:ea typeface="Calibri" pitchFamily="34" charset="-122"/>
+                <a:cs typeface="Calibri" pitchFamily="34" charset="-120"/>
+              </a:rPr>
+              <a:t>Dynamic (proposed)   </a:t>
+            </a:r>
+            <a:pPr indent="0" marL="0">
+              <a:lnSpc>
+                <a:spcPct val="96000"/>
+              </a:lnSpc>
+              <a:buNone/>
+            </a:pPr>
+            <a:r>
+              <a:rPr lang="en-US" sz="930" dirty="0">
+                <a:solidFill>
+                  <a:srgbClr val="3E5163"/>
+                </a:solidFill>
+                <a:latin typeface="Calibri" pitchFamily="34" charset="0"/>
+                <a:ea typeface="Calibri" pitchFamily="34" charset="-122"/>
+                <a:cs typeface="Calibri" pitchFamily="34" charset="-120"/>
+              </a:rPr>
+              <a:t>The fingerprint simply grows with each new signal, so the engine keeps working — and only gets sharper.</a:t>
+            </a:r>
+            <a:endParaRPr lang="en-US" sz="1050" dirty="0"/>
+          </a:p>
+        </p:txBody>
+      </p:sp>
+      <p:sp>
+        <p:nvSpPr>
+          <p:cNvPr id="85" name="Shape 67"/>
+          <p:cNvSpPr/>
+          <p:nvPr/>
+        </p:nvSpPr>
+        <p:spPr>
+          <a:xfrm>
+            <a:off x="5989320" y="4407408"/>
+            <a:ext cx="5806440" cy="2048256"/>
+          </a:xfrm>
+          <a:prstGeom prst="roundRect">
+            <a:avLst>
+              <a:gd name="adj" fmla="val 3571"/>
+            </a:avLst>
+          </a:prstGeom>
+          <a:solidFill>
+            <a:srgbClr val="EEF5FB"/>
+          </a:solidFill>
+          <a:ln w="12700">
             <a:solidFill>
               <a:srgbClr val="0E7C86"/>
             </a:solidFill>
             <a:prstDash val="solid"/>
-            <a:headEnd type="triangle"/>
-            <a:tailEnd type="triangle"/>
           </a:ln>
         </p:spPr>
       </p:sp>
       <p:sp>
         <p:nvSpPr>
-          <p:cNvPr id="88" name="Text 75"/>
-          <p:cNvSpPr txBox="1"/>
-          <p:nvPr/>
-        </p:nvSpPr>
-        <p:spPr>
-          <a:xfrm>
-            <a:off x="3127248" y="6117336"/>
-            <a:ext cx="8604504" cy="219456"/>
+          <p:cNvPr id="86" name="Text 68"/>
+          <p:cNvSpPr txBox="1"/>
+          <p:nvPr/>
+        </p:nvSpPr>
+        <p:spPr>
+          <a:xfrm>
+            <a:off x="6172200" y="4535424"/>
+            <a:ext cx="5440680" cy="274320"/>
           </a:xfrm>
           <a:prstGeom prst="rect">
             <a:avLst/>
@@ -6789,11 +6516,290 @@
           <a:bodyPr wrap="square" lIns="0" tIns="0" rIns="0" bIns="0" rtlCol="0" anchor="t"/>
           <a:lstStyle/>
           <a:p>
+            <a:pPr indent="0" marL="0">
+              <a:buNone/>
+            </a:pPr>
+            <a:r>
+              <a:rPr lang="en-US" sz="1300" b="1" dirty="0">
+                <a:solidFill>
+                  <a:srgbClr val="12304F"/>
+                </a:solidFill>
+                <a:latin typeface="Calibri" pitchFamily="34" charset="0"/>
+                <a:ea typeface="Calibri" pitchFamily="34" charset="-122"/>
+                <a:cs typeface="Calibri" pitchFamily="34" charset="-120"/>
+              </a:rPr>
+              <a:t>Preferences that move — a real example</a:t>
+            </a:r>
+            <a:endParaRPr lang="en-US" sz="1300" dirty="0"/>
+          </a:p>
+        </p:txBody>
+      </p:sp>
+      <p:sp>
+        <p:nvSpPr>
+          <p:cNvPr id="87" name="Shape 69"/>
+          <p:cNvSpPr/>
+          <p:nvPr/>
+        </p:nvSpPr>
+        <p:spPr>
+          <a:xfrm>
+            <a:off x="6190488" y="5065776"/>
+            <a:ext cx="1371600" cy="603504"/>
+          </a:xfrm>
+          <a:prstGeom prst="roundRect">
+            <a:avLst>
+              <a:gd name="adj" fmla="val 13636"/>
+            </a:avLst>
+          </a:prstGeom>
+          <a:solidFill>
+            <a:srgbClr val="FFFFFF"/>
+          </a:solidFill>
+          <a:ln w="12700">
+            <a:solidFill>
+              <a:srgbClr val="1F6FB0"/>
+            </a:solidFill>
+            <a:prstDash val="solid"/>
+          </a:ln>
+        </p:spPr>
+      </p:sp>
+      <p:sp>
+        <p:nvSpPr>
+          <p:cNvPr id="88" name="Shape 70"/>
+          <p:cNvSpPr/>
+          <p:nvPr/>
+        </p:nvSpPr>
+        <p:spPr>
+          <a:xfrm>
+            <a:off x="6336792" y="5202936"/>
+            <a:ext cx="329184" cy="329184"/>
+          </a:xfrm>
+          <a:prstGeom prst="ellipse">
+            <a:avLst/>
+          </a:prstGeom>
+          <a:solidFill>
+            <a:srgbClr val="1F6FB0"/>
+          </a:solidFill>
+          <a:ln/>
+        </p:spPr>
+      </p:sp>
+      <p:pic>
+        <p:nvPicPr>
+          <p:cNvPr id="89" name="Image 16" descr="preencoded.png">    </p:cNvPr>
+          <p:cNvPicPr>
+            <a:picLocks noChangeAspect="1"/>
+          </p:cNvPicPr>
+          <p:nvPr/>
+        </p:nvPicPr>
+        <p:blipFill>
+          <a:blip r:embed="rId17"/>
+          <a:stretch>
+            <a:fillRect/>
+          </a:stretch>
+        </p:blipFill>
+        <p:spPr>
+          <a:xfrm>
+            <a:off x="6415796" y="5281940"/>
+            <a:ext cx="171176" cy="171176"/>
+          </a:xfrm>
+          <a:prstGeom prst="rect">
+            <a:avLst/>
+          </a:prstGeom>
+        </p:spPr>
+      </p:pic>
+      <p:sp>
+        <p:nvSpPr>
+          <p:cNvPr id="90" name="Text 71"/>
+          <p:cNvSpPr txBox="1"/>
+          <p:nvPr/>
+        </p:nvSpPr>
+        <p:spPr>
+          <a:xfrm>
+            <a:off x="6702552" y="5065776"/>
+            <a:ext cx="822960" cy="603504"/>
+          </a:xfrm>
+          <a:prstGeom prst="rect">
+            <a:avLst/>
+          </a:prstGeom>
+          <a:noFill/>
+          <a:ln/>
+        </p:spPr>
+        <p:txBody>
+          <a:bodyPr wrap="square" lIns="0" tIns="0" rIns="0" bIns="0" rtlCol="0" anchor="ctr"/>
+          <a:lstStyle/>
+          <a:p>
+            <a:pPr indent="0" marL="0">
+              <a:buNone/>
+            </a:pPr>
+            <a:r>
+              <a:rPr lang="en-US" sz="950" b="1" dirty="0">
+                <a:solidFill>
+                  <a:srgbClr val="12304F"/>
+                </a:solidFill>
+                <a:latin typeface="Calibri" pitchFamily="34" charset="0"/>
+                <a:ea typeface="Calibri" pitchFamily="34" charset="-122"/>
+                <a:cs typeface="Calibri" pitchFamily="34" charset="-120"/>
+              </a:rPr>
+              <a:t>Motor cover</a:t>
+            </a:r>
+            <a:endParaRPr lang="en-US" sz="950" dirty="0"/>
+          </a:p>
+        </p:txBody>
+      </p:sp>
+      <p:sp>
+        <p:nvSpPr>
+          <p:cNvPr id="91" name="Shape 72"/>
+          <p:cNvSpPr/>
+          <p:nvPr/>
+        </p:nvSpPr>
+        <p:spPr>
+          <a:xfrm>
+            <a:off x="10222992" y="5065776"/>
+            <a:ext cx="1371600" cy="603504"/>
+          </a:xfrm>
+          <a:prstGeom prst="roundRect">
+            <a:avLst>
+              <a:gd name="adj" fmla="val 13636"/>
+            </a:avLst>
+          </a:prstGeom>
+          <a:solidFill>
+            <a:srgbClr val="FFFFFF"/>
+          </a:solidFill>
+          <a:ln w="12700">
+            <a:solidFill>
+              <a:srgbClr val="2E8B63"/>
+            </a:solidFill>
+            <a:prstDash val="solid"/>
+          </a:ln>
+        </p:spPr>
+      </p:sp>
+      <p:sp>
+        <p:nvSpPr>
+          <p:cNvPr id="92" name="Shape 73"/>
+          <p:cNvSpPr/>
+          <p:nvPr/>
+        </p:nvSpPr>
+        <p:spPr>
+          <a:xfrm>
+            <a:off x="10369296" y="5202936"/>
+            <a:ext cx="329184" cy="329184"/>
+          </a:xfrm>
+          <a:prstGeom prst="ellipse">
+            <a:avLst/>
+          </a:prstGeom>
+          <a:solidFill>
+            <a:srgbClr val="2E8B63"/>
+          </a:solidFill>
+          <a:ln/>
+        </p:spPr>
+      </p:sp>
+      <p:pic>
+        <p:nvPicPr>
+          <p:cNvPr id="93" name="Image 17" descr="preencoded.png">    </p:cNvPr>
+          <p:cNvPicPr>
+            <a:picLocks noChangeAspect="1"/>
+          </p:cNvPicPr>
+          <p:nvPr/>
+        </p:nvPicPr>
+        <p:blipFill>
+          <a:blip r:embed="rId18"/>
+          <a:stretch>
+            <a:fillRect/>
+          </a:stretch>
+        </p:blipFill>
+        <p:spPr>
+          <a:xfrm>
+            <a:off x="10448300" y="5281940"/>
+            <a:ext cx="171176" cy="171176"/>
+          </a:xfrm>
+          <a:prstGeom prst="rect">
+            <a:avLst/>
+          </a:prstGeom>
+        </p:spPr>
+      </p:pic>
+      <p:sp>
+        <p:nvSpPr>
+          <p:cNvPr id="94" name="Text 74"/>
+          <p:cNvSpPr txBox="1"/>
+          <p:nvPr/>
+        </p:nvSpPr>
+        <p:spPr>
+          <a:xfrm>
+            <a:off x="10735056" y="5065776"/>
+            <a:ext cx="822960" cy="603504"/>
+          </a:xfrm>
+          <a:prstGeom prst="rect">
+            <a:avLst/>
+          </a:prstGeom>
+          <a:noFill/>
+          <a:ln/>
+        </p:spPr>
+        <p:txBody>
+          <a:bodyPr wrap="square" lIns="0" tIns="0" rIns="0" bIns="0" rtlCol="0" anchor="ctr"/>
+          <a:lstStyle/>
+          <a:p>
+            <a:pPr indent="0" marL="0">
+              <a:buNone/>
+            </a:pPr>
+            <a:r>
+              <a:rPr lang="en-US" sz="950" b="1" dirty="0">
+                <a:solidFill>
+                  <a:srgbClr val="12304F"/>
+                </a:solidFill>
+                <a:latin typeface="Calibri" pitchFamily="34" charset="0"/>
+                <a:ea typeface="Calibri" pitchFamily="34" charset="-122"/>
+                <a:cs typeface="Calibri" pitchFamily="34" charset="-120"/>
+              </a:rPr>
+              <a:t>Health cover</a:t>
+            </a:r>
+            <a:endParaRPr lang="en-US" sz="950" dirty="0"/>
+          </a:p>
+        </p:txBody>
+      </p:sp>
+      <p:sp>
+        <p:nvSpPr>
+          <p:cNvPr id="95" name="Shape 75"/>
+          <p:cNvSpPr/>
+          <p:nvPr/>
+        </p:nvSpPr>
+        <p:spPr>
+          <a:xfrm>
+            <a:off x="7616952" y="5266944"/>
+            <a:ext cx="2551176" cy="201168"/>
+          </a:xfrm>
+          <a:prstGeom prst="rightArrow">
+            <a:avLst/>
+          </a:prstGeom>
+          <a:solidFill>
+            <a:srgbClr val="0E7C86"/>
+          </a:solidFill>
+          <a:ln/>
+        </p:spPr>
+      </p:sp>
+      <p:sp>
+        <p:nvSpPr>
+          <p:cNvPr id="96" name="Text 76"/>
+          <p:cNvSpPr txBox="1"/>
+          <p:nvPr/>
+        </p:nvSpPr>
+        <p:spPr>
+          <a:xfrm>
+            <a:off x="7434072" y="5120640"/>
+            <a:ext cx="2916936" cy="182880"/>
+          </a:xfrm>
+          <a:prstGeom prst="rect">
+            <a:avLst/>
+          </a:prstGeom>
+          <a:noFill/>
+          <a:ln/>
+        </p:spPr>
+        <p:txBody>
+          <a:bodyPr wrap="square" lIns="0" tIns="0" rIns="0" bIns="0" rtlCol="0" anchor="t"/>
+          <a:lstStyle/>
+          <a:p>
             <a:pPr algn="ctr" indent="0" marL="0">
               <a:buNone/>
             </a:pPr>
             <a:r>
-              <a:rPr lang="en-US" sz="900" b="1" i="1" dirty="0">
+              <a:rPr lang="en-US" sz="800" b="1" i="1" dirty="0">
                 <a:solidFill>
                   <a:srgbClr val="0E7C86"/>
                 </a:solidFill>
@@ -6801,9 +6807,51 @@
                 <a:ea typeface="Calibri" pitchFamily="34" charset="-122"/>
                 <a:cs typeface="Calibri" pitchFamily="34" charset="-120"/>
               </a:rPr>
-              <a:t>Customers move freely between segments as their needs change or new products launch</a:t>
-            </a:r>
-            <a:endParaRPr lang="en-US" sz="900" dirty="0"/>
+              <a:t>10 days browsing health</a:t>
+            </a:r>
+            <a:endParaRPr lang="en-US" sz="800" dirty="0"/>
+          </a:p>
+        </p:txBody>
+      </p:sp>
+      <p:sp>
+        <p:nvSpPr>
+          <p:cNvPr id="97" name="Text 77"/>
+          <p:cNvSpPr txBox="1"/>
+          <p:nvPr/>
+        </p:nvSpPr>
+        <p:spPr>
+          <a:xfrm>
+            <a:off x="6190488" y="5815584"/>
+            <a:ext cx="5404104" cy="566928"/>
+          </a:xfrm>
+          <a:prstGeom prst="rect">
+            <a:avLst/>
+          </a:prstGeom>
+          <a:noFill/>
+          <a:ln/>
+        </p:spPr>
+        <p:txBody>
+          <a:bodyPr wrap="square" lIns="0" tIns="0" rIns="0" bIns="0" rtlCol="0" anchor="t"/>
+          <a:lstStyle/>
+          <a:p>
+            <a:pPr indent="0" marL="0">
+              <a:lnSpc>
+                <a:spcPct val="98000"/>
+              </a:lnSpc>
+              <a:buNone/>
+            </a:pPr>
+            <a:r>
+              <a:rPr lang="en-US" sz="930" dirty="0">
+                <a:solidFill>
+                  <a:srgbClr val="3E5163"/>
+                </a:solidFill>
+                <a:latin typeface="Calibri" pitchFamily="34" charset="0"/>
+                <a:ea typeface="Calibri" pitchFamily="34" charset="-122"/>
+                <a:cs typeface="Calibri" pitchFamily="34" charset="-120"/>
+              </a:rPr>
+              <a:t>A motor customer who spends 10 days exploring health cover sees their fingerprint shift — so recommendations move from motor to health in near real time. Any new customer with a similar fingerprint gets the same timely nudge.</a:t>
+            </a:r>
+            <a:endParaRPr lang="en-US" sz="930" dirty="0"/>
           </a:p>
         </p:txBody>
       </p:sp>
